--- a/booklets/Presentazione_Project-42.pptx
+++ b/booklets/Presentazione_Project-42.pptx
@@ -384,7 +384,11 @@
               <a:spcAft>
                 <a:spcPts val="0"/>
               </a:spcAft>
-              <a:buSzPts val="1400"/>
+              <a:buClr>
+                <a:srgbClr val="000000"/>
+              </a:buClr>
+              <a:buSzPts val="1400"/>
+              <a:buFont typeface="Arial"/>
               <a:buNone/>
               <a:defRPr b="0" i="0" sz="900" u="none" cap="none" strike="noStrike">
                 <a:solidFill>
@@ -406,7 +410,11 @@
               <a:spcAft>
                 <a:spcPts val="0"/>
               </a:spcAft>
-              <a:buSzPts val="1400"/>
+              <a:buClr>
+                <a:srgbClr val="000000"/>
+              </a:buClr>
+              <a:buSzPts val="1400"/>
+              <a:buFont typeface="Arial"/>
               <a:buNone/>
               <a:defRPr b="0" i="0" sz="900" u="none" cap="none" strike="noStrike">
                 <a:solidFill>
@@ -428,7 +436,11 @@
               <a:spcAft>
                 <a:spcPts val="0"/>
               </a:spcAft>
-              <a:buSzPts val="1400"/>
+              <a:buClr>
+                <a:srgbClr val="000000"/>
+              </a:buClr>
+              <a:buSzPts val="1400"/>
+              <a:buFont typeface="Arial"/>
               <a:buNone/>
               <a:defRPr b="0" i="0" sz="900" u="none" cap="none" strike="noStrike">
                 <a:solidFill>
@@ -450,7 +462,11 @@
               <a:spcAft>
                 <a:spcPts val="0"/>
               </a:spcAft>
-              <a:buSzPts val="1400"/>
+              <a:buClr>
+                <a:srgbClr val="000000"/>
+              </a:buClr>
+              <a:buSzPts val="1400"/>
+              <a:buFont typeface="Arial"/>
               <a:buNone/>
               <a:defRPr b="0" i="0" sz="900" u="none" cap="none" strike="noStrike">
                 <a:solidFill>
@@ -472,7 +488,11 @@
               <a:spcAft>
                 <a:spcPts val="0"/>
               </a:spcAft>
-              <a:buSzPts val="1400"/>
+              <a:buClr>
+                <a:srgbClr val="000000"/>
+              </a:buClr>
+              <a:buSzPts val="1400"/>
+              <a:buFont typeface="Arial"/>
               <a:buNone/>
               <a:defRPr b="0" i="0" sz="900" u="none" cap="none" strike="noStrike">
                 <a:solidFill>
@@ -494,7 +514,11 @@
               <a:spcAft>
                 <a:spcPts val="0"/>
               </a:spcAft>
-              <a:buSzPts val="1400"/>
+              <a:buClr>
+                <a:srgbClr val="000000"/>
+              </a:buClr>
+              <a:buSzPts val="1400"/>
+              <a:buFont typeface="Arial"/>
               <a:buNone/>
               <a:defRPr b="0" i="0" sz="900" u="none" cap="none" strike="noStrike">
                 <a:solidFill>
@@ -516,7 +540,11 @@
               <a:spcAft>
                 <a:spcPts val="0"/>
               </a:spcAft>
-              <a:buSzPts val="1400"/>
+              <a:buClr>
+                <a:srgbClr val="000000"/>
+              </a:buClr>
+              <a:buSzPts val="1400"/>
+              <a:buFont typeface="Arial"/>
               <a:buNone/>
               <a:defRPr b="0" i="0" sz="900" u="none" cap="none" strike="noStrike">
                 <a:solidFill>
@@ -538,7 +566,11 @@
               <a:spcAft>
                 <a:spcPts val="0"/>
               </a:spcAft>
-              <a:buSzPts val="1400"/>
+              <a:buClr>
+                <a:srgbClr val="000000"/>
+              </a:buClr>
+              <a:buSzPts val="1400"/>
+              <a:buFont typeface="Arial"/>
               <a:buNone/>
               <a:defRPr b="0" i="0" sz="900" u="none" cap="none" strike="noStrike">
                 <a:solidFill>
@@ -560,7 +592,11 @@
               <a:spcAft>
                 <a:spcPts val="0"/>
               </a:spcAft>
-              <a:buSzPts val="1400"/>
+              <a:buClr>
+                <a:srgbClr val="000000"/>
+              </a:buClr>
+              <a:buSzPts val="1400"/>
+              <a:buFont typeface="Arial"/>
               <a:buNone/>
               <a:defRPr b="0" i="0" sz="900" u="none" cap="none" strike="noStrike">
                 <a:solidFill>
@@ -612,7 +648,11 @@
               <a:spcAft>
                 <a:spcPts val="0"/>
               </a:spcAft>
-              <a:buSzPts val="1400"/>
+              <a:buClr>
+                <a:srgbClr val="000000"/>
+              </a:buClr>
+              <a:buSzPts val="1400"/>
+              <a:buFont typeface="Arial"/>
               <a:buNone/>
               <a:defRPr b="0" i="0" sz="900" u="none" cap="none" strike="noStrike">
                 <a:solidFill>
@@ -634,7 +674,11 @@
               <a:spcAft>
                 <a:spcPts val="0"/>
               </a:spcAft>
-              <a:buSzPts val="1400"/>
+              <a:buClr>
+                <a:srgbClr val="000000"/>
+              </a:buClr>
+              <a:buSzPts val="1400"/>
+              <a:buFont typeface="Arial"/>
               <a:buNone/>
               <a:defRPr b="0" i="0" sz="900" u="none" cap="none" strike="noStrike">
                 <a:solidFill>
@@ -656,7 +700,11 @@
               <a:spcAft>
                 <a:spcPts val="0"/>
               </a:spcAft>
-              <a:buSzPts val="1400"/>
+              <a:buClr>
+                <a:srgbClr val="000000"/>
+              </a:buClr>
+              <a:buSzPts val="1400"/>
+              <a:buFont typeface="Arial"/>
               <a:buNone/>
               <a:defRPr b="0" i="0" sz="900" u="none" cap="none" strike="noStrike">
                 <a:solidFill>
@@ -678,7 +726,11 @@
               <a:spcAft>
                 <a:spcPts val="0"/>
               </a:spcAft>
-              <a:buSzPts val="1400"/>
+              <a:buClr>
+                <a:srgbClr val="000000"/>
+              </a:buClr>
+              <a:buSzPts val="1400"/>
+              <a:buFont typeface="Arial"/>
               <a:buNone/>
               <a:defRPr b="0" i="0" sz="900" u="none" cap="none" strike="noStrike">
                 <a:solidFill>
@@ -700,7 +752,11 @@
               <a:spcAft>
                 <a:spcPts val="0"/>
               </a:spcAft>
-              <a:buSzPts val="1400"/>
+              <a:buClr>
+                <a:srgbClr val="000000"/>
+              </a:buClr>
+              <a:buSzPts val="1400"/>
+              <a:buFont typeface="Arial"/>
               <a:buNone/>
               <a:defRPr b="0" i="0" sz="900" u="none" cap="none" strike="noStrike">
                 <a:solidFill>
@@ -722,7 +778,11 @@
               <a:spcAft>
                 <a:spcPts val="0"/>
               </a:spcAft>
-              <a:buSzPts val="1400"/>
+              <a:buClr>
+                <a:srgbClr val="000000"/>
+              </a:buClr>
+              <a:buSzPts val="1400"/>
+              <a:buFont typeface="Arial"/>
               <a:buNone/>
               <a:defRPr b="0" i="0" sz="900" u="none" cap="none" strike="noStrike">
                 <a:solidFill>
@@ -744,7 +804,11 @@
               <a:spcAft>
                 <a:spcPts val="0"/>
               </a:spcAft>
-              <a:buSzPts val="1400"/>
+              <a:buClr>
+                <a:srgbClr val="000000"/>
+              </a:buClr>
+              <a:buSzPts val="1400"/>
+              <a:buFont typeface="Arial"/>
               <a:buNone/>
               <a:defRPr b="0" i="0" sz="900" u="none" cap="none" strike="noStrike">
                 <a:solidFill>
@@ -766,7 +830,11 @@
               <a:spcAft>
                 <a:spcPts val="0"/>
               </a:spcAft>
-              <a:buSzPts val="1400"/>
+              <a:buClr>
+                <a:srgbClr val="000000"/>
+              </a:buClr>
+              <a:buSzPts val="1400"/>
+              <a:buFont typeface="Arial"/>
               <a:buNone/>
               <a:defRPr b="0" i="0" sz="900" u="none" cap="none" strike="noStrike">
                 <a:solidFill>
@@ -788,7 +856,11 @@
               <a:spcAft>
                 <a:spcPts val="0"/>
               </a:spcAft>
-              <a:buSzPts val="1400"/>
+              <a:buClr>
+                <a:srgbClr val="000000"/>
+              </a:buClr>
+              <a:buSzPts val="1400"/>
+              <a:buFont typeface="Arial"/>
               <a:buNone/>
               <a:defRPr b="0" i="0" sz="900" u="none" cap="none" strike="noStrike">
                 <a:solidFill>
@@ -876,103 +948,238 @@
           </a:bodyPr>
           <a:lstStyle>
             <a:lvl1pPr indent="-228600" lvl="0" marL="457200" marR="0" rtl="0" algn="l">
-              <a:spcBef>
-                <a:spcPts val="0"/>
-              </a:spcBef>
-              <a:spcAft>
-                <a:spcPts val="0"/>
-              </a:spcAft>
-              <a:buSzPts val="1400"/>
-              <a:buNone/>
-              <a:defRPr b="0" i="0" sz="1800" u="none" cap="none" strike="noStrike"/>
+              <a:lnSpc>
+                <a:spcPct val="100000"/>
+              </a:lnSpc>
+              <a:spcBef>
+                <a:spcPts val="0"/>
+              </a:spcBef>
+              <a:spcAft>
+                <a:spcPts val="0"/>
+              </a:spcAft>
+              <a:buClr>
+                <a:srgbClr val="000000"/>
+              </a:buClr>
+              <a:buSzPts val="1400"/>
+              <a:buFont typeface="Arial"/>
+              <a:buNone/>
+              <a:defRPr b="0" i="0" sz="1800" u="none" cap="none" strike="noStrike">
+                <a:solidFill>
+                  <a:srgbClr val="000000"/>
+                </a:solidFill>
+                <a:latin typeface="Arial"/>
+                <a:ea typeface="Arial"/>
+                <a:cs typeface="Arial"/>
+                <a:sym typeface="Arial"/>
+              </a:defRPr>
             </a:lvl1pPr>
             <a:lvl2pPr indent="-228600" lvl="1" marL="914400" marR="0" rtl="0" algn="l">
-              <a:spcBef>
-                <a:spcPts val="0"/>
-              </a:spcBef>
-              <a:spcAft>
-                <a:spcPts val="0"/>
-              </a:spcAft>
-              <a:buSzPts val="1400"/>
-              <a:buNone/>
-              <a:defRPr b="0" i="0" sz="1800" u="none" cap="none" strike="noStrike"/>
+              <a:lnSpc>
+                <a:spcPct val="100000"/>
+              </a:lnSpc>
+              <a:spcBef>
+                <a:spcPts val="0"/>
+              </a:spcBef>
+              <a:spcAft>
+                <a:spcPts val="0"/>
+              </a:spcAft>
+              <a:buClr>
+                <a:srgbClr val="000000"/>
+              </a:buClr>
+              <a:buSzPts val="1400"/>
+              <a:buFont typeface="Arial"/>
+              <a:buNone/>
+              <a:defRPr b="0" i="0" sz="1800" u="none" cap="none" strike="noStrike">
+                <a:solidFill>
+                  <a:srgbClr val="000000"/>
+                </a:solidFill>
+                <a:latin typeface="Arial"/>
+                <a:ea typeface="Arial"/>
+                <a:cs typeface="Arial"/>
+                <a:sym typeface="Arial"/>
+              </a:defRPr>
             </a:lvl2pPr>
             <a:lvl3pPr indent="-228600" lvl="2" marL="1371600" marR="0" rtl="0" algn="l">
-              <a:spcBef>
-                <a:spcPts val="0"/>
-              </a:spcBef>
-              <a:spcAft>
-                <a:spcPts val="0"/>
-              </a:spcAft>
-              <a:buSzPts val="1400"/>
-              <a:buNone/>
-              <a:defRPr b="0" i="0" sz="1800" u="none" cap="none" strike="noStrike"/>
+              <a:lnSpc>
+                <a:spcPct val="100000"/>
+              </a:lnSpc>
+              <a:spcBef>
+                <a:spcPts val="0"/>
+              </a:spcBef>
+              <a:spcAft>
+                <a:spcPts val="0"/>
+              </a:spcAft>
+              <a:buClr>
+                <a:srgbClr val="000000"/>
+              </a:buClr>
+              <a:buSzPts val="1400"/>
+              <a:buFont typeface="Arial"/>
+              <a:buNone/>
+              <a:defRPr b="0" i="0" sz="1800" u="none" cap="none" strike="noStrike">
+                <a:solidFill>
+                  <a:srgbClr val="000000"/>
+                </a:solidFill>
+                <a:latin typeface="Arial"/>
+                <a:ea typeface="Arial"/>
+                <a:cs typeface="Arial"/>
+                <a:sym typeface="Arial"/>
+              </a:defRPr>
             </a:lvl3pPr>
             <a:lvl4pPr indent="-228600" lvl="3" marL="1828800" marR="0" rtl="0" algn="l">
-              <a:spcBef>
-                <a:spcPts val="0"/>
-              </a:spcBef>
-              <a:spcAft>
-                <a:spcPts val="0"/>
-              </a:spcAft>
-              <a:buSzPts val="1400"/>
-              <a:buNone/>
-              <a:defRPr b="0" i="0" sz="1800" u="none" cap="none" strike="noStrike"/>
+              <a:lnSpc>
+                <a:spcPct val="100000"/>
+              </a:lnSpc>
+              <a:spcBef>
+                <a:spcPts val="0"/>
+              </a:spcBef>
+              <a:spcAft>
+                <a:spcPts val="0"/>
+              </a:spcAft>
+              <a:buClr>
+                <a:srgbClr val="000000"/>
+              </a:buClr>
+              <a:buSzPts val="1400"/>
+              <a:buFont typeface="Arial"/>
+              <a:buNone/>
+              <a:defRPr b="0" i="0" sz="1800" u="none" cap="none" strike="noStrike">
+                <a:solidFill>
+                  <a:srgbClr val="000000"/>
+                </a:solidFill>
+                <a:latin typeface="Arial"/>
+                <a:ea typeface="Arial"/>
+                <a:cs typeface="Arial"/>
+                <a:sym typeface="Arial"/>
+              </a:defRPr>
             </a:lvl4pPr>
             <a:lvl5pPr indent="-228600" lvl="4" marL="2286000" marR="0" rtl="0" algn="l">
-              <a:spcBef>
-                <a:spcPts val="0"/>
-              </a:spcBef>
-              <a:spcAft>
-                <a:spcPts val="0"/>
-              </a:spcAft>
-              <a:buSzPts val="1400"/>
-              <a:buNone/>
-              <a:defRPr b="0" i="0" sz="1800" u="none" cap="none" strike="noStrike"/>
+              <a:lnSpc>
+                <a:spcPct val="100000"/>
+              </a:lnSpc>
+              <a:spcBef>
+                <a:spcPts val="0"/>
+              </a:spcBef>
+              <a:spcAft>
+                <a:spcPts val="0"/>
+              </a:spcAft>
+              <a:buClr>
+                <a:srgbClr val="000000"/>
+              </a:buClr>
+              <a:buSzPts val="1400"/>
+              <a:buFont typeface="Arial"/>
+              <a:buNone/>
+              <a:defRPr b="0" i="0" sz="1800" u="none" cap="none" strike="noStrike">
+                <a:solidFill>
+                  <a:srgbClr val="000000"/>
+                </a:solidFill>
+                <a:latin typeface="Arial"/>
+                <a:ea typeface="Arial"/>
+                <a:cs typeface="Arial"/>
+                <a:sym typeface="Arial"/>
+              </a:defRPr>
             </a:lvl5pPr>
             <a:lvl6pPr indent="-228600" lvl="5" marL="2743200" marR="0" rtl="0" algn="l">
-              <a:spcBef>
-                <a:spcPts val="0"/>
-              </a:spcBef>
-              <a:spcAft>
-                <a:spcPts val="0"/>
-              </a:spcAft>
-              <a:buSzPts val="1400"/>
-              <a:buNone/>
-              <a:defRPr b="0" i="0" sz="1800" u="none" cap="none" strike="noStrike"/>
+              <a:lnSpc>
+                <a:spcPct val="100000"/>
+              </a:lnSpc>
+              <a:spcBef>
+                <a:spcPts val="0"/>
+              </a:spcBef>
+              <a:spcAft>
+                <a:spcPts val="0"/>
+              </a:spcAft>
+              <a:buClr>
+                <a:srgbClr val="000000"/>
+              </a:buClr>
+              <a:buSzPts val="1400"/>
+              <a:buFont typeface="Arial"/>
+              <a:buNone/>
+              <a:defRPr b="0" i="0" sz="1800" u="none" cap="none" strike="noStrike">
+                <a:solidFill>
+                  <a:srgbClr val="000000"/>
+                </a:solidFill>
+                <a:latin typeface="Arial"/>
+                <a:ea typeface="Arial"/>
+                <a:cs typeface="Arial"/>
+                <a:sym typeface="Arial"/>
+              </a:defRPr>
             </a:lvl6pPr>
             <a:lvl7pPr indent="-228600" lvl="6" marL="3200400" marR="0" rtl="0" algn="l">
-              <a:spcBef>
-                <a:spcPts val="0"/>
-              </a:spcBef>
-              <a:spcAft>
-                <a:spcPts val="0"/>
-              </a:spcAft>
-              <a:buSzPts val="1400"/>
-              <a:buNone/>
-              <a:defRPr b="0" i="0" sz="1800" u="none" cap="none" strike="noStrike"/>
+              <a:lnSpc>
+                <a:spcPct val="100000"/>
+              </a:lnSpc>
+              <a:spcBef>
+                <a:spcPts val="0"/>
+              </a:spcBef>
+              <a:spcAft>
+                <a:spcPts val="0"/>
+              </a:spcAft>
+              <a:buClr>
+                <a:srgbClr val="000000"/>
+              </a:buClr>
+              <a:buSzPts val="1400"/>
+              <a:buFont typeface="Arial"/>
+              <a:buNone/>
+              <a:defRPr b="0" i="0" sz="1800" u="none" cap="none" strike="noStrike">
+                <a:solidFill>
+                  <a:srgbClr val="000000"/>
+                </a:solidFill>
+                <a:latin typeface="Arial"/>
+                <a:ea typeface="Arial"/>
+                <a:cs typeface="Arial"/>
+                <a:sym typeface="Arial"/>
+              </a:defRPr>
             </a:lvl7pPr>
             <a:lvl8pPr indent="-228600" lvl="7" marL="3657600" marR="0" rtl="0" algn="l">
-              <a:spcBef>
-                <a:spcPts val="0"/>
-              </a:spcBef>
-              <a:spcAft>
-                <a:spcPts val="0"/>
-              </a:spcAft>
-              <a:buSzPts val="1400"/>
-              <a:buNone/>
-              <a:defRPr b="0" i="0" sz="1800" u="none" cap="none" strike="noStrike"/>
+              <a:lnSpc>
+                <a:spcPct val="100000"/>
+              </a:lnSpc>
+              <a:spcBef>
+                <a:spcPts val="0"/>
+              </a:spcBef>
+              <a:spcAft>
+                <a:spcPts val="0"/>
+              </a:spcAft>
+              <a:buClr>
+                <a:srgbClr val="000000"/>
+              </a:buClr>
+              <a:buSzPts val="1400"/>
+              <a:buFont typeface="Arial"/>
+              <a:buNone/>
+              <a:defRPr b="0" i="0" sz="1800" u="none" cap="none" strike="noStrike">
+                <a:solidFill>
+                  <a:srgbClr val="000000"/>
+                </a:solidFill>
+                <a:latin typeface="Arial"/>
+                <a:ea typeface="Arial"/>
+                <a:cs typeface="Arial"/>
+                <a:sym typeface="Arial"/>
+              </a:defRPr>
             </a:lvl8pPr>
             <a:lvl9pPr indent="-228600" lvl="8" marL="4114800" marR="0" rtl="0" algn="l">
-              <a:spcBef>
-                <a:spcPts val="0"/>
-              </a:spcBef>
-              <a:spcAft>
-                <a:spcPts val="0"/>
-              </a:spcAft>
-              <a:buSzPts val="1400"/>
-              <a:buNone/>
-              <a:defRPr b="0" i="0" sz="1800" u="none" cap="none" strike="noStrike"/>
+              <a:lnSpc>
+                <a:spcPct val="100000"/>
+              </a:lnSpc>
+              <a:spcBef>
+                <a:spcPts val="0"/>
+              </a:spcBef>
+              <a:spcAft>
+                <a:spcPts val="0"/>
+              </a:spcAft>
+              <a:buClr>
+                <a:srgbClr val="000000"/>
+              </a:buClr>
+              <a:buSzPts val="1400"/>
+              <a:buFont typeface="Arial"/>
+              <a:buNone/>
+              <a:defRPr b="0" i="0" sz="1800" u="none" cap="none" strike="noStrike">
+                <a:solidFill>
+                  <a:srgbClr val="000000"/>
+                </a:solidFill>
+                <a:latin typeface="Arial"/>
+                <a:ea typeface="Arial"/>
+                <a:cs typeface="Arial"/>
+                <a:sym typeface="Arial"/>
+              </a:defRPr>
             </a:lvl9pPr>
           </a:lstStyle>
           <a:p/>
@@ -1014,7 +1221,11 @@
               <a:spcAft>
                 <a:spcPts val="0"/>
               </a:spcAft>
-              <a:buSzPts val="1400"/>
+              <a:buClr>
+                <a:srgbClr val="000000"/>
+              </a:buClr>
+              <a:buSzPts val="1400"/>
+              <a:buFont typeface="Arial"/>
               <a:buNone/>
               <a:defRPr b="0" i="0" sz="900" u="none" cap="none" strike="noStrike">
                 <a:solidFill>
@@ -1036,7 +1247,11 @@
               <a:spcAft>
                 <a:spcPts val="0"/>
               </a:spcAft>
-              <a:buSzPts val="1400"/>
+              <a:buClr>
+                <a:srgbClr val="000000"/>
+              </a:buClr>
+              <a:buSzPts val="1400"/>
+              <a:buFont typeface="Arial"/>
               <a:buNone/>
               <a:defRPr b="0" i="0" sz="900" u="none" cap="none" strike="noStrike">
                 <a:solidFill>
@@ -1058,7 +1273,11 @@
               <a:spcAft>
                 <a:spcPts val="0"/>
               </a:spcAft>
-              <a:buSzPts val="1400"/>
+              <a:buClr>
+                <a:srgbClr val="000000"/>
+              </a:buClr>
+              <a:buSzPts val="1400"/>
+              <a:buFont typeface="Arial"/>
               <a:buNone/>
               <a:defRPr b="0" i="0" sz="900" u="none" cap="none" strike="noStrike">
                 <a:solidFill>
@@ -1080,7 +1299,11 @@
               <a:spcAft>
                 <a:spcPts val="0"/>
               </a:spcAft>
-              <a:buSzPts val="1400"/>
+              <a:buClr>
+                <a:srgbClr val="000000"/>
+              </a:buClr>
+              <a:buSzPts val="1400"/>
+              <a:buFont typeface="Arial"/>
               <a:buNone/>
               <a:defRPr b="0" i="0" sz="900" u="none" cap="none" strike="noStrike">
                 <a:solidFill>
@@ -1102,7 +1325,11 @@
               <a:spcAft>
                 <a:spcPts val="0"/>
               </a:spcAft>
-              <a:buSzPts val="1400"/>
+              <a:buClr>
+                <a:srgbClr val="000000"/>
+              </a:buClr>
+              <a:buSzPts val="1400"/>
+              <a:buFont typeface="Arial"/>
               <a:buNone/>
               <a:defRPr b="0" i="0" sz="900" u="none" cap="none" strike="noStrike">
                 <a:solidFill>
@@ -1124,7 +1351,11 @@
               <a:spcAft>
                 <a:spcPts val="0"/>
               </a:spcAft>
-              <a:buSzPts val="1400"/>
+              <a:buClr>
+                <a:srgbClr val="000000"/>
+              </a:buClr>
+              <a:buSzPts val="1400"/>
+              <a:buFont typeface="Arial"/>
               <a:buNone/>
               <a:defRPr b="0" i="0" sz="900" u="none" cap="none" strike="noStrike">
                 <a:solidFill>
@@ -1146,7 +1377,11 @@
               <a:spcAft>
                 <a:spcPts val="0"/>
               </a:spcAft>
-              <a:buSzPts val="1400"/>
+              <a:buClr>
+                <a:srgbClr val="000000"/>
+              </a:buClr>
+              <a:buSzPts val="1400"/>
+              <a:buFont typeface="Arial"/>
               <a:buNone/>
               <a:defRPr b="0" i="0" sz="900" u="none" cap="none" strike="noStrike">
                 <a:solidFill>
@@ -1168,7 +1403,11 @@
               <a:spcAft>
                 <a:spcPts val="0"/>
               </a:spcAft>
-              <a:buSzPts val="1400"/>
+              <a:buClr>
+                <a:srgbClr val="000000"/>
+              </a:buClr>
+              <a:buSzPts val="1400"/>
+              <a:buFont typeface="Arial"/>
               <a:buNone/>
               <a:defRPr b="0" i="0" sz="900" u="none" cap="none" strike="noStrike">
                 <a:solidFill>
@@ -1190,7 +1429,11 @@
               <a:spcAft>
                 <a:spcPts val="0"/>
               </a:spcAft>
-              <a:buSzPts val="1400"/>
+              <a:buClr>
+                <a:srgbClr val="000000"/>
+              </a:buClr>
+              <a:buSzPts val="1400"/>
+              <a:buFont typeface="Arial"/>
               <a:buNone/>
               <a:defRPr b="0" i="0" sz="900" u="none" cap="none" strike="noStrike">
                 <a:solidFill>
@@ -1262,7 +1505,15 @@
               </a:rPr>
               <a:t>‹#›</a:t>
             </a:fld>
-            <a:endParaRPr/>
+            <a:endParaRPr b="0" i="0" sz="1400" u="none" cap="none" strike="noStrike">
+              <a:solidFill>
+                <a:srgbClr val="000000"/>
+              </a:solidFill>
+              <a:latin typeface="Arial"/>
+              <a:ea typeface="Arial"/>
+              <a:cs typeface="Arial"/>
+              <a:sym typeface="Arial"/>
+            </a:endParaRPr>
           </a:p>
         </p:txBody>
       </p:sp>
@@ -1561,7 +1812,7 @@
               <a:buNone/>
             </a:pPr>
             <a:fld id="{00000000-1234-1234-1234-123412341234}" type="slidenum">
-              <a:rPr b="0" i="0" lang="en-US" sz="1200" u="none">
+              <a:rPr b="0" i="0" lang="en-US" sz="1200" u="none" cap="none" strike="noStrike">
                 <a:solidFill>
                   <a:srgbClr val="000000"/>
                 </a:solidFill>
@@ -1572,7 +1823,15 @@
               </a:rPr>
               <a:t>‹#›</a:t>
             </a:fld>
-            <a:endParaRPr/>
+            <a:endParaRPr b="0" i="0" sz="1400" u="none" cap="none" strike="noStrike">
+              <a:solidFill>
+                <a:srgbClr val="000000"/>
+              </a:solidFill>
+              <a:latin typeface="Arial"/>
+              <a:ea typeface="Arial"/>
+              <a:cs typeface="Arial"/>
+              <a:sym typeface="Arial"/>
+            </a:endParaRPr>
           </a:p>
         </p:txBody>
       </p:sp>
@@ -1643,12 +1902,16 @@
           <a:lstStyle/>
           <a:p>
             <a:pPr indent="0" lvl="0" marL="0" rtl="0" algn="l">
-              <a:spcBef>
-                <a:spcPts val="0"/>
-              </a:spcBef>
-              <a:spcAft>
-                <a:spcPts val="0"/>
-              </a:spcAft>
+              <a:lnSpc>
+                <a:spcPct val="100000"/>
+              </a:lnSpc>
+              <a:spcBef>
+                <a:spcPts val="0"/>
+              </a:spcBef>
+              <a:spcAft>
+                <a:spcPts val="0"/>
+              </a:spcAft>
+              <a:buSzPts val="1400"/>
               <a:buNone/>
             </a:pPr>
             <a:r>
@@ -1699,6 +1962,10 @@
           <a:prstGeom prst="rect">
             <a:avLst/>
           </a:prstGeom>
+          <a:noFill/>
+          <a:ln>
+            <a:noFill/>
+          </a:ln>
         </p:spPr>
         <p:txBody>
           <a:bodyPr anchorCtr="0" anchor="t" bIns="45700" lIns="91425" spcFirstLastPara="1" rIns="91425" wrap="square" tIns="45700">
@@ -1707,12 +1974,16 @@
           <a:lstStyle/>
           <a:p>
             <a:pPr indent="0" lvl="0" marL="0" rtl="0" algn="l">
-              <a:spcBef>
-                <a:spcPts val="0"/>
-              </a:spcBef>
-              <a:spcAft>
-                <a:spcPts val="0"/>
-              </a:spcAft>
+              <a:lnSpc>
+                <a:spcPct val="100000"/>
+              </a:lnSpc>
+              <a:spcBef>
+                <a:spcPts val="0"/>
+              </a:spcBef>
+              <a:spcAft>
+                <a:spcPts val="0"/>
+              </a:spcAft>
+              <a:buSzPts val="1400"/>
               <a:buNone/>
             </a:pPr>
             <a:r>
@@ -1755,6 +2026,16 @@
               </a:path>
             </a:pathLst>
           </a:custGeom>
+          <a:noFill/>
+          <a:ln cap="flat" cmpd="sng" w="9525">
+            <a:solidFill>
+              <a:srgbClr val="000000"/>
+            </a:solidFill>
+            <a:prstDash val="solid"/>
+            <a:miter lim="800000"/>
+            <a:headEnd len="sm" w="sm" type="none"/>
+            <a:tailEnd len="sm" w="sm" type="none"/>
+          </a:ln>
         </p:spPr>
       </p:sp>
     </p:spTree>
@@ -1798,6 +2079,10 @@
           <a:prstGeom prst="rect">
             <a:avLst/>
           </a:prstGeom>
+          <a:noFill/>
+          <a:ln>
+            <a:noFill/>
+          </a:ln>
         </p:spPr>
         <p:txBody>
           <a:bodyPr anchorCtr="0" anchor="t" bIns="45700" lIns="91425" spcFirstLastPara="1" rIns="91425" wrap="square" tIns="45700">
@@ -1806,12 +2091,16 @@
           <a:lstStyle/>
           <a:p>
             <a:pPr indent="0" lvl="0" marL="0" rtl="0" algn="l">
-              <a:spcBef>
-                <a:spcPts val="0"/>
-              </a:spcBef>
-              <a:spcAft>
-                <a:spcPts val="0"/>
-              </a:spcAft>
+              <a:lnSpc>
+                <a:spcPct val="100000"/>
+              </a:lnSpc>
+              <a:spcBef>
+                <a:spcPts val="0"/>
+              </a:spcBef>
+              <a:spcAft>
+                <a:spcPts val="0"/>
+              </a:spcAft>
+              <a:buSzPts val="1400"/>
               <a:buNone/>
             </a:pPr>
             <a:r>
@@ -1854,6 +2143,16 @@
               </a:path>
             </a:pathLst>
           </a:custGeom>
+          <a:noFill/>
+          <a:ln cap="flat" cmpd="sng" w="9525">
+            <a:solidFill>
+              <a:srgbClr val="000000"/>
+            </a:solidFill>
+            <a:prstDash val="solid"/>
+            <a:miter lim="800000"/>
+            <a:headEnd len="sm" w="sm" type="none"/>
+            <a:tailEnd len="sm" w="sm" type="none"/>
+          </a:ln>
         </p:spPr>
       </p:sp>
     </p:spTree>
@@ -1897,6 +2196,10 @@
           <a:prstGeom prst="rect">
             <a:avLst/>
           </a:prstGeom>
+          <a:noFill/>
+          <a:ln>
+            <a:noFill/>
+          </a:ln>
         </p:spPr>
         <p:txBody>
           <a:bodyPr anchorCtr="0" anchor="t" bIns="45700" lIns="91425" spcFirstLastPara="1" rIns="91425" wrap="square" tIns="45700">
@@ -1905,12 +2208,16 @@
           <a:lstStyle/>
           <a:p>
             <a:pPr indent="0" lvl="0" marL="0" rtl="0" algn="l">
-              <a:spcBef>
-                <a:spcPts val="0"/>
-              </a:spcBef>
-              <a:spcAft>
-                <a:spcPts val="0"/>
-              </a:spcAft>
+              <a:lnSpc>
+                <a:spcPct val="100000"/>
+              </a:lnSpc>
+              <a:spcBef>
+                <a:spcPts val="0"/>
+              </a:spcBef>
+              <a:spcAft>
+                <a:spcPts val="0"/>
+              </a:spcAft>
+              <a:buSzPts val="1400"/>
               <a:buNone/>
             </a:pPr>
             <a:r>
@@ -1953,6 +2260,16 @@
               </a:path>
             </a:pathLst>
           </a:custGeom>
+          <a:noFill/>
+          <a:ln cap="flat" cmpd="sng" w="9525">
+            <a:solidFill>
+              <a:srgbClr val="000000"/>
+            </a:solidFill>
+            <a:prstDash val="solid"/>
+            <a:miter lim="800000"/>
+            <a:headEnd len="sm" w="sm" type="none"/>
+            <a:tailEnd len="sm" w="sm" type="none"/>
+          </a:ln>
         </p:spPr>
       </p:sp>
     </p:spTree>
@@ -1996,6 +2313,10 @@
           <a:prstGeom prst="rect">
             <a:avLst/>
           </a:prstGeom>
+          <a:noFill/>
+          <a:ln>
+            <a:noFill/>
+          </a:ln>
         </p:spPr>
         <p:txBody>
           <a:bodyPr anchorCtr="0" anchor="t" bIns="45700" lIns="91425" spcFirstLastPara="1" rIns="91425" wrap="square" tIns="45700">
@@ -2004,12 +2325,16 @@
           <a:lstStyle/>
           <a:p>
             <a:pPr indent="0" lvl="0" marL="0" rtl="0" algn="l">
-              <a:spcBef>
-                <a:spcPts val="0"/>
-              </a:spcBef>
-              <a:spcAft>
-                <a:spcPts val="0"/>
-              </a:spcAft>
+              <a:lnSpc>
+                <a:spcPct val="100000"/>
+              </a:lnSpc>
+              <a:spcBef>
+                <a:spcPts val="0"/>
+              </a:spcBef>
+              <a:spcAft>
+                <a:spcPts val="0"/>
+              </a:spcAft>
+              <a:buSzPts val="1400"/>
               <a:buNone/>
             </a:pPr>
             <a:r>
@@ -2052,6 +2377,16 @@
               </a:path>
             </a:pathLst>
           </a:custGeom>
+          <a:noFill/>
+          <a:ln cap="flat" cmpd="sng" w="9525">
+            <a:solidFill>
+              <a:srgbClr val="000000"/>
+            </a:solidFill>
+            <a:prstDash val="solid"/>
+            <a:miter lim="800000"/>
+            <a:headEnd len="sm" w="sm" type="none"/>
+            <a:tailEnd len="sm" w="sm" type="none"/>
+          </a:ln>
         </p:spPr>
       </p:sp>
     </p:spTree>
@@ -2095,6 +2430,10 @@
           <a:prstGeom prst="rect">
             <a:avLst/>
           </a:prstGeom>
+          <a:noFill/>
+          <a:ln>
+            <a:noFill/>
+          </a:ln>
         </p:spPr>
         <p:txBody>
           <a:bodyPr anchorCtr="0" anchor="t" bIns="45700" lIns="91425" spcFirstLastPara="1" rIns="91425" wrap="square" tIns="45700">
@@ -2103,12 +2442,16 @@
           <a:lstStyle/>
           <a:p>
             <a:pPr indent="0" lvl="0" marL="0" rtl="0" algn="l">
-              <a:spcBef>
-                <a:spcPts val="0"/>
-              </a:spcBef>
-              <a:spcAft>
-                <a:spcPts val="0"/>
-              </a:spcAft>
+              <a:lnSpc>
+                <a:spcPct val="100000"/>
+              </a:lnSpc>
+              <a:spcBef>
+                <a:spcPts val="0"/>
+              </a:spcBef>
+              <a:spcAft>
+                <a:spcPts val="0"/>
+              </a:spcAft>
+              <a:buSzPts val="1400"/>
               <a:buNone/>
             </a:pPr>
             <a:r>
@@ -2151,6 +2494,16 @@
               </a:path>
             </a:pathLst>
           </a:custGeom>
+          <a:noFill/>
+          <a:ln cap="flat" cmpd="sng" w="9525">
+            <a:solidFill>
+              <a:srgbClr val="000000"/>
+            </a:solidFill>
+            <a:prstDash val="solid"/>
+            <a:miter lim="800000"/>
+            <a:headEnd len="sm" w="sm" type="none"/>
+            <a:tailEnd len="sm" w="sm" type="none"/>
+          </a:ln>
         </p:spPr>
       </p:sp>
     </p:spTree>
@@ -2194,6 +2547,10 @@
           <a:prstGeom prst="rect">
             <a:avLst/>
           </a:prstGeom>
+          <a:noFill/>
+          <a:ln>
+            <a:noFill/>
+          </a:ln>
         </p:spPr>
         <p:txBody>
           <a:bodyPr anchorCtr="0" anchor="t" bIns="45700" lIns="91425" spcFirstLastPara="1" rIns="91425" wrap="square" tIns="45700">
@@ -2202,12 +2559,16 @@
           <a:lstStyle/>
           <a:p>
             <a:pPr indent="0" lvl="0" marL="0" rtl="0" algn="l">
-              <a:spcBef>
-                <a:spcPts val="0"/>
-              </a:spcBef>
-              <a:spcAft>
-                <a:spcPts val="0"/>
-              </a:spcAft>
+              <a:lnSpc>
+                <a:spcPct val="100000"/>
+              </a:lnSpc>
+              <a:spcBef>
+                <a:spcPts val="0"/>
+              </a:spcBef>
+              <a:spcAft>
+                <a:spcPts val="0"/>
+              </a:spcAft>
+              <a:buSzPts val="1400"/>
               <a:buNone/>
             </a:pPr>
             <a:r>
@@ -2250,6 +2611,16 @@
               </a:path>
             </a:pathLst>
           </a:custGeom>
+          <a:noFill/>
+          <a:ln cap="flat" cmpd="sng" w="9525">
+            <a:solidFill>
+              <a:srgbClr val="000000"/>
+            </a:solidFill>
+            <a:prstDash val="solid"/>
+            <a:miter lim="800000"/>
+            <a:headEnd len="sm" w="sm" type="none"/>
+            <a:tailEnd len="sm" w="sm" type="none"/>
+          </a:ln>
         </p:spPr>
       </p:sp>
     </p:spTree>
@@ -2293,6 +2664,10 @@
           <a:prstGeom prst="rect">
             <a:avLst/>
           </a:prstGeom>
+          <a:noFill/>
+          <a:ln>
+            <a:noFill/>
+          </a:ln>
         </p:spPr>
         <p:txBody>
           <a:bodyPr anchorCtr="0" anchor="t" bIns="45700" lIns="91425" spcFirstLastPara="1" rIns="91425" wrap="square" tIns="45700">
@@ -2301,12 +2676,16 @@
           <a:lstStyle/>
           <a:p>
             <a:pPr indent="0" lvl="0" marL="0" rtl="0" algn="l">
-              <a:spcBef>
-                <a:spcPts val="0"/>
-              </a:spcBef>
-              <a:spcAft>
-                <a:spcPts val="0"/>
-              </a:spcAft>
+              <a:lnSpc>
+                <a:spcPct val="100000"/>
+              </a:lnSpc>
+              <a:spcBef>
+                <a:spcPts val="0"/>
+              </a:spcBef>
+              <a:spcAft>
+                <a:spcPts val="0"/>
+              </a:spcAft>
+              <a:buSzPts val="1400"/>
               <a:buNone/>
             </a:pPr>
             <a:r>
@@ -2349,6 +2728,16 @@
               </a:path>
             </a:pathLst>
           </a:custGeom>
+          <a:noFill/>
+          <a:ln cap="flat" cmpd="sng" w="9525">
+            <a:solidFill>
+              <a:srgbClr val="000000"/>
+            </a:solidFill>
+            <a:prstDash val="solid"/>
+            <a:miter lim="800000"/>
+            <a:headEnd len="sm" w="sm" type="none"/>
+            <a:tailEnd len="sm" w="sm" type="none"/>
+          </a:ln>
         </p:spPr>
       </p:sp>
     </p:spTree>
@@ -2392,6 +2781,10 @@
           <a:prstGeom prst="rect">
             <a:avLst/>
           </a:prstGeom>
+          <a:noFill/>
+          <a:ln>
+            <a:noFill/>
+          </a:ln>
         </p:spPr>
         <p:txBody>
           <a:bodyPr anchorCtr="0" anchor="t" bIns="45700" lIns="91425" spcFirstLastPara="1" rIns="91425" wrap="square" tIns="45700">
@@ -2400,12 +2793,16 @@
           <a:lstStyle/>
           <a:p>
             <a:pPr indent="0" lvl="0" marL="0" rtl="0" algn="l">
-              <a:spcBef>
-                <a:spcPts val="0"/>
-              </a:spcBef>
-              <a:spcAft>
-                <a:spcPts val="0"/>
-              </a:spcAft>
+              <a:lnSpc>
+                <a:spcPct val="100000"/>
+              </a:lnSpc>
+              <a:spcBef>
+                <a:spcPts val="0"/>
+              </a:spcBef>
+              <a:spcAft>
+                <a:spcPts val="0"/>
+              </a:spcAft>
+              <a:buSzPts val="1400"/>
               <a:buNone/>
             </a:pPr>
             <a:r>
@@ -2448,6 +2845,16 @@
               </a:path>
             </a:pathLst>
           </a:custGeom>
+          <a:noFill/>
+          <a:ln cap="flat" cmpd="sng" w="9525">
+            <a:solidFill>
+              <a:srgbClr val="000000"/>
+            </a:solidFill>
+            <a:prstDash val="solid"/>
+            <a:miter lim="800000"/>
+            <a:headEnd len="sm" w="sm" type="none"/>
+            <a:tailEnd len="sm" w="sm" type="none"/>
+          </a:ln>
         </p:spPr>
       </p:sp>
     </p:spTree>
@@ -2491,6 +2898,10 @@
           <a:prstGeom prst="rect">
             <a:avLst/>
           </a:prstGeom>
+          <a:noFill/>
+          <a:ln>
+            <a:noFill/>
+          </a:ln>
         </p:spPr>
         <p:txBody>
           <a:bodyPr anchorCtr="0" anchor="t" bIns="45700" lIns="91425" spcFirstLastPara="1" rIns="91425" wrap="square" tIns="45700">
@@ -2499,12 +2910,16 @@
           <a:lstStyle/>
           <a:p>
             <a:pPr indent="0" lvl="0" marL="0" rtl="0" algn="l">
-              <a:spcBef>
-                <a:spcPts val="0"/>
-              </a:spcBef>
-              <a:spcAft>
-                <a:spcPts val="0"/>
-              </a:spcAft>
+              <a:lnSpc>
+                <a:spcPct val="100000"/>
+              </a:lnSpc>
+              <a:spcBef>
+                <a:spcPts val="0"/>
+              </a:spcBef>
+              <a:spcAft>
+                <a:spcPts val="0"/>
+              </a:spcAft>
+              <a:buSzPts val="1400"/>
               <a:buNone/>
             </a:pPr>
             <a:r>
@@ -2547,6 +2962,16 @@
               </a:path>
             </a:pathLst>
           </a:custGeom>
+          <a:noFill/>
+          <a:ln cap="flat" cmpd="sng" w="9525">
+            <a:solidFill>
+              <a:srgbClr val="000000"/>
+            </a:solidFill>
+            <a:prstDash val="solid"/>
+            <a:miter lim="800000"/>
+            <a:headEnd len="sm" w="sm" type="none"/>
+            <a:tailEnd len="sm" w="sm" type="none"/>
+          </a:ln>
         </p:spPr>
       </p:sp>
     </p:spTree>
@@ -2590,6 +3015,10 @@
           <a:prstGeom prst="rect">
             <a:avLst/>
           </a:prstGeom>
+          <a:noFill/>
+          <a:ln>
+            <a:noFill/>
+          </a:ln>
         </p:spPr>
         <p:txBody>
           <a:bodyPr anchorCtr="0" anchor="t" bIns="45700" lIns="91425" spcFirstLastPara="1" rIns="91425" wrap="square" tIns="45700">
@@ -2598,12 +3027,16 @@
           <a:lstStyle/>
           <a:p>
             <a:pPr indent="0" lvl="0" marL="0" rtl="0" algn="l">
-              <a:spcBef>
-                <a:spcPts val="0"/>
-              </a:spcBef>
-              <a:spcAft>
-                <a:spcPts val="0"/>
-              </a:spcAft>
+              <a:lnSpc>
+                <a:spcPct val="100000"/>
+              </a:lnSpc>
+              <a:spcBef>
+                <a:spcPts val="0"/>
+              </a:spcBef>
+              <a:spcAft>
+                <a:spcPts val="0"/>
+              </a:spcAft>
+              <a:buSzPts val="1400"/>
               <a:buNone/>
             </a:pPr>
             <a:r>
@@ -2646,6 +3079,16 @@
               </a:path>
             </a:pathLst>
           </a:custGeom>
+          <a:noFill/>
+          <a:ln cap="flat" cmpd="sng" w="9525">
+            <a:solidFill>
+              <a:srgbClr val="000000"/>
+            </a:solidFill>
+            <a:prstDash val="solid"/>
+            <a:miter lim="800000"/>
+            <a:headEnd len="sm" w="sm" type="none"/>
+            <a:tailEnd len="sm" w="sm" type="none"/>
+          </a:ln>
         </p:spPr>
       </p:sp>
     </p:spTree>
@@ -2689,6 +3132,10 @@
           <a:prstGeom prst="rect">
             <a:avLst/>
           </a:prstGeom>
+          <a:noFill/>
+          <a:ln>
+            <a:noFill/>
+          </a:ln>
         </p:spPr>
         <p:txBody>
           <a:bodyPr anchorCtr="0" anchor="t" bIns="45700" lIns="91425" spcFirstLastPara="1" rIns="91425" wrap="square" tIns="45700">
@@ -2697,12 +3144,16 @@
           <a:lstStyle/>
           <a:p>
             <a:pPr indent="0" lvl="0" marL="0" rtl="0" algn="l">
-              <a:spcBef>
-                <a:spcPts val="0"/>
-              </a:spcBef>
-              <a:spcAft>
-                <a:spcPts val="0"/>
-              </a:spcAft>
+              <a:lnSpc>
+                <a:spcPct val="100000"/>
+              </a:lnSpc>
+              <a:spcBef>
+                <a:spcPts val="0"/>
+              </a:spcBef>
+              <a:spcAft>
+                <a:spcPts val="0"/>
+              </a:spcAft>
+              <a:buSzPts val="1400"/>
               <a:buNone/>
             </a:pPr>
             <a:r>
@@ -2745,6 +3196,16 @@
               </a:path>
             </a:pathLst>
           </a:custGeom>
+          <a:noFill/>
+          <a:ln cap="flat" cmpd="sng" w="9525">
+            <a:solidFill>
+              <a:srgbClr val="000000"/>
+            </a:solidFill>
+            <a:prstDash val="solid"/>
+            <a:miter lim="800000"/>
+            <a:headEnd len="sm" w="sm" type="none"/>
+            <a:tailEnd len="sm" w="sm" type="none"/>
+          </a:ln>
         </p:spPr>
       </p:sp>
     </p:spTree>
@@ -2788,6 +3249,10 @@
           <a:prstGeom prst="rect">
             <a:avLst/>
           </a:prstGeom>
+          <a:noFill/>
+          <a:ln>
+            <a:noFill/>
+          </a:ln>
         </p:spPr>
         <p:txBody>
           <a:bodyPr anchorCtr="0" anchor="t" bIns="45700" lIns="91425" spcFirstLastPara="1" rIns="91425" wrap="square" tIns="45700">
@@ -2796,12 +3261,16 @@
           <a:lstStyle/>
           <a:p>
             <a:pPr indent="0" lvl="0" marL="0" rtl="0" algn="l">
-              <a:spcBef>
-                <a:spcPts val="0"/>
-              </a:spcBef>
-              <a:spcAft>
-                <a:spcPts val="0"/>
-              </a:spcAft>
+              <a:lnSpc>
+                <a:spcPct val="100000"/>
+              </a:lnSpc>
+              <a:spcBef>
+                <a:spcPts val="0"/>
+              </a:spcBef>
+              <a:spcAft>
+                <a:spcPts val="0"/>
+              </a:spcAft>
+              <a:buSzPts val="1400"/>
               <a:buNone/>
             </a:pPr>
             <a:r>
@@ -2844,6 +3313,16 @@
               </a:path>
             </a:pathLst>
           </a:custGeom>
+          <a:noFill/>
+          <a:ln cap="flat" cmpd="sng" w="9525">
+            <a:solidFill>
+              <a:srgbClr val="000000"/>
+            </a:solidFill>
+            <a:prstDash val="solid"/>
+            <a:miter lim="800000"/>
+            <a:headEnd len="sm" w="sm" type="none"/>
+            <a:tailEnd len="sm" w="sm" type="none"/>
+          </a:ln>
         </p:spPr>
       </p:sp>
     </p:spTree>
@@ -2887,6 +3366,10 @@
           <a:prstGeom prst="rect">
             <a:avLst/>
           </a:prstGeom>
+          <a:noFill/>
+          <a:ln>
+            <a:noFill/>
+          </a:ln>
         </p:spPr>
         <p:txBody>
           <a:bodyPr anchorCtr="0" anchor="t" bIns="45700" lIns="91425" spcFirstLastPara="1" rIns="91425" wrap="square" tIns="45700">
@@ -2895,12 +3378,16 @@
           <a:lstStyle/>
           <a:p>
             <a:pPr indent="0" lvl="0" marL="0" rtl="0" algn="l">
-              <a:spcBef>
-                <a:spcPts val="0"/>
-              </a:spcBef>
-              <a:spcAft>
-                <a:spcPts val="0"/>
-              </a:spcAft>
+              <a:lnSpc>
+                <a:spcPct val="100000"/>
+              </a:lnSpc>
+              <a:spcBef>
+                <a:spcPts val="0"/>
+              </a:spcBef>
+              <a:spcAft>
+                <a:spcPts val="0"/>
+              </a:spcAft>
+              <a:buSzPts val="1400"/>
               <a:buNone/>
             </a:pPr>
             <a:r>
@@ -2943,6 +3430,16 @@
               </a:path>
             </a:pathLst>
           </a:custGeom>
+          <a:noFill/>
+          <a:ln cap="flat" cmpd="sng" w="9525">
+            <a:solidFill>
+              <a:srgbClr val="000000"/>
+            </a:solidFill>
+            <a:prstDash val="solid"/>
+            <a:miter lim="800000"/>
+            <a:headEnd len="sm" w="sm" type="none"/>
+            <a:tailEnd len="sm" w="sm" type="none"/>
+          </a:ln>
         </p:spPr>
       </p:sp>
     </p:spTree>
@@ -2986,6 +3483,10 @@
           <a:prstGeom prst="rect">
             <a:avLst/>
           </a:prstGeom>
+          <a:noFill/>
+          <a:ln>
+            <a:noFill/>
+          </a:ln>
         </p:spPr>
         <p:txBody>
           <a:bodyPr anchorCtr="0" anchor="t" bIns="45700" lIns="91425" spcFirstLastPara="1" rIns="91425" wrap="square" tIns="45700">
@@ -2994,12 +3495,16 @@
           <a:lstStyle/>
           <a:p>
             <a:pPr indent="0" lvl="0" marL="0" rtl="0" algn="l">
-              <a:spcBef>
-                <a:spcPts val="0"/>
-              </a:spcBef>
-              <a:spcAft>
-                <a:spcPts val="0"/>
-              </a:spcAft>
+              <a:lnSpc>
+                <a:spcPct val="100000"/>
+              </a:lnSpc>
+              <a:spcBef>
+                <a:spcPts val="0"/>
+              </a:spcBef>
+              <a:spcAft>
+                <a:spcPts val="0"/>
+              </a:spcAft>
+              <a:buSzPts val="1400"/>
               <a:buNone/>
             </a:pPr>
             <a:r>
@@ -3042,6 +3547,16 @@
               </a:path>
             </a:pathLst>
           </a:custGeom>
+          <a:noFill/>
+          <a:ln cap="flat" cmpd="sng" w="9525">
+            <a:solidFill>
+              <a:srgbClr val="000000"/>
+            </a:solidFill>
+            <a:prstDash val="solid"/>
+            <a:miter lim="800000"/>
+            <a:headEnd len="sm" w="sm" type="none"/>
+            <a:tailEnd len="sm" w="sm" type="none"/>
+          </a:ln>
         </p:spPr>
       </p:sp>
     </p:spTree>
@@ -3085,6 +3600,10 @@
           <a:prstGeom prst="rect">
             <a:avLst/>
           </a:prstGeom>
+          <a:noFill/>
+          <a:ln>
+            <a:noFill/>
+          </a:ln>
         </p:spPr>
         <p:txBody>
           <a:bodyPr anchorCtr="0" anchor="t" bIns="45700" lIns="91425" spcFirstLastPara="1" rIns="91425" wrap="square" tIns="45700">
@@ -3093,12 +3612,16 @@
           <a:lstStyle/>
           <a:p>
             <a:pPr indent="0" lvl="0" marL="0" rtl="0" algn="l">
-              <a:spcBef>
-                <a:spcPts val="0"/>
-              </a:spcBef>
-              <a:spcAft>
-                <a:spcPts val="0"/>
-              </a:spcAft>
+              <a:lnSpc>
+                <a:spcPct val="100000"/>
+              </a:lnSpc>
+              <a:spcBef>
+                <a:spcPts val="0"/>
+              </a:spcBef>
+              <a:spcAft>
+                <a:spcPts val="0"/>
+              </a:spcAft>
+              <a:buSzPts val="1400"/>
               <a:buNone/>
             </a:pPr>
             <a:r>
@@ -3141,6 +3664,16 @@
               </a:path>
             </a:pathLst>
           </a:custGeom>
+          <a:noFill/>
+          <a:ln cap="flat" cmpd="sng" w="9525">
+            <a:solidFill>
+              <a:srgbClr val="000000"/>
+            </a:solidFill>
+            <a:prstDash val="solid"/>
+            <a:miter lim="800000"/>
+            <a:headEnd len="sm" w="sm" type="none"/>
+            <a:tailEnd len="sm" w="sm" type="none"/>
+          </a:ln>
         </p:spPr>
       </p:sp>
     </p:spTree>
@@ -3184,6 +3717,10 @@
           <a:prstGeom prst="rect">
             <a:avLst/>
           </a:prstGeom>
+          <a:noFill/>
+          <a:ln>
+            <a:noFill/>
+          </a:ln>
         </p:spPr>
         <p:txBody>
           <a:bodyPr anchorCtr="0" anchor="t" bIns="45700" lIns="91425" spcFirstLastPara="1" rIns="91425" wrap="square" tIns="45700">
@@ -3192,12 +3729,16 @@
           <a:lstStyle/>
           <a:p>
             <a:pPr indent="0" lvl="0" marL="0" rtl="0" algn="l">
-              <a:spcBef>
-                <a:spcPts val="0"/>
-              </a:spcBef>
-              <a:spcAft>
-                <a:spcPts val="0"/>
-              </a:spcAft>
+              <a:lnSpc>
+                <a:spcPct val="100000"/>
+              </a:lnSpc>
+              <a:spcBef>
+                <a:spcPts val="0"/>
+              </a:spcBef>
+              <a:spcAft>
+                <a:spcPts val="0"/>
+              </a:spcAft>
+              <a:buSzPts val="1400"/>
               <a:buNone/>
             </a:pPr>
             <a:r>
@@ -3240,6 +3781,16 @@
               </a:path>
             </a:pathLst>
           </a:custGeom>
+          <a:noFill/>
+          <a:ln cap="flat" cmpd="sng" w="9525">
+            <a:solidFill>
+              <a:srgbClr val="000000"/>
+            </a:solidFill>
+            <a:prstDash val="solid"/>
+            <a:miter lim="800000"/>
+            <a:headEnd len="sm" w="sm" type="none"/>
+            <a:tailEnd len="sm" w="sm" type="none"/>
+          </a:ln>
         </p:spPr>
       </p:sp>
     </p:spTree>
@@ -3283,6 +3834,10 @@
           <a:prstGeom prst="rect">
             <a:avLst/>
           </a:prstGeom>
+          <a:noFill/>
+          <a:ln>
+            <a:noFill/>
+          </a:ln>
         </p:spPr>
         <p:txBody>
           <a:bodyPr anchorCtr="0" anchor="t" bIns="45700" lIns="91425" spcFirstLastPara="1" rIns="91425" wrap="square" tIns="45700">
@@ -3291,12 +3846,16 @@
           <a:lstStyle/>
           <a:p>
             <a:pPr indent="0" lvl="0" marL="0" rtl="0" algn="l">
-              <a:spcBef>
-                <a:spcPts val="0"/>
-              </a:spcBef>
-              <a:spcAft>
-                <a:spcPts val="0"/>
-              </a:spcAft>
+              <a:lnSpc>
+                <a:spcPct val="100000"/>
+              </a:lnSpc>
+              <a:spcBef>
+                <a:spcPts val="0"/>
+              </a:spcBef>
+              <a:spcAft>
+                <a:spcPts val="0"/>
+              </a:spcAft>
+              <a:buSzPts val="1400"/>
               <a:buNone/>
             </a:pPr>
             <a:r>
@@ -3339,6 +3898,16 @@
               </a:path>
             </a:pathLst>
           </a:custGeom>
+          <a:noFill/>
+          <a:ln cap="flat" cmpd="sng" w="9525">
+            <a:solidFill>
+              <a:srgbClr val="000000"/>
+            </a:solidFill>
+            <a:prstDash val="solid"/>
+            <a:miter lim="800000"/>
+            <a:headEnd len="sm" w="sm" type="none"/>
+            <a:tailEnd len="sm" w="sm" type="none"/>
+          </a:ln>
         </p:spPr>
       </p:sp>
     </p:spTree>
@@ -3382,6 +3951,10 @@
           <a:prstGeom prst="rect">
             <a:avLst/>
           </a:prstGeom>
+          <a:noFill/>
+          <a:ln>
+            <a:noFill/>
+          </a:ln>
         </p:spPr>
         <p:txBody>
           <a:bodyPr anchorCtr="0" anchor="t" bIns="45700" lIns="91425" spcFirstLastPara="1" rIns="91425" wrap="square" tIns="45700">
@@ -3390,12 +3963,16 @@
           <a:lstStyle/>
           <a:p>
             <a:pPr indent="0" lvl="0" marL="0" rtl="0" algn="l">
-              <a:spcBef>
-                <a:spcPts val="0"/>
-              </a:spcBef>
-              <a:spcAft>
-                <a:spcPts val="0"/>
-              </a:spcAft>
+              <a:lnSpc>
+                <a:spcPct val="100000"/>
+              </a:lnSpc>
+              <a:spcBef>
+                <a:spcPts val="0"/>
+              </a:spcBef>
+              <a:spcAft>
+                <a:spcPts val="0"/>
+              </a:spcAft>
+              <a:buSzPts val="1400"/>
               <a:buNone/>
             </a:pPr>
             <a:r>
@@ -3438,6 +4015,16 @@
               </a:path>
             </a:pathLst>
           </a:custGeom>
+          <a:noFill/>
+          <a:ln cap="flat" cmpd="sng" w="9525">
+            <a:solidFill>
+              <a:srgbClr val="000000"/>
+            </a:solidFill>
+            <a:prstDash val="solid"/>
+            <a:miter lim="800000"/>
+            <a:headEnd len="sm" w="sm" type="none"/>
+            <a:tailEnd len="sm" w="sm" type="none"/>
+          </a:ln>
         </p:spPr>
       </p:sp>
     </p:spTree>
@@ -3481,6 +4068,10 @@
           <a:prstGeom prst="rect">
             <a:avLst/>
           </a:prstGeom>
+          <a:noFill/>
+          <a:ln>
+            <a:noFill/>
+          </a:ln>
         </p:spPr>
         <p:txBody>
           <a:bodyPr anchorCtr="0" anchor="t" bIns="45700" lIns="91425" spcFirstLastPara="1" rIns="91425" wrap="square" tIns="45700">
@@ -3489,12 +4080,16 @@
           <a:lstStyle/>
           <a:p>
             <a:pPr indent="0" lvl="0" marL="0" rtl="0" algn="l">
-              <a:spcBef>
-                <a:spcPts val="0"/>
-              </a:spcBef>
-              <a:spcAft>
-                <a:spcPts val="0"/>
-              </a:spcAft>
+              <a:lnSpc>
+                <a:spcPct val="100000"/>
+              </a:lnSpc>
+              <a:spcBef>
+                <a:spcPts val="0"/>
+              </a:spcBef>
+              <a:spcAft>
+                <a:spcPts val="0"/>
+              </a:spcAft>
+              <a:buSzPts val="1400"/>
               <a:buNone/>
             </a:pPr>
             <a:r>
@@ -3537,6 +4132,16 @@
               </a:path>
             </a:pathLst>
           </a:custGeom>
+          <a:noFill/>
+          <a:ln cap="flat" cmpd="sng" w="9525">
+            <a:solidFill>
+              <a:srgbClr val="000000"/>
+            </a:solidFill>
+            <a:prstDash val="solid"/>
+            <a:miter lim="800000"/>
+            <a:headEnd len="sm" w="sm" type="none"/>
+            <a:tailEnd len="sm" w="sm" type="none"/>
+          </a:ln>
         </p:spPr>
       </p:sp>
     </p:spTree>
@@ -3580,6 +4185,10 @@
           <a:prstGeom prst="rect">
             <a:avLst/>
           </a:prstGeom>
+          <a:noFill/>
+          <a:ln>
+            <a:noFill/>
+          </a:ln>
         </p:spPr>
         <p:txBody>
           <a:bodyPr anchorCtr="0" anchor="t" bIns="45700" lIns="91425" spcFirstLastPara="1" rIns="91425" wrap="square" tIns="45700">
@@ -3588,12 +4197,16 @@
           <a:lstStyle/>
           <a:p>
             <a:pPr indent="0" lvl="0" marL="0" rtl="0" algn="l">
-              <a:spcBef>
-                <a:spcPts val="0"/>
-              </a:spcBef>
-              <a:spcAft>
-                <a:spcPts val="0"/>
-              </a:spcAft>
+              <a:lnSpc>
+                <a:spcPct val="100000"/>
+              </a:lnSpc>
+              <a:spcBef>
+                <a:spcPts val="0"/>
+              </a:spcBef>
+              <a:spcAft>
+                <a:spcPts val="0"/>
+              </a:spcAft>
+              <a:buSzPts val="1400"/>
               <a:buNone/>
             </a:pPr>
             <a:r>
@@ -3636,6 +4249,16 @@
               </a:path>
             </a:pathLst>
           </a:custGeom>
+          <a:noFill/>
+          <a:ln cap="flat" cmpd="sng" w="9525">
+            <a:solidFill>
+              <a:srgbClr val="000000"/>
+            </a:solidFill>
+            <a:prstDash val="solid"/>
+            <a:miter lim="800000"/>
+            <a:headEnd len="sm" w="sm" type="none"/>
+            <a:tailEnd len="sm" w="sm" type="none"/>
+          </a:ln>
         </p:spPr>
       </p:sp>
     </p:spTree>
@@ -3690,6 +4313,9 @@
           </a:bodyPr>
           <a:lstStyle>
             <a:lvl1pPr lvl="0" algn="ctr">
+              <a:lnSpc>
+                <a:spcPct val="100000"/>
+              </a:lnSpc>
               <a:spcBef>
                 <a:spcPts val="0"/>
               </a:spcBef>
@@ -3701,6 +4327,9 @@
               <a:defRPr sz="6000"/>
             </a:lvl1pPr>
             <a:lvl2pPr lvl="1" algn="l">
+              <a:lnSpc>
+                <a:spcPct val="100000"/>
+              </a:lnSpc>
               <a:spcBef>
                 <a:spcPts val="0"/>
               </a:spcBef>
@@ -3712,6 +4341,9 @@
               <a:defRPr/>
             </a:lvl2pPr>
             <a:lvl3pPr lvl="2" algn="l">
+              <a:lnSpc>
+                <a:spcPct val="100000"/>
+              </a:lnSpc>
               <a:spcBef>
                 <a:spcPts val="0"/>
               </a:spcBef>
@@ -3723,6 +4355,9 @@
               <a:defRPr/>
             </a:lvl3pPr>
             <a:lvl4pPr lvl="3" algn="l">
+              <a:lnSpc>
+                <a:spcPct val="100000"/>
+              </a:lnSpc>
               <a:spcBef>
                 <a:spcPts val="0"/>
               </a:spcBef>
@@ -3734,6 +4369,9 @@
               <a:defRPr/>
             </a:lvl4pPr>
             <a:lvl5pPr lvl="4" algn="l">
+              <a:lnSpc>
+                <a:spcPct val="100000"/>
+              </a:lnSpc>
               <a:spcBef>
                 <a:spcPts val="0"/>
               </a:spcBef>
@@ -3745,6 +4383,9 @@
               <a:defRPr/>
             </a:lvl5pPr>
             <a:lvl6pPr lvl="5" algn="l">
+              <a:lnSpc>
+                <a:spcPct val="100000"/>
+              </a:lnSpc>
               <a:spcBef>
                 <a:spcPts val="0"/>
               </a:spcBef>
@@ -3756,6 +4397,9 @@
               <a:defRPr/>
             </a:lvl6pPr>
             <a:lvl7pPr lvl="6" algn="l">
+              <a:lnSpc>
+                <a:spcPct val="100000"/>
+              </a:lnSpc>
               <a:spcBef>
                 <a:spcPts val="0"/>
               </a:spcBef>
@@ -3767,6 +4411,9 @@
               <a:defRPr/>
             </a:lvl7pPr>
             <a:lvl8pPr lvl="7" algn="l">
+              <a:lnSpc>
+                <a:spcPct val="100000"/>
+              </a:lnSpc>
               <a:spcBef>
                 <a:spcPts val="0"/>
               </a:spcBef>
@@ -3778,6 +4425,9 @@
               <a:defRPr/>
             </a:lvl8pPr>
             <a:lvl9pPr lvl="8" algn="l">
+              <a:lnSpc>
+                <a:spcPct val="100000"/>
+              </a:lnSpc>
               <a:spcBef>
                 <a:spcPts val="0"/>
               </a:spcBef>
@@ -3819,6 +4469,9 @@
           </a:bodyPr>
           <a:lstStyle>
             <a:lvl1pPr lvl="0" algn="ctr">
+              <a:lnSpc>
+                <a:spcPct val="100000"/>
+              </a:lnSpc>
               <a:spcBef>
                 <a:spcPts val="480"/>
               </a:spcBef>
@@ -3831,6 +4484,9 @@
               <a:defRPr sz="2400"/>
             </a:lvl1pPr>
             <a:lvl2pPr lvl="1" algn="ctr">
+              <a:lnSpc>
+                <a:spcPct val="100000"/>
+              </a:lnSpc>
               <a:spcBef>
                 <a:spcPts val="400"/>
               </a:spcBef>
@@ -3846,6 +4502,9 @@
               <a:defRPr sz="2000"/>
             </a:lvl2pPr>
             <a:lvl3pPr lvl="2" algn="ctr">
+              <a:lnSpc>
+                <a:spcPct val="100000"/>
+              </a:lnSpc>
               <a:spcBef>
                 <a:spcPts val="360"/>
               </a:spcBef>
@@ -3861,6 +4520,9 @@
               <a:defRPr sz="1800"/>
             </a:lvl3pPr>
             <a:lvl4pPr lvl="3" algn="ctr">
+              <a:lnSpc>
+                <a:spcPct val="100000"/>
+              </a:lnSpc>
               <a:spcBef>
                 <a:spcPts val="320"/>
               </a:spcBef>
@@ -3876,6 +4538,9 @@
               <a:defRPr sz="1600"/>
             </a:lvl4pPr>
             <a:lvl5pPr lvl="4" algn="ctr">
+              <a:lnSpc>
+                <a:spcPct val="100000"/>
+              </a:lnSpc>
               <a:spcBef>
                 <a:spcPts val="320"/>
               </a:spcBef>
@@ -4316,7 +4981,7 @@
               <a:buSzPts val="1100"/>
               <a:buFont typeface="Arial"/>
               <a:buNone/>
-              <a:defRPr b="0" i="0" sz="1100" u="none">
+              <a:defRPr b="0" i="0" sz="1100" u="none" cap="none" strike="noStrike">
                 <a:solidFill>
                   <a:schemeClr val="lt1"/>
                 </a:solidFill>
@@ -4342,7 +5007,7 @@
               <a:buSzPts val="1100"/>
               <a:buFont typeface="Arial"/>
               <a:buNone/>
-              <a:defRPr b="0" i="0" sz="1100" u="none">
+              <a:defRPr b="0" i="0" sz="1100" u="none" cap="none" strike="noStrike">
                 <a:solidFill>
                   <a:schemeClr val="lt1"/>
                 </a:solidFill>
@@ -4368,7 +5033,7 @@
               <a:buSzPts val="1100"/>
               <a:buFont typeface="Arial"/>
               <a:buNone/>
-              <a:defRPr b="0" i="0" sz="1100" u="none">
+              <a:defRPr b="0" i="0" sz="1100" u="none" cap="none" strike="noStrike">
                 <a:solidFill>
                   <a:schemeClr val="lt1"/>
                 </a:solidFill>
@@ -4394,7 +5059,7 @@
               <a:buSzPts val="1100"/>
               <a:buFont typeface="Arial"/>
               <a:buNone/>
-              <a:defRPr b="0" i="0" sz="1100" u="none">
+              <a:defRPr b="0" i="0" sz="1100" u="none" cap="none" strike="noStrike">
                 <a:solidFill>
                   <a:schemeClr val="lt1"/>
                 </a:solidFill>
@@ -4420,7 +5085,7 @@
               <a:buSzPts val="1100"/>
               <a:buFont typeface="Arial"/>
               <a:buNone/>
-              <a:defRPr b="0" i="0" sz="1100" u="none">
+              <a:defRPr b="0" i="0" sz="1100" u="none" cap="none" strike="noStrike">
                 <a:solidFill>
                   <a:schemeClr val="lt1"/>
                 </a:solidFill>
@@ -4446,7 +5111,7 @@
               <a:buSzPts val="1100"/>
               <a:buFont typeface="Arial"/>
               <a:buNone/>
-              <a:defRPr b="0" i="0" sz="1100" u="none">
+              <a:defRPr b="0" i="0" sz="1100" u="none" cap="none" strike="noStrike">
                 <a:solidFill>
                   <a:schemeClr val="lt1"/>
                 </a:solidFill>
@@ -4472,7 +5137,7 @@
               <a:buSzPts val="1100"/>
               <a:buFont typeface="Arial"/>
               <a:buNone/>
-              <a:defRPr b="0" i="0" sz="1100" u="none">
+              <a:defRPr b="0" i="0" sz="1100" u="none" cap="none" strike="noStrike">
                 <a:solidFill>
                   <a:schemeClr val="lt1"/>
                 </a:solidFill>
@@ -4498,7 +5163,7 @@
               <a:buSzPts val="1100"/>
               <a:buFont typeface="Arial"/>
               <a:buNone/>
-              <a:defRPr b="0" i="0" sz="1100" u="none">
+              <a:defRPr b="0" i="0" sz="1100" u="none" cap="none" strike="noStrike">
                 <a:solidFill>
                   <a:schemeClr val="lt1"/>
                 </a:solidFill>
@@ -4524,7 +5189,7 @@
               <a:buSzPts val="1100"/>
               <a:buFont typeface="Arial"/>
               <a:buNone/>
-              <a:defRPr b="0" i="0" sz="1100" u="none">
+              <a:defRPr b="0" i="0" sz="1100" u="none" cap="none" strike="noStrike">
                 <a:solidFill>
                   <a:schemeClr val="lt1"/>
                 </a:solidFill>
@@ -4936,7 +5601,7 @@
               <a:buSzPts val="1100"/>
               <a:buFont typeface="Arial"/>
               <a:buNone/>
-              <a:defRPr b="0" i="0" sz="1100" u="none">
+              <a:defRPr b="0" i="0" sz="1100" u="none" cap="none" strike="noStrike">
                 <a:solidFill>
                   <a:schemeClr val="lt1"/>
                 </a:solidFill>
@@ -4962,7 +5627,7 @@
               <a:buSzPts val="1100"/>
               <a:buFont typeface="Arial"/>
               <a:buNone/>
-              <a:defRPr b="0" i="0" sz="1100" u="none">
+              <a:defRPr b="0" i="0" sz="1100" u="none" cap="none" strike="noStrike">
                 <a:solidFill>
                   <a:schemeClr val="lt1"/>
                 </a:solidFill>
@@ -4988,7 +5653,7 @@
               <a:buSzPts val="1100"/>
               <a:buFont typeface="Arial"/>
               <a:buNone/>
-              <a:defRPr b="0" i="0" sz="1100" u="none">
+              <a:defRPr b="0" i="0" sz="1100" u="none" cap="none" strike="noStrike">
                 <a:solidFill>
                   <a:schemeClr val="lt1"/>
                 </a:solidFill>
@@ -5014,7 +5679,7 @@
               <a:buSzPts val="1100"/>
               <a:buFont typeface="Arial"/>
               <a:buNone/>
-              <a:defRPr b="0" i="0" sz="1100" u="none">
+              <a:defRPr b="0" i="0" sz="1100" u="none" cap="none" strike="noStrike">
                 <a:solidFill>
                   <a:schemeClr val="lt1"/>
                 </a:solidFill>
@@ -5040,7 +5705,7 @@
               <a:buSzPts val="1100"/>
               <a:buFont typeface="Arial"/>
               <a:buNone/>
-              <a:defRPr b="0" i="0" sz="1100" u="none">
+              <a:defRPr b="0" i="0" sz="1100" u="none" cap="none" strike="noStrike">
                 <a:solidFill>
                   <a:schemeClr val="lt1"/>
                 </a:solidFill>
@@ -5066,7 +5731,7 @@
               <a:buSzPts val="1100"/>
               <a:buFont typeface="Arial"/>
               <a:buNone/>
-              <a:defRPr b="0" i="0" sz="1100" u="none">
+              <a:defRPr b="0" i="0" sz="1100" u="none" cap="none" strike="noStrike">
                 <a:solidFill>
                   <a:schemeClr val="lt1"/>
                 </a:solidFill>
@@ -5092,7 +5757,7 @@
               <a:buSzPts val="1100"/>
               <a:buFont typeface="Arial"/>
               <a:buNone/>
-              <a:defRPr b="0" i="0" sz="1100" u="none">
+              <a:defRPr b="0" i="0" sz="1100" u="none" cap="none" strike="noStrike">
                 <a:solidFill>
                   <a:schemeClr val="lt1"/>
                 </a:solidFill>
@@ -5118,7 +5783,7 @@
               <a:buSzPts val="1100"/>
               <a:buFont typeface="Arial"/>
               <a:buNone/>
-              <a:defRPr b="0" i="0" sz="1100" u="none">
+              <a:defRPr b="0" i="0" sz="1100" u="none" cap="none" strike="noStrike">
                 <a:solidFill>
                   <a:schemeClr val="lt1"/>
                 </a:solidFill>
@@ -5144,7 +5809,7 @@
               <a:buSzPts val="1100"/>
               <a:buFont typeface="Arial"/>
               <a:buNone/>
-              <a:defRPr b="0" i="0" sz="1100" u="none">
+              <a:defRPr b="0" i="0" sz="1100" u="none" cap="none" strike="noStrike">
                 <a:solidFill>
                   <a:schemeClr val="lt1"/>
                 </a:solidFill>
@@ -5229,6 +5894,9 @@
           </a:bodyPr>
           <a:lstStyle>
             <a:lvl1pPr lvl="0" algn="l">
+              <a:lnSpc>
+                <a:spcPct val="100000"/>
+              </a:lnSpc>
               <a:spcBef>
                 <a:spcPts val="0"/>
               </a:spcBef>
@@ -5240,6 +5908,9 @@
               <a:defRPr/>
             </a:lvl1pPr>
             <a:lvl2pPr lvl="1" algn="l">
+              <a:lnSpc>
+                <a:spcPct val="100000"/>
+              </a:lnSpc>
               <a:spcBef>
                 <a:spcPts val="0"/>
               </a:spcBef>
@@ -5251,6 +5922,9 @@
               <a:defRPr/>
             </a:lvl2pPr>
             <a:lvl3pPr lvl="2" algn="l">
+              <a:lnSpc>
+                <a:spcPct val="100000"/>
+              </a:lnSpc>
               <a:spcBef>
                 <a:spcPts val="0"/>
               </a:spcBef>
@@ -5262,6 +5936,9 @@
               <a:defRPr/>
             </a:lvl3pPr>
             <a:lvl4pPr lvl="3" algn="l">
+              <a:lnSpc>
+                <a:spcPct val="100000"/>
+              </a:lnSpc>
               <a:spcBef>
                 <a:spcPts val="0"/>
               </a:spcBef>
@@ -5273,6 +5950,9 @@
               <a:defRPr/>
             </a:lvl4pPr>
             <a:lvl5pPr lvl="4" algn="l">
+              <a:lnSpc>
+                <a:spcPct val="100000"/>
+              </a:lnSpc>
               <a:spcBef>
                 <a:spcPts val="0"/>
               </a:spcBef>
@@ -5284,6 +5964,9 @@
               <a:defRPr/>
             </a:lvl5pPr>
             <a:lvl6pPr lvl="5" algn="l">
+              <a:lnSpc>
+                <a:spcPct val="100000"/>
+              </a:lnSpc>
               <a:spcBef>
                 <a:spcPts val="0"/>
               </a:spcBef>
@@ -5295,6 +5978,9 @@
               <a:defRPr/>
             </a:lvl6pPr>
             <a:lvl7pPr lvl="6" algn="l">
+              <a:lnSpc>
+                <a:spcPct val="100000"/>
+              </a:lnSpc>
               <a:spcBef>
                 <a:spcPts val="0"/>
               </a:spcBef>
@@ -5306,6 +5992,9 @@
               <a:defRPr/>
             </a:lvl7pPr>
             <a:lvl8pPr lvl="7" algn="l">
+              <a:lnSpc>
+                <a:spcPct val="100000"/>
+              </a:lnSpc>
               <a:spcBef>
                 <a:spcPts val="0"/>
               </a:spcBef>
@@ -5317,6 +6006,9 @@
               <a:defRPr/>
             </a:lvl8pPr>
             <a:lvl9pPr lvl="8" algn="l">
+              <a:lnSpc>
+                <a:spcPct val="100000"/>
+              </a:lnSpc>
               <a:spcBef>
                 <a:spcPts val="0"/>
               </a:spcBef>
@@ -5685,7 +6377,7 @@
               <a:buSzPts val="1100"/>
               <a:buFont typeface="Arial"/>
               <a:buNone/>
-              <a:defRPr b="0" i="0" sz="1100" u="none">
+              <a:defRPr b="0" i="0" sz="1100" u="none" cap="none" strike="noStrike">
                 <a:solidFill>
                   <a:schemeClr val="lt1"/>
                 </a:solidFill>
@@ -5711,7 +6403,7 @@
               <a:buSzPts val="1100"/>
               <a:buFont typeface="Arial"/>
               <a:buNone/>
-              <a:defRPr b="0" i="0" sz="1100" u="none">
+              <a:defRPr b="0" i="0" sz="1100" u="none" cap="none" strike="noStrike">
                 <a:solidFill>
                   <a:schemeClr val="lt1"/>
                 </a:solidFill>
@@ -5737,7 +6429,7 @@
               <a:buSzPts val="1100"/>
               <a:buFont typeface="Arial"/>
               <a:buNone/>
-              <a:defRPr b="0" i="0" sz="1100" u="none">
+              <a:defRPr b="0" i="0" sz="1100" u="none" cap="none" strike="noStrike">
                 <a:solidFill>
                   <a:schemeClr val="lt1"/>
                 </a:solidFill>
@@ -5763,7 +6455,7 @@
               <a:buSzPts val="1100"/>
               <a:buFont typeface="Arial"/>
               <a:buNone/>
-              <a:defRPr b="0" i="0" sz="1100" u="none">
+              <a:defRPr b="0" i="0" sz="1100" u="none" cap="none" strike="noStrike">
                 <a:solidFill>
                   <a:schemeClr val="lt1"/>
                 </a:solidFill>
@@ -5789,7 +6481,7 @@
               <a:buSzPts val="1100"/>
               <a:buFont typeface="Arial"/>
               <a:buNone/>
-              <a:defRPr b="0" i="0" sz="1100" u="none">
+              <a:defRPr b="0" i="0" sz="1100" u="none" cap="none" strike="noStrike">
                 <a:solidFill>
                   <a:schemeClr val="lt1"/>
                 </a:solidFill>
@@ -5815,7 +6507,7 @@
               <a:buSzPts val="1100"/>
               <a:buFont typeface="Arial"/>
               <a:buNone/>
-              <a:defRPr b="0" i="0" sz="1100" u="none">
+              <a:defRPr b="0" i="0" sz="1100" u="none" cap="none" strike="noStrike">
                 <a:solidFill>
                   <a:schemeClr val="lt1"/>
                 </a:solidFill>
@@ -5841,7 +6533,7 @@
               <a:buSzPts val="1100"/>
               <a:buFont typeface="Arial"/>
               <a:buNone/>
-              <a:defRPr b="0" i="0" sz="1100" u="none">
+              <a:defRPr b="0" i="0" sz="1100" u="none" cap="none" strike="noStrike">
                 <a:solidFill>
                   <a:schemeClr val="lt1"/>
                 </a:solidFill>
@@ -5867,7 +6559,7 @@
               <a:buSzPts val="1100"/>
               <a:buFont typeface="Arial"/>
               <a:buNone/>
-              <a:defRPr b="0" i="0" sz="1100" u="none">
+              <a:defRPr b="0" i="0" sz="1100" u="none" cap="none" strike="noStrike">
                 <a:solidFill>
                   <a:schemeClr val="lt1"/>
                 </a:solidFill>
@@ -5893,7 +6585,7 @@
               <a:buSzPts val="1100"/>
               <a:buFont typeface="Arial"/>
               <a:buNone/>
-              <a:defRPr b="0" i="0" sz="1100" u="none">
+              <a:defRPr b="0" i="0" sz="1100" u="none" cap="none" strike="noStrike">
                 <a:solidFill>
                   <a:schemeClr val="lt1"/>
                 </a:solidFill>
@@ -5978,6 +6670,9 @@
           </a:bodyPr>
           <a:lstStyle>
             <a:lvl1pPr lvl="0" algn="l">
+              <a:lnSpc>
+                <a:spcPct val="100000"/>
+              </a:lnSpc>
               <a:spcBef>
                 <a:spcPts val="0"/>
               </a:spcBef>
@@ -5989,6 +6684,9 @@
               <a:defRPr/>
             </a:lvl1pPr>
             <a:lvl2pPr lvl="1" algn="l">
+              <a:lnSpc>
+                <a:spcPct val="100000"/>
+              </a:lnSpc>
               <a:spcBef>
                 <a:spcPts val="0"/>
               </a:spcBef>
@@ -6000,6 +6698,9 @@
               <a:defRPr/>
             </a:lvl2pPr>
             <a:lvl3pPr lvl="2" algn="l">
+              <a:lnSpc>
+                <a:spcPct val="100000"/>
+              </a:lnSpc>
               <a:spcBef>
                 <a:spcPts val="0"/>
               </a:spcBef>
@@ -6011,6 +6712,9 @@
               <a:defRPr/>
             </a:lvl3pPr>
             <a:lvl4pPr lvl="3" algn="l">
+              <a:lnSpc>
+                <a:spcPct val="100000"/>
+              </a:lnSpc>
               <a:spcBef>
                 <a:spcPts val="0"/>
               </a:spcBef>
@@ -6022,6 +6726,9 @@
               <a:defRPr/>
             </a:lvl4pPr>
             <a:lvl5pPr lvl="4" algn="l">
+              <a:lnSpc>
+                <a:spcPct val="100000"/>
+              </a:lnSpc>
               <a:spcBef>
                 <a:spcPts val="0"/>
               </a:spcBef>
@@ -6033,6 +6740,9 @@
               <a:defRPr/>
             </a:lvl5pPr>
             <a:lvl6pPr lvl="5" algn="l">
+              <a:lnSpc>
+                <a:spcPct val="100000"/>
+              </a:lnSpc>
               <a:spcBef>
                 <a:spcPts val="0"/>
               </a:spcBef>
@@ -6044,6 +6754,9 @@
               <a:defRPr/>
             </a:lvl6pPr>
             <a:lvl7pPr lvl="6" algn="l">
+              <a:lnSpc>
+                <a:spcPct val="100000"/>
+              </a:lnSpc>
               <a:spcBef>
                 <a:spcPts val="0"/>
               </a:spcBef>
@@ -6055,6 +6768,9 @@
               <a:defRPr/>
             </a:lvl7pPr>
             <a:lvl8pPr lvl="7" algn="l">
+              <a:lnSpc>
+                <a:spcPct val="100000"/>
+              </a:lnSpc>
               <a:spcBef>
                 <a:spcPts val="0"/>
               </a:spcBef>
@@ -6066,6 +6782,9 @@
               <a:defRPr/>
             </a:lvl8pPr>
             <a:lvl9pPr lvl="8" algn="l">
+              <a:lnSpc>
+                <a:spcPct val="100000"/>
+              </a:lnSpc>
               <a:spcBef>
                 <a:spcPts val="0"/>
               </a:spcBef>
@@ -6107,6 +6826,9 @@
           </a:bodyPr>
           <a:lstStyle>
             <a:lvl1pPr indent="-228600" lvl="0" marL="457200" algn="l">
+              <a:lnSpc>
+                <a:spcPct val="100000"/>
+              </a:lnSpc>
               <a:spcBef>
                 <a:spcPts val="480"/>
               </a:spcBef>
@@ -6119,6 +6841,9 @@
               <a:defRPr b="1" sz="2400"/>
             </a:lvl1pPr>
             <a:lvl2pPr indent="-228600" lvl="1" marL="914400" algn="l">
+              <a:lnSpc>
+                <a:spcPct val="100000"/>
+              </a:lnSpc>
               <a:spcBef>
                 <a:spcPts val="400"/>
               </a:spcBef>
@@ -6134,6 +6859,9 @@
               <a:defRPr b="1" sz="2000"/>
             </a:lvl2pPr>
             <a:lvl3pPr indent="-228600" lvl="2" marL="1371600" algn="l">
+              <a:lnSpc>
+                <a:spcPct val="100000"/>
+              </a:lnSpc>
               <a:spcBef>
                 <a:spcPts val="360"/>
               </a:spcBef>
@@ -6149,6 +6877,9 @@
               <a:defRPr b="1" sz="1800"/>
             </a:lvl3pPr>
             <a:lvl4pPr indent="-228600" lvl="3" marL="1828800" algn="l">
+              <a:lnSpc>
+                <a:spcPct val="100000"/>
+              </a:lnSpc>
               <a:spcBef>
                 <a:spcPts val="320"/>
               </a:spcBef>
@@ -6164,6 +6895,9 @@
               <a:defRPr b="1" sz="1600"/>
             </a:lvl4pPr>
             <a:lvl5pPr indent="-228600" lvl="4" marL="2286000" algn="l">
+              <a:lnSpc>
+                <a:spcPct val="100000"/>
+              </a:lnSpc>
               <a:spcBef>
                 <a:spcPts val="320"/>
               </a:spcBef>
@@ -6277,6 +7011,9 @@
           </a:bodyPr>
           <a:lstStyle>
             <a:lvl1pPr indent="-342900" lvl="0" marL="457200" algn="l">
+              <a:lnSpc>
+                <a:spcPct val="100000"/>
+              </a:lnSpc>
               <a:spcBef>
                 <a:spcPts val="360"/>
               </a:spcBef>
@@ -6288,6 +7025,9 @@
               <a:defRPr/>
             </a:lvl1pPr>
             <a:lvl2pPr indent="-342900" lvl="1" marL="914400" algn="l">
+              <a:lnSpc>
+                <a:spcPct val="100000"/>
+              </a:lnSpc>
               <a:spcBef>
                 <a:spcPts val="360"/>
               </a:spcBef>
@@ -6302,6 +7042,9 @@
               <a:defRPr/>
             </a:lvl2pPr>
             <a:lvl3pPr indent="-342900" lvl="2" marL="1371600" algn="l">
+              <a:lnSpc>
+                <a:spcPct val="100000"/>
+              </a:lnSpc>
               <a:spcBef>
                 <a:spcPts val="360"/>
               </a:spcBef>
@@ -6316,6 +7059,9 @@
               <a:defRPr/>
             </a:lvl3pPr>
             <a:lvl4pPr indent="-342900" lvl="3" marL="1828800" algn="l">
+              <a:lnSpc>
+                <a:spcPct val="100000"/>
+              </a:lnSpc>
               <a:spcBef>
                 <a:spcPts val="360"/>
               </a:spcBef>
@@ -6330,6 +7076,9 @@
               <a:defRPr/>
             </a:lvl4pPr>
             <a:lvl5pPr indent="-342900" lvl="4" marL="2286000" algn="l">
+              <a:lnSpc>
+                <a:spcPct val="100000"/>
+              </a:lnSpc>
               <a:spcBef>
                 <a:spcPts val="360"/>
               </a:spcBef>
@@ -6442,6 +7191,9 @@
           </a:bodyPr>
           <a:lstStyle>
             <a:lvl1pPr indent="-228600" lvl="0" marL="457200" algn="l">
+              <a:lnSpc>
+                <a:spcPct val="100000"/>
+              </a:lnSpc>
               <a:spcBef>
                 <a:spcPts val="480"/>
               </a:spcBef>
@@ -6454,6 +7206,9 @@
               <a:defRPr b="1" sz="2400"/>
             </a:lvl1pPr>
             <a:lvl2pPr indent="-228600" lvl="1" marL="914400" algn="l">
+              <a:lnSpc>
+                <a:spcPct val="100000"/>
+              </a:lnSpc>
               <a:spcBef>
                 <a:spcPts val="400"/>
               </a:spcBef>
@@ -6469,6 +7224,9 @@
               <a:defRPr b="1" sz="2000"/>
             </a:lvl2pPr>
             <a:lvl3pPr indent="-228600" lvl="2" marL="1371600" algn="l">
+              <a:lnSpc>
+                <a:spcPct val="100000"/>
+              </a:lnSpc>
               <a:spcBef>
                 <a:spcPts val="360"/>
               </a:spcBef>
@@ -6484,6 +7242,9 @@
               <a:defRPr b="1" sz="1800"/>
             </a:lvl3pPr>
             <a:lvl4pPr indent="-228600" lvl="3" marL="1828800" algn="l">
+              <a:lnSpc>
+                <a:spcPct val="100000"/>
+              </a:lnSpc>
               <a:spcBef>
                 <a:spcPts val="320"/>
               </a:spcBef>
@@ -6499,6 +7260,9 @@
               <a:defRPr b="1" sz="1600"/>
             </a:lvl4pPr>
             <a:lvl5pPr indent="-228600" lvl="4" marL="2286000" algn="l">
+              <a:lnSpc>
+                <a:spcPct val="100000"/>
+              </a:lnSpc>
               <a:spcBef>
                 <a:spcPts val="320"/>
               </a:spcBef>
@@ -6612,6 +7376,9 @@
           </a:bodyPr>
           <a:lstStyle>
             <a:lvl1pPr indent="-342900" lvl="0" marL="457200" algn="l">
+              <a:lnSpc>
+                <a:spcPct val="100000"/>
+              </a:lnSpc>
               <a:spcBef>
                 <a:spcPts val="360"/>
               </a:spcBef>
@@ -6623,6 +7390,9 @@
               <a:defRPr/>
             </a:lvl1pPr>
             <a:lvl2pPr indent="-342900" lvl="1" marL="914400" algn="l">
+              <a:lnSpc>
+                <a:spcPct val="100000"/>
+              </a:lnSpc>
               <a:spcBef>
                 <a:spcPts val="360"/>
               </a:spcBef>
@@ -6637,6 +7407,9 @@
               <a:defRPr/>
             </a:lvl2pPr>
             <a:lvl3pPr indent="-342900" lvl="2" marL="1371600" algn="l">
+              <a:lnSpc>
+                <a:spcPct val="100000"/>
+              </a:lnSpc>
               <a:spcBef>
                 <a:spcPts val="360"/>
               </a:spcBef>
@@ -6651,6 +7424,9 @@
               <a:defRPr/>
             </a:lvl3pPr>
             <a:lvl4pPr indent="-342900" lvl="3" marL="1828800" algn="l">
+              <a:lnSpc>
+                <a:spcPct val="100000"/>
+              </a:lnSpc>
               <a:spcBef>
                 <a:spcPts val="360"/>
               </a:spcBef>
@@ -6665,6 +7441,9 @@
               <a:defRPr/>
             </a:lvl4pPr>
             <a:lvl5pPr indent="-342900" lvl="4" marL="2286000" algn="l">
+              <a:lnSpc>
+                <a:spcPct val="100000"/>
+              </a:lnSpc>
               <a:spcBef>
                 <a:spcPts val="360"/>
               </a:spcBef>
@@ -7104,7 +7883,7 @@
               <a:buSzPts val="1100"/>
               <a:buFont typeface="Arial"/>
               <a:buNone/>
-              <a:defRPr b="0" i="0" sz="1100" u="none">
+              <a:defRPr b="0" i="0" sz="1100" u="none" cap="none" strike="noStrike">
                 <a:solidFill>
                   <a:schemeClr val="lt1"/>
                 </a:solidFill>
@@ -7130,7 +7909,7 @@
               <a:buSzPts val="1100"/>
               <a:buFont typeface="Arial"/>
               <a:buNone/>
-              <a:defRPr b="0" i="0" sz="1100" u="none">
+              <a:defRPr b="0" i="0" sz="1100" u="none" cap="none" strike="noStrike">
                 <a:solidFill>
                   <a:schemeClr val="lt1"/>
                 </a:solidFill>
@@ -7156,7 +7935,7 @@
               <a:buSzPts val="1100"/>
               <a:buFont typeface="Arial"/>
               <a:buNone/>
-              <a:defRPr b="0" i="0" sz="1100" u="none">
+              <a:defRPr b="0" i="0" sz="1100" u="none" cap="none" strike="noStrike">
                 <a:solidFill>
                   <a:schemeClr val="lt1"/>
                 </a:solidFill>
@@ -7182,7 +7961,7 @@
               <a:buSzPts val="1100"/>
               <a:buFont typeface="Arial"/>
               <a:buNone/>
-              <a:defRPr b="0" i="0" sz="1100" u="none">
+              <a:defRPr b="0" i="0" sz="1100" u="none" cap="none" strike="noStrike">
                 <a:solidFill>
                   <a:schemeClr val="lt1"/>
                 </a:solidFill>
@@ -7208,7 +7987,7 @@
               <a:buSzPts val="1100"/>
               <a:buFont typeface="Arial"/>
               <a:buNone/>
-              <a:defRPr b="0" i="0" sz="1100" u="none">
+              <a:defRPr b="0" i="0" sz="1100" u="none" cap="none" strike="noStrike">
                 <a:solidFill>
                   <a:schemeClr val="lt1"/>
                 </a:solidFill>
@@ -7234,7 +8013,7 @@
               <a:buSzPts val="1100"/>
               <a:buFont typeface="Arial"/>
               <a:buNone/>
-              <a:defRPr b="0" i="0" sz="1100" u="none">
+              <a:defRPr b="0" i="0" sz="1100" u="none" cap="none" strike="noStrike">
                 <a:solidFill>
                   <a:schemeClr val="lt1"/>
                 </a:solidFill>
@@ -7260,7 +8039,7 @@
               <a:buSzPts val="1100"/>
               <a:buFont typeface="Arial"/>
               <a:buNone/>
-              <a:defRPr b="0" i="0" sz="1100" u="none">
+              <a:defRPr b="0" i="0" sz="1100" u="none" cap="none" strike="noStrike">
                 <a:solidFill>
                   <a:schemeClr val="lt1"/>
                 </a:solidFill>
@@ -7286,7 +8065,7 @@
               <a:buSzPts val="1100"/>
               <a:buFont typeface="Arial"/>
               <a:buNone/>
-              <a:defRPr b="0" i="0" sz="1100" u="none">
+              <a:defRPr b="0" i="0" sz="1100" u="none" cap="none" strike="noStrike">
                 <a:solidFill>
                   <a:schemeClr val="lt1"/>
                 </a:solidFill>
@@ -7312,7 +8091,7 @@
               <a:buSzPts val="1100"/>
               <a:buFont typeface="Arial"/>
               <a:buNone/>
-              <a:defRPr b="0" i="0" sz="1100" u="none">
+              <a:defRPr b="0" i="0" sz="1100" u="none" cap="none" strike="noStrike">
                 <a:solidFill>
                   <a:schemeClr val="lt1"/>
                 </a:solidFill>
@@ -7397,6 +8176,9 @@
           </a:bodyPr>
           <a:lstStyle>
             <a:lvl1pPr lvl="0" algn="l">
+              <a:lnSpc>
+                <a:spcPct val="100000"/>
+              </a:lnSpc>
               <a:spcBef>
                 <a:spcPts val="0"/>
               </a:spcBef>
@@ -7408,6 +8190,9 @@
               <a:defRPr/>
             </a:lvl1pPr>
             <a:lvl2pPr lvl="1" algn="l">
+              <a:lnSpc>
+                <a:spcPct val="100000"/>
+              </a:lnSpc>
               <a:spcBef>
                 <a:spcPts val="0"/>
               </a:spcBef>
@@ -7419,6 +8204,9 @@
               <a:defRPr/>
             </a:lvl2pPr>
             <a:lvl3pPr lvl="2" algn="l">
+              <a:lnSpc>
+                <a:spcPct val="100000"/>
+              </a:lnSpc>
               <a:spcBef>
                 <a:spcPts val="0"/>
               </a:spcBef>
@@ -7430,6 +8218,9 @@
               <a:defRPr/>
             </a:lvl3pPr>
             <a:lvl4pPr lvl="3" algn="l">
+              <a:lnSpc>
+                <a:spcPct val="100000"/>
+              </a:lnSpc>
               <a:spcBef>
                 <a:spcPts val="0"/>
               </a:spcBef>
@@ -7441,6 +8232,9 @@
               <a:defRPr/>
             </a:lvl4pPr>
             <a:lvl5pPr lvl="4" algn="l">
+              <a:lnSpc>
+                <a:spcPct val="100000"/>
+              </a:lnSpc>
               <a:spcBef>
                 <a:spcPts val="0"/>
               </a:spcBef>
@@ -7452,6 +8246,9 @@
               <a:defRPr/>
             </a:lvl5pPr>
             <a:lvl6pPr lvl="5" algn="l">
+              <a:lnSpc>
+                <a:spcPct val="100000"/>
+              </a:lnSpc>
               <a:spcBef>
                 <a:spcPts val="0"/>
               </a:spcBef>
@@ -7463,6 +8260,9 @@
               <a:defRPr/>
             </a:lvl6pPr>
             <a:lvl7pPr lvl="6" algn="l">
+              <a:lnSpc>
+                <a:spcPct val="100000"/>
+              </a:lnSpc>
               <a:spcBef>
                 <a:spcPts val="0"/>
               </a:spcBef>
@@ -7474,6 +8274,9 @@
               <a:defRPr/>
             </a:lvl7pPr>
             <a:lvl8pPr lvl="7" algn="l">
+              <a:lnSpc>
+                <a:spcPct val="100000"/>
+              </a:lnSpc>
               <a:spcBef>
                 <a:spcPts val="0"/>
               </a:spcBef>
@@ -7485,6 +8288,9 @@
               <a:defRPr/>
             </a:lvl8pPr>
             <a:lvl9pPr lvl="8" algn="l">
+              <a:lnSpc>
+                <a:spcPct val="100000"/>
+              </a:lnSpc>
               <a:spcBef>
                 <a:spcPts val="0"/>
               </a:spcBef>
@@ -7526,6 +8332,9 @@
           </a:bodyPr>
           <a:lstStyle>
             <a:lvl1pPr indent="-342900" lvl="0" marL="457200" algn="l">
+              <a:lnSpc>
+                <a:spcPct val="100000"/>
+              </a:lnSpc>
               <a:spcBef>
                 <a:spcPts val="360"/>
               </a:spcBef>
@@ -7537,6 +8346,9 @@
               <a:defRPr/>
             </a:lvl1pPr>
             <a:lvl2pPr indent="-342900" lvl="1" marL="914400" algn="l">
+              <a:lnSpc>
+                <a:spcPct val="100000"/>
+              </a:lnSpc>
               <a:spcBef>
                 <a:spcPts val="360"/>
               </a:spcBef>
@@ -7551,6 +8363,9 @@
               <a:defRPr/>
             </a:lvl2pPr>
             <a:lvl3pPr indent="-342900" lvl="2" marL="1371600" algn="l">
+              <a:lnSpc>
+                <a:spcPct val="100000"/>
+              </a:lnSpc>
               <a:spcBef>
                 <a:spcPts val="360"/>
               </a:spcBef>
@@ -7565,6 +8380,9 @@
               <a:defRPr/>
             </a:lvl3pPr>
             <a:lvl4pPr indent="-342900" lvl="3" marL="1828800" algn="l">
+              <a:lnSpc>
+                <a:spcPct val="100000"/>
+              </a:lnSpc>
               <a:spcBef>
                 <a:spcPts val="360"/>
               </a:spcBef>
@@ -7579,6 +8397,9 @@
               <a:defRPr/>
             </a:lvl4pPr>
             <a:lvl5pPr indent="-342900" lvl="4" marL="2286000" algn="l">
+              <a:lnSpc>
+                <a:spcPct val="100000"/>
+              </a:lnSpc>
               <a:spcBef>
                 <a:spcPts val="360"/>
               </a:spcBef>
@@ -7691,6 +8512,9 @@
           </a:bodyPr>
           <a:lstStyle>
             <a:lvl1pPr indent="-342900" lvl="0" marL="457200" algn="l">
+              <a:lnSpc>
+                <a:spcPct val="100000"/>
+              </a:lnSpc>
               <a:spcBef>
                 <a:spcPts val="360"/>
               </a:spcBef>
@@ -7702,6 +8526,9 @@
               <a:defRPr/>
             </a:lvl1pPr>
             <a:lvl2pPr indent="-342900" lvl="1" marL="914400" algn="l">
+              <a:lnSpc>
+                <a:spcPct val="100000"/>
+              </a:lnSpc>
               <a:spcBef>
                 <a:spcPts val="360"/>
               </a:spcBef>
@@ -7716,6 +8543,9 @@
               <a:defRPr/>
             </a:lvl2pPr>
             <a:lvl3pPr indent="-342900" lvl="2" marL="1371600" algn="l">
+              <a:lnSpc>
+                <a:spcPct val="100000"/>
+              </a:lnSpc>
               <a:spcBef>
                 <a:spcPts val="360"/>
               </a:spcBef>
@@ -7730,6 +8560,9 @@
               <a:defRPr/>
             </a:lvl3pPr>
             <a:lvl4pPr indent="-342900" lvl="3" marL="1828800" algn="l">
+              <a:lnSpc>
+                <a:spcPct val="100000"/>
+              </a:lnSpc>
               <a:spcBef>
                 <a:spcPts val="360"/>
               </a:spcBef>
@@ -7744,6 +8577,9 @@
               <a:defRPr/>
             </a:lvl4pPr>
             <a:lvl5pPr indent="-342900" lvl="4" marL="2286000" algn="l">
+              <a:lnSpc>
+                <a:spcPct val="100000"/>
+              </a:lnSpc>
               <a:spcBef>
                 <a:spcPts val="360"/>
               </a:spcBef>
@@ -8183,7 +9019,7 @@
               <a:buSzPts val="1100"/>
               <a:buFont typeface="Arial"/>
               <a:buNone/>
-              <a:defRPr b="0" i="0" sz="1100" u="none">
+              <a:defRPr b="0" i="0" sz="1100" u="none" cap="none" strike="noStrike">
                 <a:solidFill>
                   <a:schemeClr val="lt1"/>
                 </a:solidFill>
@@ -8209,7 +9045,7 @@
               <a:buSzPts val="1100"/>
               <a:buFont typeface="Arial"/>
               <a:buNone/>
-              <a:defRPr b="0" i="0" sz="1100" u="none">
+              <a:defRPr b="0" i="0" sz="1100" u="none" cap="none" strike="noStrike">
                 <a:solidFill>
                   <a:schemeClr val="lt1"/>
                 </a:solidFill>
@@ -8235,7 +9071,7 @@
               <a:buSzPts val="1100"/>
               <a:buFont typeface="Arial"/>
               <a:buNone/>
-              <a:defRPr b="0" i="0" sz="1100" u="none">
+              <a:defRPr b="0" i="0" sz="1100" u="none" cap="none" strike="noStrike">
                 <a:solidFill>
                   <a:schemeClr val="lt1"/>
                 </a:solidFill>
@@ -8261,7 +9097,7 @@
               <a:buSzPts val="1100"/>
               <a:buFont typeface="Arial"/>
               <a:buNone/>
-              <a:defRPr b="0" i="0" sz="1100" u="none">
+              <a:defRPr b="0" i="0" sz="1100" u="none" cap="none" strike="noStrike">
                 <a:solidFill>
                   <a:schemeClr val="lt1"/>
                 </a:solidFill>
@@ -8287,7 +9123,7 @@
               <a:buSzPts val="1100"/>
               <a:buFont typeface="Arial"/>
               <a:buNone/>
-              <a:defRPr b="0" i="0" sz="1100" u="none">
+              <a:defRPr b="0" i="0" sz="1100" u="none" cap="none" strike="noStrike">
                 <a:solidFill>
                   <a:schemeClr val="lt1"/>
                 </a:solidFill>
@@ -8313,7 +9149,7 @@
               <a:buSzPts val="1100"/>
               <a:buFont typeface="Arial"/>
               <a:buNone/>
-              <a:defRPr b="0" i="0" sz="1100" u="none">
+              <a:defRPr b="0" i="0" sz="1100" u="none" cap="none" strike="noStrike">
                 <a:solidFill>
                   <a:schemeClr val="lt1"/>
                 </a:solidFill>
@@ -8339,7 +9175,7 @@
               <a:buSzPts val="1100"/>
               <a:buFont typeface="Arial"/>
               <a:buNone/>
-              <a:defRPr b="0" i="0" sz="1100" u="none">
+              <a:defRPr b="0" i="0" sz="1100" u="none" cap="none" strike="noStrike">
                 <a:solidFill>
                   <a:schemeClr val="lt1"/>
                 </a:solidFill>
@@ -8365,7 +9201,7 @@
               <a:buSzPts val="1100"/>
               <a:buFont typeface="Arial"/>
               <a:buNone/>
-              <a:defRPr b="0" i="0" sz="1100" u="none">
+              <a:defRPr b="0" i="0" sz="1100" u="none" cap="none" strike="noStrike">
                 <a:solidFill>
                   <a:schemeClr val="lt1"/>
                 </a:solidFill>
@@ -8391,7 +9227,7 @@
               <a:buSzPts val="1100"/>
               <a:buFont typeface="Arial"/>
               <a:buNone/>
-              <a:defRPr b="0" i="0" sz="1100" u="none">
+              <a:defRPr b="0" i="0" sz="1100" u="none" cap="none" strike="noStrike">
                 <a:solidFill>
                   <a:schemeClr val="lt1"/>
                 </a:solidFill>
@@ -8476,6 +9312,9 @@
           </a:bodyPr>
           <a:lstStyle>
             <a:lvl1pPr lvl="0" algn="l">
+              <a:lnSpc>
+                <a:spcPct val="100000"/>
+              </a:lnSpc>
               <a:spcBef>
                 <a:spcPts val="0"/>
               </a:spcBef>
@@ -8487,6 +9326,9 @@
               <a:defRPr sz="6000"/>
             </a:lvl1pPr>
             <a:lvl2pPr lvl="1" algn="l">
+              <a:lnSpc>
+                <a:spcPct val="100000"/>
+              </a:lnSpc>
               <a:spcBef>
                 <a:spcPts val="0"/>
               </a:spcBef>
@@ -8498,6 +9340,9 @@
               <a:defRPr/>
             </a:lvl2pPr>
             <a:lvl3pPr lvl="2" algn="l">
+              <a:lnSpc>
+                <a:spcPct val="100000"/>
+              </a:lnSpc>
               <a:spcBef>
                 <a:spcPts val="0"/>
               </a:spcBef>
@@ -8509,6 +9354,9 @@
               <a:defRPr/>
             </a:lvl3pPr>
             <a:lvl4pPr lvl="3" algn="l">
+              <a:lnSpc>
+                <a:spcPct val="100000"/>
+              </a:lnSpc>
               <a:spcBef>
                 <a:spcPts val="0"/>
               </a:spcBef>
@@ -8520,6 +9368,9 @@
               <a:defRPr/>
             </a:lvl4pPr>
             <a:lvl5pPr lvl="4" algn="l">
+              <a:lnSpc>
+                <a:spcPct val="100000"/>
+              </a:lnSpc>
               <a:spcBef>
                 <a:spcPts val="0"/>
               </a:spcBef>
@@ -8531,6 +9382,9 @@
               <a:defRPr/>
             </a:lvl5pPr>
             <a:lvl6pPr lvl="5" algn="l">
+              <a:lnSpc>
+                <a:spcPct val="100000"/>
+              </a:lnSpc>
               <a:spcBef>
                 <a:spcPts val="0"/>
               </a:spcBef>
@@ -8542,6 +9396,9 @@
               <a:defRPr/>
             </a:lvl6pPr>
             <a:lvl7pPr lvl="6" algn="l">
+              <a:lnSpc>
+                <a:spcPct val="100000"/>
+              </a:lnSpc>
               <a:spcBef>
                 <a:spcPts val="0"/>
               </a:spcBef>
@@ -8553,6 +9410,9 @@
               <a:defRPr/>
             </a:lvl7pPr>
             <a:lvl8pPr lvl="7" algn="l">
+              <a:lnSpc>
+                <a:spcPct val="100000"/>
+              </a:lnSpc>
               <a:spcBef>
                 <a:spcPts val="0"/>
               </a:spcBef>
@@ -8564,6 +9424,9 @@
               <a:defRPr/>
             </a:lvl8pPr>
             <a:lvl9pPr lvl="8" algn="l">
+              <a:lnSpc>
+                <a:spcPct val="100000"/>
+              </a:lnSpc>
               <a:spcBef>
                 <a:spcPts val="0"/>
               </a:spcBef>
@@ -8605,6 +9468,9 @@
           </a:bodyPr>
           <a:lstStyle>
             <a:lvl1pPr indent="-228600" lvl="0" marL="457200" algn="l">
+              <a:lnSpc>
+                <a:spcPct val="100000"/>
+              </a:lnSpc>
               <a:spcBef>
                 <a:spcPts val="480"/>
               </a:spcBef>
@@ -8617,6 +9483,9 @@
               <a:defRPr sz="2400"/>
             </a:lvl1pPr>
             <a:lvl2pPr indent="-228600" lvl="1" marL="914400" algn="l">
+              <a:lnSpc>
+                <a:spcPct val="100000"/>
+              </a:lnSpc>
               <a:spcBef>
                 <a:spcPts val="400"/>
               </a:spcBef>
@@ -8632,6 +9501,9 @@
               <a:defRPr sz="2000"/>
             </a:lvl2pPr>
             <a:lvl3pPr indent="-228600" lvl="2" marL="1371600" algn="l">
+              <a:lnSpc>
+                <a:spcPct val="100000"/>
+              </a:lnSpc>
               <a:spcBef>
                 <a:spcPts val="360"/>
               </a:spcBef>
@@ -8647,6 +9519,9 @@
               <a:defRPr sz="1800"/>
             </a:lvl3pPr>
             <a:lvl4pPr indent="-228600" lvl="3" marL="1828800" algn="l">
+              <a:lnSpc>
+                <a:spcPct val="100000"/>
+              </a:lnSpc>
               <a:spcBef>
                 <a:spcPts val="320"/>
               </a:spcBef>
@@ -8662,6 +9537,9 @@
               <a:defRPr sz="1600"/>
             </a:lvl4pPr>
             <a:lvl5pPr indent="-228600" lvl="4" marL="2286000" algn="l">
+              <a:lnSpc>
+                <a:spcPct val="100000"/>
+              </a:lnSpc>
               <a:spcBef>
                 <a:spcPts val="320"/>
               </a:spcBef>
@@ -9102,7 +9980,7 @@
               <a:buSzPts val="1100"/>
               <a:buFont typeface="Arial"/>
               <a:buNone/>
-              <a:defRPr b="0" i="0" sz="1100" u="none">
+              <a:defRPr b="0" i="0" sz="1100" u="none" cap="none" strike="noStrike">
                 <a:solidFill>
                   <a:schemeClr val="lt1"/>
                 </a:solidFill>
@@ -9128,7 +10006,7 @@
               <a:buSzPts val="1100"/>
               <a:buFont typeface="Arial"/>
               <a:buNone/>
-              <a:defRPr b="0" i="0" sz="1100" u="none">
+              <a:defRPr b="0" i="0" sz="1100" u="none" cap="none" strike="noStrike">
                 <a:solidFill>
                   <a:schemeClr val="lt1"/>
                 </a:solidFill>
@@ -9154,7 +10032,7 @@
               <a:buSzPts val="1100"/>
               <a:buFont typeface="Arial"/>
               <a:buNone/>
-              <a:defRPr b="0" i="0" sz="1100" u="none">
+              <a:defRPr b="0" i="0" sz="1100" u="none" cap="none" strike="noStrike">
                 <a:solidFill>
                   <a:schemeClr val="lt1"/>
                 </a:solidFill>
@@ -9180,7 +10058,7 @@
               <a:buSzPts val="1100"/>
               <a:buFont typeface="Arial"/>
               <a:buNone/>
-              <a:defRPr b="0" i="0" sz="1100" u="none">
+              <a:defRPr b="0" i="0" sz="1100" u="none" cap="none" strike="noStrike">
                 <a:solidFill>
                   <a:schemeClr val="lt1"/>
                 </a:solidFill>
@@ -9206,7 +10084,7 @@
               <a:buSzPts val="1100"/>
               <a:buFont typeface="Arial"/>
               <a:buNone/>
-              <a:defRPr b="0" i="0" sz="1100" u="none">
+              <a:defRPr b="0" i="0" sz="1100" u="none" cap="none" strike="noStrike">
                 <a:solidFill>
                   <a:schemeClr val="lt1"/>
                 </a:solidFill>
@@ -9232,7 +10110,7 @@
               <a:buSzPts val="1100"/>
               <a:buFont typeface="Arial"/>
               <a:buNone/>
-              <a:defRPr b="0" i="0" sz="1100" u="none">
+              <a:defRPr b="0" i="0" sz="1100" u="none" cap="none" strike="noStrike">
                 <a:solidFill>
                   <a:schemeClr val="lt1"/>
                 </a:solidFill>
@@ -9258,7 +10136,7 @@
               <a:buSzPts val="1100"/>
               <a:buFont typeface="Arial"/>
               <a:buNone/>
-              <a:defRPr b="0" i="0" sz="1100" u="none">
+              <a:defRPr b="0" i="0" sz="1100" u="none" cap="none" strike="noStrike">
                 <a:solidFill>
                   <a:schemeClr val="lt1"/>
                 </a:solidFill>
@@ -9284,7 +10162,7 @@
               <a:buSzPts val="1100"/>
               <a:buFont typeface="Arial"/>
               <a:buNone/>
-              <a:defRPr b="0" i="0" sz="1100" u="none">
+              <a:defRPr b="0" i="0" sz="1100" u="none" cap="none" strike="noStrike">
                 <a:solidFill>
                   <a:schemeClr val="lt1"/>
                 </a:solidFill>
@@ -9310,7 +10188,7 @@
               <a:buSzPts val="1100"/>
               <a:buFont typeface="Arial"/>
               <a:buNone/>
-              <a:defRPr b="0" i="0" sz="1100" u="none">
+              <a:defRPr b="0" i="0" sz="1100" u="none" cap="none" strike="noStrike">
                 <a:solidFill>
                   <a:schemeClr val="lt1"/>
                 </a:solidFill>
@@ -9395,6 +10273,9 @@
           </a:bodyPr>
           <a:lstStyle>
             <a:lvl1pPr lvl="0" algn="l">
+              <a:lnSpc>
+                <a:spcPct val="100000"/>
+              </a:lnSpc>
               <a:spcBef>
                 <a:spcPts val="0"/>
               </a:spcBef>
@@ -9406,6 +10287,9 @@
               <a:defRPr/>
             </a:lvl1pPr>
             <a:lvl2pPr lvl="1" algn="l">
+              <a:lnSpc>
+                <a:spcPct val="100000"/>
+              </a:lnSpc>
               <a:spcBef>
                 <a:spcPts val="0"/>
               </a:spcBef>
@@ -9417,6 +10301,9 @@
               <a:defRPr/>
             </a:lvl2pPr>
             <a:lvl3pPr lvl="2" algn="l">
+              <a:lnSpc>
+                <a:spcPct val="100000"/>
+              </a:lnSpc>
               <a:spcBef>
                 <a:spcPts val="0"/>
               </a:spcBef>
@@ -9428,6 +10315,9 @@
               <a:defRPr/>
             </a:lvl3pPr>
             <a:lvl4pPr lvl="3" algn="l">
+              <a:lnSpc>
+                <a:spcPct val="100000"/>
+              </a:lnSpc>
               <a:spcBef>
                 <a:spcPts val="0"/>
               </a:spcBef>
@@ -9439,6 +10329,9 @@
               <a:defRPr/>
             </a:lvl4pPr>
             <a:lvl5pPr lvl="4" algn="l">
+              <a:lnSpc>
+                <a:spcPct val="100000"/>
+              </a:lnSpc>
               <a:spcBef>
                 <a:spcPts val="0"/>
               </a:spcBef>
@@ -9450,6 +10343,9 @@
               <a:defRPr/>
             </a:lvl5pPr>
             <a:lvl6pPr lvl="5" algn="l">
+              <a:lnSpc>
+                <a:spcPct val="100000"/>
+              </a:lnSpc>
               <a:spcBef>
                 <a:spcPts val="0"/>
               </a:spcBef>
@@ -9461,6 +10357,9 @@
               <a:defRPr/>
             </a:lvl6pPr>
             <a:lvl7pPr lvl="6" algn="l">
+              <a:lnSpc>
+                <a:spcPct val="100000"/>
+              </a:lnSpc>
               <a:spcBef>
                 <a:spcPts val="0"/>
               </a:spcBef>
@@ -9472,6 +10371,9 @@
               <a:defRPr/>
             </a:lvl7pPr>
             <a:lvl8pPr lvl="7" algn="l">
+              <a:lnSpc>
+                <a:spcPct val="100000"/>
+              </a:lnSpc>
               <a:spcBef>
                 <a:spcPts val="0"/>
               </a:spcBef>
@@ -9483,6 +10385,9 @@
               <a:defRPr/>
             </a:lvl8pPr>
             <a:lvl9pPr lvl="8" algn="l">
+              <a:lnSpc>
+                <a:spcPct val="100000"/>
+              </a:lnSpc>
               <a:spcBef>
                 <a:spcPts val="0"/>
               </a:spcBef>
@@ -9524,6 +10429,9 @@
           </a:bodyPr>
           <a:lstStyle>
             <a:lvl1pPr indent="-342900" lvl="0" marL="457200" algn="l">
+              <a:lnSpc>
+                <a:spcPct val="100000"/>
+              </a:lnSpc>
               <a:spcBef>
                 <a:spcPts val="360"/>
               </a:spcBef>
@@ -9535,6 +10443,9 @@
               <a:defRPr/>
             </a:lvl1pPr>
             <a:lvl2pPr indent="-342900" lvl="1" marL="914400" algn="l">
+              <a:lnSpc>
+                <a:spcPct val="100000"/>
+              </a:lnSpc>
               <a:spcBef>
                 <a:spcPts val="360"/>
               </a:spcBef>
@@ -9549,6 +10460,9 @@
               <a:defRPr/>
             </a:lvl2pPr>
             <a:lvl3pPr indent="-342900" lvl="2" marL="1371600" algn="l">
+              <a:lnSpc>
+                <a:spcPct val="100000"/>
+              </a:lnSpc>
               <a:spcBef>
                 <a:spcPts val="360"/>
               </a:spcBef>
@@ -9563,6 +10477,9 @@
               <a:defRPr/>
             </a:lvl3pPr>
             <a:lvl4pPr indent="-342900" lvl="3" marL="1828800" algn="l">
+              <a:lnSpc>
+                <a:spcPct val="100000"/>
+              </a:lnSpc>
               <a:spcBef>
                 <a:spcPts val="360"/>
               </a:spcBef>
@@ -9577,6 +10494,9 @@
               <a:defRPr/>
             </a:lvl4pPr>
             <a:lvl5pPr indent="-342900" lvl="4" marL="2286000" algn="l">
+              <a:lnSpc>
+                <a:spcPct val="100000"/>
+              </a:lnSpc>
               <a:spcBef>
                 <a:spcPts val="360"/>
               </a:spcBef>
@@ -10016,7 +10936,7 @@
               <a:buSzPts val="1100"/>
               <a:buFont typeface="Arial"/>
               <a:buNone/>
-              <a:defRPr b="0" i="0" sz="1100" u="none">
+              <a:defRPr b="0" i="0" sz="1100" u="none" cap="none" strike="noStrike">
                 <a:solidFill>
                   <a:schemeClr val="lt1"/>
                 </a:solidFill>
@@ -10042,7 +10962,7 @@
               <a:buSzPts val="1100"/>
               <a:buFont typeface="Arial"/>
               <a:buNone/>
-              <a:defRPr b="0" i="0" sz="1100" u="none">
+              <a:defRPr b="0" i="0" sz="1100" u="none" cap="none" strike="noStrike">
                 <a:solidFill>
                   <a:schemeClr val="lt1"/>
                 </a:solidFill>
@@ -10068,7 +10988,7 @@
               <a:buSzPts val="1100"/>
               <a:buFont typeface="Arial"/>
               <a:buNone/>
-              <a:defRPr b="0" i="0" sz="1100" u="none">
+              <a:defRPr b="0" i="0" sz="1100" u="none" cap="none" strike="noStrike">
                 <a:solidFill>
                   <a:schemeClr val="lt1"/>
                 </a:solidFill>
@@ -10094,7 +11014,7 @@
               <a:buSzPts val="1100"/>
               <a:buFont typeface="Arial"/>
               <a:buNone/>
-              <a:defRPr b="0" i="0" sz="1100" u="none">
+              <a:defRPr b="0" i="0" sz="1100" u="none" cap="none" strike="noStrike">
                 <a:solidFill>
                   <a:schemeClr val="lt1"/>
                 </a:solidFill>
@@ -10120,7 +11040,7 @@
               <a:buSzPts val="1100"/>
               <a:buFont typeface="Arial"/>
               <a:buNone/>
-              <a:defRPr b="0" i="0" sz="1100" u="none">
+              <a:defRPr b="0" i="0" sz="1100" u="none" cap="none" strike="noStrike">
                 <a:solidFill>
                   <a:schemeClr val="lt1"/>
                 </a:solidFill>
@@ -10146,7 +11066,7 @@
               <a:buSzPts val="1100"/>
               <a:buFont typeface="Arial"/>
               <a:buNone/>
-              <a:defRPr b="0" i="0" sz="1100" u="none">
+              <a:defRPr b="0" i="0" sz="1100" u="none" cap="none" strike="noStrike">
                 <a:solidFill>
                   <a:schemeClr val="lt1"/>
                 </a:solidFill>
@@ -10172,7 +11092,7 @@
               <a:buSzPts val="1100"/>
               <a:buFont typeface="Arial"/>
               <a:buNone/>
-              <a:defRPr b="0" i="0" sz="1100" u="none">
+              <a:defRPr b="0" i="0" sz="1100" u="none" cap="none" strike="noStrike">
                 <a:solidFill>
                   <a:schemeClr val="lt1"/>
                 </a:solidFill>
@@ -10198,7 +11118,7 @@
               <a:buSzPts val="1100"/>
               <a:buFont typeface="Arial"/>
               <a:buNone/>
-              <a:defRPr b="0" i="0" sz="1100" u="none">
+              <a:defRPr b="0" i="0" sz="1100" u="none" cap="none" strike="noStrike">
                 <a:solidFill>
                   <a:schemeClr val="lt1"/>
                 </a:solidFill>
@@ -10224,7 +11144,7 @@
               <a:buSzPts val="1100"/>
               <a:buFont typeface="Arial"/>
               <a:buNone/>
-              <a:defRPr b="0" i="0" sz="1100" u="none">
+              <a:defRPr b="0" i="0" sz="1100" u="none" cap="none" strike="noStrike">
                 <a:solidFill>
                   <a:schemeClr val="lt1"/>
                 </a:solidFill>
@@ -10309,6 +11229,9 @@
           </a:bodyPr>
           <a:lstStyle>
             <a:lvl1pPr lvl="0" algn="l">
+              <a:lnSpc>
+                <a:spcPct val="100000"/>
+              </a:lnSpc>
               <a:spcBef>
                 <a:spcPts val="0"/>
               </a:spcBef>
@@ -10320,6 +11243,9 @@
               <a:defRPr/>
             </a:lvl1pPr>
             <a:lvl2pPr lvl="1" algn="l">
+              <a:lnSpc>
+                <a:spcPct val="100000"/>
+              </a:lnSpc>
               <a:spcBef>
                 <a:spcPts val="0"/>
               </a:spcBef>
@@ -10331,6 +11257,9 @@
               <a:defRPr/>
             </a:lvl2pPr>
             <a:lvl3pPr lvl="2" algn="l">
+              <a:lnSpc>
+                <a:spcPct val="100000"/>
+              </a:lnSpc>
               <a:spcBef>
                 <a:spcPts val="0"/>
               </a:spcBef>
@@ -10342,6 +11271,9 @@
               <a:defRPr/>
             </a:lvl3pPr>
             <a:lvl4pPr lvl="3" algn="l">
+              <a:lnSpc>
+                <a:spcPct val="100000"/>
+              </a:lnSpc>
               <a:spcBef>
                 <a:spcPts val="0"/>
               </a:spcBef>
@@ -10353,6 +11285,9 @@
               <a:defRPr/>
             </a:lvl4pPr>
             <a:lvl5pPr lvl="4" algn="l">
+              <a:lnSpc>
+                <a:spcPct val="100000"/>
+              </a:lnSpc>
               <a:spcBef>
                 <a:spcPts val="0"/>
               </a:spcBef>
@@ -10364,6 +11299,9 @@
               <a:defRPr/>
             </a:lvl5pPr>
             <a:lvl6pPr lvl="5" algn="l">
+              <a:lnSpc>
+                <a:spcPct val="100000"/>
+              </a:lnSpc>
               <a:spcBef>
                 <a:spcPts val="0"/>
               </a:spcBef>
@@ -10375,6 +11313,9 @@
               <a:defRPr/>
             </a:lvl6pPr>
             <a:lvl7pPr lvl="6" algn="l">
+              <a:lnSpc>
+                <a:spcPct val="100000"/>
+              </a:lnSpc>
               <a:spcBef>
                 <a:spcPts val="0"/>
               </a:spcBef>
@@ -10386,6 +11327,9 @@
               <a:defRPr/>
             </a:lvl7pPr>
             <a:lvl8pPr lvl="7" algn="l">
+              <a:lnSpc>
+                <a:spcPct val="100000"/>
+              </a:lnSpc>
               <a:spcBef>
                 <a:spcPts val="0"/>
               </a:spcBef>
@@ -10397,6 +11341,9 @@
               <a:defRPr/>
             </a:lvl8pPr>
             <a:lvl9pPr lvl="8" algn="l">
+              <a:lnSpc>
+                <a:spcPct val="100000"/>
+              </a:lnSpc>
               <a:spcBef>
                 <a:spcPts val="0"/>
               </a:spcBef>
@@ -10438,6 +11385,9 @@
           </a:bodyPr>
           <a:lstStyle>
             <a:lvl1pPr lvl="0" marR="0" rtl="0" algn="l">
+              <a:lnSpc>
+                <a:spcPct val="100000"/>
+              </a:lnSpc>
               <a:spcBef>
                 <a:spcPts val="480"/>
               </a:spcBef>
@@ -10450,7 +11400,7 @@
               <a:buSzPts val="2400"/>
               <a:buFont typeface="Arial"/>
               <a:buChar char="•"/>
-              <a:defRPr sz="2400">
+              <a:defRPr b="0" i="0" sz="2400" u="none" cap="none" strike="noStrike">
                 <a:solidFill>
                   <a:srgbClr val="000000"/>
                 </a:solidFill>
@@ -10461,6 +11411,9 @@
               </a:defRPr>
             </a:lvl1pPr>
             <a:lvl2pPr lvl="1" marR="0" rtl="0" algn="l">
+              <a:lnSpc>
+                <a:spcPct val="100000"/>
+              </a:lnSpc>
               <a:spcBef>
                 <a:spcPts val="400"/>
               </a:spcBef>
@@ -10484,6 +11437,9 @@
               </a:defRPr>
             </a:lvl2pPr>
             <a:lvl3pPr lvl="2" marR="0" rtl="0" algn="l">
+              <a:lnSpc>
+                <a:spcPct val="100000"/>
+              </a:lnSpc>
               <a:spcBef>
                 <a:spcPts val="320"/>
               </a:spcBef>
@@ -10507,6 +11463,9 @@
               </a:defRPr>
             </a:lvl3pPr>
             <a:lvl4pPr lvl="3" marR="0" rtl="0" algn="l">
+              <a:lnSpc>
+                <a:spcPct val="100000"/>
+              </a:lnSpc>
               <a:spcBef>
                 <a:spcPts val="280"/>
               </a:spcBef>
@@ -10530,6 +11489,9 @@
               </a:defRPr>
             </a:lvl4pPr>
             <a:lvl5pPr lvl="4" marR="0" rtl="0" algn="l">
+              <a:lnSpc>
+                <a:spcPct val="100000"/>
+              </a:lnSpc>
               <a:spcBef>
                 <a:spcPts val="240"/>
               </a:spcBef>
@@ -11014,7 +11976,7 @@
               <a:buSzPts val="1100"/>
               <a:buFont typeface="Arial"/>
               <a:buNone/>
-              <a:defRPr b="0" i="0" sz="1100" u="none">
+              <a:defRPr b="0" i="0" sz="1100" u="none" cap="none" strike="noStrike">
                 <a:solidFill>
                   <a:schemeClr val="lt1"/>
                 </a:solidFill>
@@ -11040,7 +12002,7 @@
               <a:buSzPts val="1100"/>
               <a:buFont typeface="Arial"/>
               <a:buNone/>
-              <a:defRPr b="0" i="0" sz="1100" u="none">
+              <a:defRPr b="0" i="0" sz="1100" u="none" cap="none" strike="noStrike">
                 <a:solidFill>
                   <a:schemeClr val="lt1"/>
                 </a:solidFill>
@@ -11066,7 +12028,7 @@
               <a:buSzPts val="1100"/>
               <a:buFont typeface="Arial"/>
               <a:buNone/>
-              <a:defRPr b="0" i="0" sz="1100" u="none">
+              <a:defRPr b="0" i="0" sz="1100" u="none" cap="none" strike="noStrike">
                 <a:solidFill>
                   <a:schemeClr val="lt1"/>
                 </a:solidFill>
@@ -11092,7 +12054,7 @@
               <a:buSzPts val="1100"/>
               <a:buFont typeface="Arial"/>
               <a:buNone/>
-              <a:defRPr b="0" i="0" sz="1100" u="none">
+              <a:defRPr b="0" i="0" sz="1100" u="none" cap="none" strike="noStrike">
                 <a:solidFill>
                   <a:schemeClr val="lt1"/>
                 </a:solidFill>
@@ -11118,7 +12080,7 @@
               <a:buSzPts val="1100"/>
               <a:buFont typeface="Arial"/>
               <a:buNone/>
-              <a:defRPr b="0" i="0" sz="1100" u="none">
+              <a:defRPr b="0" i="0" sz="1100" u="none" cap="none" strike="noStrike">
                 <a:solidFill>
                   <a:schemeClr val="lt1"/>
                 </a:solidFill>
@@ -11144,7 +12106,7 @@
               <a:buSzPts val="1100"/>
               <a:buFont typeface="Arial"/>
               <a:buNone/>
-              <a:defRPr b="0" i="0" sz="1100" u="none">
+              <a:defRPr b="0" i="0" sz="1100" u="none" cap="none" strike="noStrike">
                 <a:solidFill>
                   <a:schemeClr val="lt1"/>
                 </a:solidFill>
@@ -11170,7 +12132,7 @@
               <a:buSzPts val="1100"/>
               <a:buFont typeface="Arial"/>
               <a:buNone/>
-              <a:defRPr b="0" i="0" sz="1100" u="none">
+              <a:defRPr b="0" i="0" sz="1100" u="none" cap="none" strike="noStrike">
                 <a:solidFill>
                   <a:schemeClr val="lt1"/>
                 </a:solidFill>
@@ -11196,7 +12158,7 @@
               <a:buSzPts val="1100"/>
               <a:buFont typeface="Arial"/>
               <a:buNone/>
-              <a:defRPr b="0" i="0" sz="1100" u="none">
+              <a:defRPr b="0" i="0" sz="1100" u="none" cap="none" strike="noStrike">
                 <a:solidFill>
                   <a:schemeClr val="lt1"/>
                 </a:solidFill>
@@ -11222,7 +12184,7 @@
               <a:buSzPts val="1100"/>
               <a:buFont typeface="Arial"/>
               <a:buNone/>
-              <a:defRPr b="0" i="0" sz="1100" u="none">
+              <a:defRPr b="0" i="0" sz="1100" u="none" cap="none" strike="noStrike">
                 <a:solidFill>
                   <a:schemeClr val="lt1"/>
                 </a:solidFill>
@@ -11307,6 +12269,9 @@
           </a:bodyPr>
           <a:lstStyle>
             <a:lvl1pPr lvl="0" algn="l">
+              <a:lnSpc>
+                <a:spcPct val="100000"/>
+              </a:lnSpc>
               <a:spcBef>
                 <a:spcPts val="0"/>
               </a:spcBef>
@@ -11318,6 +12283,9 @@
               <a:defRPr/>
             </a:lvl1pPr>
             <a:lvl2pPr lvl="1" algn="l">
+              <a:lnSpc>
+                <a:spcPct val="100000"/>
+              </a:lnSpc>
               <a:spcBef>
                 <a:spcPts val="0"/>
               </a:spcBef>
@@ -11329,6 +12297,9 @@
               <a:defRPr/>
             </a:lvl2pPr>
             <a:lvl3pPr lvl="2" algn="l">
+              <a:lnSpc>
+                <a:spcPct val="100000"/>
+              </a:lnSpc>
               <a:spcBef>
                 <a:spcPts val="0"/>
               </a:spcBef>
@@ -11340,6 +12311,9 @@
               <a:defRPr/>
             </a:lvl3pPr>
             <a:lvl4pPr lvl="3" algn="l">
+              <a:lnSpc>
+                <a:spcPct val="100000"/>
+              </a:lnSpc>
               <a:spcBef>
                 <a:spcPts val="0"/>
               </a:spcBef>
@@ -11351,6 +12325,9 @@
               <a:defRPr/>
             </a:lvl4pPr>
             <a:lvl5pPr lvl="4" algn="l">
+              <a:lnSpc>
+                <a:spcPct val="100000"/>
+              </a:lnSpc>
               <a:spcBef>
                 <a:spcPts val="0"/>
               </a:spcBef>
@@ -11362,6 +12339,9 @@
               <a:defRPr/>
             </a:lvl5pPr>
             <a:lvl6pPr lvl="5" algn="l">
+              <a:lnSpc>
+                <a:spcPct val="100000"/>
+              </a:lnSpc>
               <a:spcBef>
                 <a:spcPts val="0"/>
               </a:spcBef>
@@ -11373,6 +12353,9 @@
               <a:defRPr/>
             </a:lvl6pPr>
             <a:lvl7pPr lvl="6" algn="l">
+              <a:lnSpc>
+                <a:spcPct val="100000"/>
+              </a:lnSpc>
               <a:spcBef>
                 <a:spcPts val="0"/>
               </a:spcBef>
@@ -11384,6 +12367,9 @@
               <a:defRPr/>
             </a:lvl7pPr>
             <a:lvl8pPr lvl="7" algn="l">
+              <a:lnSpc>
+                <a:spcPct val="100000"/>
+              </a:lnSpc>
               <a:spcBef>
                 <a:spcPts val="0"/>
               </a:spcBef>
@@ -11395,6 +12381,9 @@
               <a:defRPr/>
             </a:lvl8pPr>
             <a:lvl9pPr lvl="8" algn="l">
+              <a:lnSpc>
+                <a:spcPct val="100000"/>
+              </a:lnSpc>
               <a:spcBef>
                 <a:spcPts val="0"/>
               </a:spcBef>
@@ -11763,7 +12752,7 @@
               <a:buSzPts val="1100"/>
               <a:buFont typeface="Arial"/>
               <a:buNone/>
-              <a:defRPr b="0" i="0" sz="1100" u="none">
+              <a:defRPr b="0" i="0" sz="1100" u="none" cap="none" strike="noStrike">
                 <a:solidFill>
                   <a:schemeClr val="lt1"/>
                 </a:solidFill>
@@ -11789,7 +12778,7 @@
               <a:buSzPts val="1100"/>
               <a:buFont typeface="Arial"/>
               <a:buNone/>
-              <a:defRPr b="0" i="0" sz="1100" u="none">
+              <a:defRPr b="0" i="0" sz="1100" u="none" cap="none" strike="noStrike">
                 <a:solidFill>
                   <a:schemeClr val="lt1"/>
                 </a:solidFill>
@@ -11815,7 +12804,7 @@
               <a:buSzPts val="1100"/>
               <a:buFont typeface="Arial"/>
               <a:buNone/>
-              <a:defRPr b="0" i="0" sz="1100" u="none">
+              <a:defRPr b="0" i="0" sz="1100" u="none" cap="none" strike="noStrike">
                 <a:solidFill>
                   <a:schemeClr val="lt1"/>
                 </a:solidFill>
@@ -11841,7 +12830,7 @@
               <a:buSzPts val="1100"/>
               <a:buFont typeface="Arial"/>
               <a:buNone/>
-              <a:defRPr b="0" i="0" sz="1100" u="none">
+              <a:defRPr b="0" i="0" sz="1100" u="none" cap="none" strike="noStrike">
                 <a:solidFill>
                   <a:schemeClr val="lt1"/>
                 </a:solidFill>
@@ -11867,7 +12856,7 @@
               <a:buSzPts val="1100"/>
               <a:buFont typeface="Arial"/>
               <a:buNone/>
-              <a:defRPr b="0" i="0" sz="1100" u="none">
+              <a:defRPr b="0" i="0" sz="1100" u="none" cap="none" strike="noStrike">
                 <a:solidFill>
                   <a:schemeClr val="lt1"/>
                 </a:solidFill>
@@ -11893,7 +12882,7 @@
               <a:buSzPts val="1100"/>
               <a:buFont typeface="Arial"/>
               <a:buNone/>
-              <a:defRPr b="0" i="0" sz="1100" u="none">
+              <a:defRPr b="0" i="0" sz="1100" u="none" cap="none" strike="noStrike">
                 <a:solidFill>
                   <a:schemeClr val="lt1"/>
                 </a:solidFill>
@@ -11919,7 +12908,7 @@
               <a:buSzPts val="1100"/>
               <a:buFont typeface="Arial"/>
               <a:buNone/>
-              <a:defRPr b="0" i="0" sz="1100" u="none">
+              <a:defRPr b="0" i="0" sz="1100" u="none" cap="none" strike="noStrike">
                 <a:solidFill>
                   <a:schemeClr val="lt1"/>
                 </a:solidFill>
@@ -11945,7 +12934,7 @@
               <a:buSzPts val="1100"/>
               <a:buFont typeface="Arial"/>
               <a:buNone/>
-              <a:defRPr b="0" i="0" sz="1100" u="none">
+              <a:defRPr b="0" i="0" sz="1100" u="none" cap="none" strike="noStrike">
                 <a:solidFill>
                   <a:schemeClr val="lt1"/>
                 </a:solidFill>
@@ -11971,7 +12960,7 @@
               <a:buSzPts val="1100"/>
               <a:buFont typeface="Arial"/>
               <a:buNone/>
-              <a:defRPr b="0" i="0" sz="1100" u="none">
+              <a:defRPr b="0" i="0" sz="1100" u="none" cap="none" strike="noStrike">
                 <a:solidFill>
                   <a:schemeClr val="lt1"/>
                 </a:solidFill>
@@ -12056,6 +13045,9 @@
           </a:bodyPr>
           <a:lstStyle>
             <a:lvl1pPr lvl="0" algn="l">
+              <a:lnSpc>
+                <a:spcPct val="100000"/>
+              </a:lnSpc>
               <a:spcBef>
                 <a:spcPts val="0"/>
               </a:spcBef>
@@ -12067,6 +13059,9 @@
               <a:defRPr/>
             </a:lvl1pPr>
             <a:lvl2pPr lvl="1" algn="l">
+              <a:lnSpc>
+                <a:spcPct val="100000"/>
+              </a:lnSpc>
               <a:spcBef>
                 <a:spcPts val="0"/>
               </a:spcBef>
@@ -12078,6 +13073,9 @@
               <a:defRPr/>
             </a:lvl2pPr>
             <a:lvl3pPr lvl="2" algn="l">
+              <a:lnSpc>
+                <a:spcPct val="100000"/>
+              </a:lnSpc>
               <a:spcBef>
                 <a:spcPts val="0"/>
               </a:spcBef>
@@ -12089,6 +13087,9 @@
               <a:defRPr/>
             </a:lvl3pPr>
             <a:lvl4pPr lvl="3" algn="l">
+              <a:lnSpc>
+                <a:spcPct val="100000"/>
+              </a:lnSpc>
               <a:spcBef>
                 <a:spcPts val="0"/>
               </a:spcBef>
@@ -12100,6 +13101,9 @@
               <a:defRPr/>
             </a:lvl4pPr>
             <a:lvl5pPr lvl="4" algn="l">
+              <a:lnSpc>
+                <a:spcPct val="100000"/>
+              </a:lnSpc>
               <a:spcBef>
                 <a:spcPts val="0"/>
               </a:spcBef>
@@ -12111,6 +13115,9 @@
               <a:defRPr/>
             </a:lvl5pPr>
             <a:lvl6pPr lvl="5" algn="l">
+              <a:lnSpc>
+                <a:spcPct val="100000"/>
+              </a:lnSpc>
               <a:spcBef>
                 <a:spcPts val="0"/>
               </a:spcBef>
@@ -12122,6 +13129,9 @@
               <a:defRPr/>
             </a:lvl6pPr>
             <a:lvl7pPr lvl="6" algn="l">
+              <a:lnSpc>
+                <a:spcPct val="100000"/>
+              </a:lnSpc>
               <a:spcBef>
                 <a:spcPts val="0"/>
               </a:spcBef>
@@ -12133,6 +13143,9 @@
               <a:defRPr/>
             </a:lvl7pPr>
             <a:lvl8pPr lvl="7" algn="l">
+              <a:lnSpc>
+                <a:spcPct val="100000"/>
+              </a:lnSpc>
               <a:spcBef>
                 <a:spcPts val="0"/>
               </a:spcBef>
@@ -12144,6 +13157,9 @@
               <a:defRPr/>
             </a:lvl8pPr>
             <a:lvl9pPr lvl="8" algn="l">
+              <a:lnSpc>
+                <a:spcPct val="100000"/>
+              </a:lnSpc>
               <a:spcBef>
                 <a:spcPts val="0"/>
               </a:spcBef>
@@ -12185,6 +13201,9 @@
           </a:bodyPr>
           <a:lstStyle>
             <a:lvl1pPr indent="-342900" lvl="0" marL="457200" algn="l">
+              <a:lnSpc>
+                <a:spcPct val="100000"/>
+              </a:lnSpc>
               <a:spcBef>
                 <a:spcPts val="360"/>
               </a:spcBef>
@@ -12196,6 +13215,9 @@
               <a:defRPr/>
             </a:lvl1pPr>
             <a:lvl2pPr indent="-342900" lvl="1" marL="914400" algn="l">
+              <a:lnSpc>
+                <a:spcPct val="100000"/>
+              </a:lnSpc>
               <a:spcBef>
                 <a:spcPts val="360"/>
               </a:spcBef>
@@ -12210,6 +13232,9 @@
               <a:defRPr/>
             </a:lvl2pPr>
             <a:lvl3pPr indent="-342900" lvl="2" marL="1371600" algn="l">
+              <a:lnSpc>
+                <a:spcPct val="100000"/>
+              </a:lnSpc>
               <a:spcBef>
                 <a:spcPts val="360"/>
               </a:spcBef>
@@ -12224,6 +13249,9 @@
               <a:defRPr/>
             </a:lvl3pPr>
             <a:lvl4pPr indent="-342900" lvl="3" marL="1828800" algn="l">
+              <a:lnSpc>
+                <a:spcPct val="100000"/>
+              </a:lnSpc>
               <a:spcBef>
                 <a:spcPts val="360"/>
               </a:spcBef>
@@ -12238,6 +13266,9 @@
               <a:defRPr/>
             </a:lvl4pPr>
             <a:lvl5pPr indent="-342900" lvl="4" marL="2286000" algn="l">
+              <a:lnSpc>
+                <a:spcPct val="100000"/>
+              </a:lnSpc>
               <a:spcBef>
                 <a:spcPts val="360"/>
               </a:spcBef>
@@ -12350,6 +13381,9 @@
           </a:bodyPr>
           <a:lstStyle>
             <a:lvl1pPr indent="-342900" lvl="0" marL="457200" algn="l">
+              <a:lnSpc>
+                <a:spcPct val="100000"/>
+              </a:lnSpc>
               <a:spcBef>
                 <a:spcPts val="360"/>
               </a:spcBef>
@@ -12361,6 +13395,9 @@
               <a:defRPr/>
             </a:lvl1pPr>
             <a:lvl2pPr indent="-342900" lvl="1" marL="914400" algn="l">
+              <a:lnSpc>
+                <a:spcPct val="100000"/>
+              </a:lnSpc>
               <a:spcBef>
                 <a:spcPts val="360"/>
               </a:spcBef>
@@ -12375,6 +13412,9 @@
               <a:defRPr/>
             </a:lvl2pPr>
             <a:lvl3pPr indent="-342900" lvl="2" marL="1371600" algn="l">
+              <a:lnSpc>
+                <a:spcPct val="100000"/>
+              </a:lnSpc>
               <a:spcBef>
                 <a:spcPts val="360"/>
               </a:spcBef>
@@ -12389,6 +13429,9 @@
               <a:defRPr/>
             </a:lvl3pPr>
             <a:lvl4pPr indent="-342900" lvl="3" marL="1828800" algn="l">
+              <a:lnSpc>
+                <a:spcPct val="100000"/>
+              </a:lnSpc>
               <a:spcBef>
                 <a:spcPts val="360"/>
               </a:spcBef>
@@ -12403,6 +13446,9 @@
               <a:defRPr/>
             </a:lvl4pPr>
             <a:lvl5pPr indent="-342900" lvl="4" marL="2286000" algn="l">
+              <a:lnSpc>
+                <a:spcPct val="100000"/>
+              </a:lnSpc>
               <a:spcBef>
                 <a:spcPts val="360"/>
               </a:spcBef>
@@ -12842,7 +13888,7 @@
               <a:buSzPts val="1100"/>
               <a:buFont typeface="Arial"/>
               <a:buNone/>
-              <a:defRPr b="0" i="0" sz="1100" u="none">
+              <a:defRPr b="0" i="0" sz="1100" u="none" cap="none" strike="noStrike">
                 <a:solidFill>
                   <a:schemeClr val="lt1"/>
                 </a:solidFill>
@@ -12868,7 +13914,7 @@
               <a:buSzPts val="1100"/>
               <a:buFont typeface="Arial"/>
               <a:buNone/>
-              <a:defRPr b="0" i="0" sz="1100" u="none">
+              <a:defRPr b="0" i="0" sz="1100" u="none" cap="none" strike="noStrike">
                 <a:solidFill>
                   <a:schemeClr val="lt1"/>
                 </a:solidFill>
@@ -12894,7 +13940,7 @@
               <a:buSzPts val="1100"/>
               <a:buFont typeface="Arial"/>
               <a:buNone/>
-              <a:defRPr b="0" i="0" sz="1100" u="none">
+              <a:defRPr b="0" i="0" sz="1100" u="none" cap="none" strike="noStrike">
                 <a:solidFill>
                   <a:schemeClr val="lt1"/>
                 </a:solidFill>
@@ -12920,7 +13966,7 @@
               <a:buSzPts val="1100"/>
               <a:buFont typeface="Arial"/>
               <a:buNone/>
-              <a:defRPr b="0" i="0" sz="1100" u="none">
+              <a:defRPr b="0" i="0" sz="1100" u="none" cap="none" strike="noStrike">
                 <a:solidFill>
                   <a:schemeClr val="lt1"/>
                 </a:solidFill>
@@ -12946,7 +13992,7 @@
               <a:buSzPts val="1100"/>
               <a:buFont typeface="Arial"/>
               <a:buNone/>
-              <a:defRPr b="0" i="0" sz="1100" u="none">
+              <a:defRPr b="0" i="0" sz="1100" u="none" cap="none" strike="noStrike">
                 <a:solidFill>
                   <a:schemeClr val="lt1"/>
                 </a:solidFill>
@@ -12972,7 +14018,7 @@
               <a:buSzPts val="1100"/>
               <a:buFont typeface="Arial"/>
               <a:buNone/>
-              <a:defRPr b="0" i="0" sz="1100" u="none">
+              <a:defRPr b="0" i="0" sz="1100" u="none" cap="none" strike="noStrike">
                 <a:solidFill>
                   <a:schemeClr val="lt1"/>
                 </a:solidFill>
@@ -12998,7 +14044,7 @@
               <a:buSzPts val="1100"/>
               <a:buFont typeface="Arial"/>
               <a:buNone/>
-              <a:defRPr b="0" i="0" sz="1100" u="none">
+              <a:defRPr b="0" i="0" sz="1100" u="none" cap="none" strike="noStrike">
                 <a:solidFill>
                   <a:schemeClr val="lt1"/>
                 </a:solidFill>
@@ -13024,7 +14070,7 @@
               <a:buSzPts val="1100"/>
               <a:buFont typeface="Arial"/>
               <a:buNone/>
-              <a:defRPr b="0" i="0" sz="1100" u="none">
+              <a:defRPr b="0" i="0" sz="1100" u="none" cap="none" strike="noStrike">
                 <a:solidFill>
                   <a:schemeClr val="lt1"/>
                 </a:solidFill>
@@ -13050,7 +14096,7 @@
               <a:buSzPts val="1100"/>
               <a:buFont typeface="Arial"/>
               <a:buNone/>
-              <a:defRPr b="0" i="0" sz="1100" u="none">
+              <a:defRPr b="0" i="0" sz="1100" u="none" cap="none" strike="noStrike">
                 <a:solidFill>
                   <a:schemeClr val="lt1"/>
                 </a:solidFill>
@@ -13135,6 +14181,9 @@
           </a:bodyPr>
           <a:lstStyle>
             <a:lvl1pPr lvl="0" algn="l">
+              <a:lnSpc>
+                <a:spcPct val="100000"/>
+              </a:lnSpc>
               <a:spcBef>
                 <a:spcPts val="0"/>
               </a:spcBef>
@@ -13146,6 +14195,9 @@
               <a:defRPr/>
             </a:lvl1pPr>
             <a:lvl2pPr lvl="1" algn="l">
+              <a:lnSpc>
+                <a:spcPct val="100000"/>
+              </a:lnSpc>
               <a:spcBef>
                 <a:spcPts val="0"/>
               </a:spcBef>
@@ -13157,6 +14209,9 @@
               <a:defRPr/>
             </a:lvl2pPr>
             <a:lvl3pPr lvl="2" algn="l">
+              <a:lnSpc>
+                <a:spcPct val="100000"/>
+              </a:lnSpc>
               <a:spcBef>
                 <a:spcPts val="0"/>
               </a:spcBef>
@@ -13168,6 +14223,9 @@
               <a:defRPr/>
             </a:lvl3pPr>
             <a:lvl4pPr lvl="3" algn="l">
+              <a:lnSpc>
+                <a:spcPct val="100000"/>
+              </a:lnSpc>
               <a:spcBef>
                 <a:spcPts val="0"/>
               </a:spcBef>
@@ -13179,6 +14237,9 @@
               <a:defRPr/>
             </a:lvl4pPr>
             <a:lvl5pPr lvl="4" algn="l">
+              <a:lnSpc>
+                <a:spcPct val="100000"/>
+              </a:lnSpc>
               <a:spcBef>
                 <a:spcPts val="0"/>
               </a:spcBef>
@@ -13190,6 +14251,9 @@
               <a:defRPr/>
             </a:lvl5pPr>
             <a:lvl6pPr lvl="5" algn="l">
+              <a:lnSpc>
+                <a:spcPct val="100000"/>
+              </a:lnSpc>
               <a:spcBef>
                 <a:spcPts val="0"/>
               </a:spcBef>
@@ -13201,6 +14265,9 @@
               <a:defRPr/>
             </a:lvl6pPr>
             <a:lvl7pPr lvl="6" algn="l">
+              <a:lnSpc>
+                <a:spcPct val="100000"/>
+              </a:lnSpc>
               <a:spcBef>
                 <a:spcPts val="0"/>
               </a:spcBef>
@@ -13212,6 +14279,9 @@
               <a:defRPr/>
             </a:lvl7pPr>
             <a:lvl8pPr lvl="7" algn="l">
+              <a:lnSpc>
+                <a:spcPct val="100000"/>
+              </a:lnSpc>
               <a:spcBef>
                 <a:spcPts val="0"/>
               </a:spcBef>
@@ -13223,6 +14293,9 @@
               <a:defRPr/>
             </a:lvl8pPr>
             <a:lvl9pPr lvl="8" algn="l">
+              <a:lnSpc>
+                <a:spcPct val="100000"/>
+              </a:lnSpc>
               <a:spcBef>
                 <a:spcPts val="0"/>
               </a:spcBef>
@@ -13264,6 +14337,9 @@
           </a:bodyPr>
           <a:lstStyle>
             <a:lvl1pPr indent="-342900" lvl="0" marL="457200" algn="l">
+              <a:lnSpc>
+                <a:spcPct val="100000"/>
+              </a:lnSpc>
               <a:spcBef>
                 <a:spcPts val="360"/>
               </a:spcBef>
@@ -13275,6 +14351,9 @@
               <a:defRPr/>
             </a:lvl1pPr>
             <a:lvl2pPr indent="-342900" lvl="1" marL="914400" algn="l">
+              <a:lnSpc>
+                <a:spcPct val="100000"/>
+              </a:lnSpc>
               <a:spcBef>
                 <a:spcPts val="360"/>
               </a:spcBef>
@@ -13289,6 +14368,9 @@
               <a:defRPr/>
             </a:lvl2pPr>
             <a:lvl3pPr indent="-342900" lvl="2" marL="1371600" algn="l">
+              <a:lnSpc>
+                <a:spcPct val="100000"/>
+              </a:lnSpc>
               <a:spcBef>
                 <a:spcPts val="360"/>
               </a:spcBef>
@@ -13303,6 +14385,9 @@
               <a:defRPr/>
             </a:lvl3pPr>
             <a:lvl4pPr indent="-342900" lvl="3" marL="1828800" algn="l">
+              <a:lnSpc>
+                <a:spcPct val="100000"/>
+              </a:lnSpc>
               <a:spcBef>
                 <a:spcPts val="360"/>
               </a:spcBef>
@@ -13317,6 +14402,9 @@
               <a:defRPr/>
             </a:lvl4pPr>
             <a:lvl5pPr indent="-342900" lvl="4" marL="2286000" algn="l">
+              <a:lnSpc>
+                <a:spcPct val="100000"/>
+              </a:lnSpc>
               <a:spcBef>
                 <a:spcPts val="360"/>
               </a:spcBef>
@@ -13756,7 +14844,7 @@
               <a:buSzPts val="1100"/>
               <a:buFont typeface="Arial"/>
               <a:buNone/>
-              <a:defRPr b="0" i="0" sz="1100" u="none">
+              <a:defRPr b="0" i="0" sz="1100" u="none" cap="none" strike="noStrike">
                 <a:solidFill>
                   <a:schemeClr val="lt1"/>
                 </a:solidFill>
@@ -13782,7 +14870,7 @@
               <a:buSzPts val="1100"/>
               <a:buFont typeface="Arial"/>
               <a:buNone/>
-              <a:defRPr b="0" i="0" sz="1100" u="none">
+              <a:defRPr b="0" i="0" sz="1100" u="none" cap="none" strike="noStrike">
                 <a:solidFill>
                   <a:schemeClr val="lt1"/>
                 </a:solidFill>
@@ -13808,7 +14896,7 @@
               <a:buSzPts val="1100"/>
               <a:buFont typeface="Arial"/>
               <a:buNone/>
-              <a:defRPr b="0" i="0" sz="1100" u="none">
+              <a:defRPr b="0" i="0" sz="1100" u="none" cap="none" strike="noStrike">
                 <a:solidFill>
                   <a:schemeClr val="lt1"/>
                 </a:solidFill>
@@ -13834,7 +14922,7 @@
               <a:buSzPts val="1100"/>
               <a:buFont typeface="Arial"/>
               <a:buNone/>
-              <a:defRPr b="0" i="0" sz="1100" u="none">
+              <a:defRPr b="0" i="0" sz="1100" u="none" cap="none" strike="noStrike">
                 <a:solidFill>
                   <a:schemeClr val="lt1"/>
                 </a:solidFill>
@@ -13860,7 +14948,7 @@
               <a:buSzPts val="1100"/>
               <a:buFont typeface="Arial"/>
               <a:buNone/>
-              <a:defRPr b="0" i="0" sz="1100" u="none">
+              <a:defRPr b="0" i="0" sz="1100" u="none" cap="none" strike="noStrike">
                 <a:solidFill>
                   <a:schemeClr val="lt1"/>
                 </a:solidFill>
@@ -13886,7 +14974,7 @@
               <a:buSzPts val="1100"/>
               <a:buFont typeface="Arial"/>
               <a:buNone/>
-              <a:defRPr b="0" i="0" sz="1100" u="none">
+              <a:defRPr b="0" i="0" sz="1100" u="none" cap="none" strike="noStrike">
                 <a:solidFill>
                   <a:schemeClr val="lt1"/>
                 </a:solidFill>
@@ -13912,7 +15000,7 @@
               <a:buSzPts val="1100"/>
               <a:buFont typeface="Arial"/>
               <a:buNone/>
-              <a:defRPr b="0" i="0" sz="1100" u="none">
+              <a:defRPr b="0" i="0" sz="1100" u="none" cap="none" strike="noStrike">
                 <a:solidFill>
                   <a:schemeClr val="lt1"/>
                 </a:solidFill>
@@ -13938,7 +15026,7 @@
               <a:buSzPts val="1100"/>
               <a:buFont typeface="Arial"/>
               <a:buNone/>
-              <a:defRPr b="0" i="0" sz="1100" u="none">
+              <a:defRPr b="0" i="0" sz="1100" u="none" cap="none" strike="noStrike">
                 <a:solidFill>
                   <a:schemeClr val="lt1"/>
                 </a:solidFill>
@@ -13964,7 +15052,7 @@
               <a:buSzPts val="1100"/>
               <a:buFont typeface="Arial"/>
               <a:buNone/>
-              <a:defRPr b="0" i="0" sz="1100" u="none">
+              <a:defRPr b="0" i="0" sz="1100" u="none" cap="none" strike="noStrike">
                 <a:solidFill>
                   <a:schemeClr val="lt1"/>
                 </a:solidFill>
@@ -14049,6 +15137,9 @@
           </a:bodyPr>
           <a:lstStyle>
             <a:lvl1pPr lvl="0" algn="l">
+              <a:lnSpc>
+                <a:spcPct val="100000"/>
+              </a:lnSpc>
               <a:spcBef>
                 <a:spcPts val="0"/>
               </a:spcBef>
@@ -14060,6 +15151,9 @@
               <a:defRPr/>
             </a:lvl1pPr>
             <a:lvl2pPr lvl="1" algn="l">
+              <a:lnSpc>
+                <a:spcPct val="100000"/>
+              </a:lnSpc>
               <a:spcBef>
                 <a:spcPts val="0"/>
               </a:spcBef>
@@ -14071,6 +15165,9 @@
               <a:defRPr/>
             </a:lvl2pPr>
             <a:lvl3pPr lvl="2" algn="l">
+              <a:lnSpc>
+                <a:spcPct val="100000"/>
+              </a:lnSpc>
               <a:spcBef>
                 <a:spcPts val="0"/>
               </a:spcBef>
@@ -14082,6 +15179,9 @@
               <a:defRPr/>
             </a:lvl3pPr>
             <a:lvl4pPr lvl="3" algn="l">
+              <a:lnSpc>
+                <a:spcPct val="100000"/>
+              </a:lnSpc>
               <a:spcBef>
                 <a:spcPts val="0"/>
               </a:spcBef>
@@ -14093,6 +15193,9 @@
               <a:defRPr/>
             </a:lvl4pPr>
             <a:lvl5pPr lvl="4" algn="l">
+              <a:lnSpc>
+                <a:spcPct val="100000"/>
+              </a:lnSpc>
               <a:spcBef>
                 <a:spcPts val="0"/>
               </a:spcBef>
@@ -14104,6 +15207,9 @@
               <a:defRPr/>
             </a:lvl5pPr>
             <a:lvl6pPr lvl="5" algn="l">
+              <a:lnSpc>
+                <a:spcPct val="100000"/>
+              </a:lnSpc>
               <a:spcBef>
                 <a:spcPts val="0"/>
               </a:spcBef>
@@ -14115,6 +15221,9 @@
               <a:defRPr/>
             </a:lvl6pPr>
             <a:lvl7pPr lvl="6" algn="l">
+              <a:lnSpc>
+                <a:spcPct val="100000"/>
+              </a:lnSpc>
               <a:spcBef>
                 <a:spcPts val="0"/>
               </a:spcBef>
@@ -14126,6 +15235,9 @@
               <a:defRPr/>
             </a:lvl7pPr>
             <a:lvl8pPr lvl="7" algn="l">
+              <a:lnSpc>
+                <a:spcPct val="100000"/>
+              </a:lnSpc>
               <a:spcBef>
                 <a:spcPts val="0"/>
               </a:spcBef>
@@ -14137,6 +15249,9 @@
               <a:defRPr/>
             </a:lvl8pPr>
             <a:lvl9pPr lvl="8" algn="l">
+              <a:lnSpc>
+                <a:spcPct val="100000"/>
+              </a:lnSpc>
               <a:spcBef>
                 <a:spcPts val="0"/>
               </a:spcBef>
@@ -14178,6 +15293,9 @@
           </a:bodyPr>
           <a:lstStyle>
             <a:lvl1pPr indent="-342900" lvl="0" marL="457200" algn="l">
+              <a:lnSpc>
+                <a:spcPct val="100000"/>
+              </a:lnSpc>
               <a:spcBef>
                 <a:spcPts val="360"/>
               </a:spcBef>
@@ -14189,6 +15307,9 @@
               <a:defRPr/>
             </a:lvl1pPr>
             <a:lvl2pPr indent="-342900" lvl="1" marL="914400" algn="l">
+              <a:lnSpc>
+                <a:spcPct val="100000"/>
+              </a:lnSpc>
               <a:spcBef>
                 <a:spcPts val="360"/>
               </a:spcBef>
@@ -14203,6 +15324,9 @@
               <a:defRPr/>
             </a:lvl2pPr>
             <a:lvl3pPr indent="-342900" lvl="2" marL="1371600" algn="l">
+              <a:lnSpc>
+                <a:spcPct val="100000"/>
+              </a:lnSpc>
               <a:spcBef>
                 <a:spcPts val="360"/>
               </a:spcBef>
@@ -14217,6 +15341,9 @@
               <a:defRPr/>
             </a:lvl3pPr>
             <a:lvl4pPr indent="-342900" lvl="3" marL="1828800" algn="l">
+              <a:lnSpc>
+                <a:spcPct val="100000"/>
+              </a:lnSpc>
               <a:spcBef>
                 <a:spcPts val="360"/>
               </a:spcBef>
@@ -14231,6 +15358,9 @@
               <a:defRPr/>
             </a:lvl4pPr>
             <a:lvl5pPr indent="-342900" lvl="4" marL="2286000" algn="l">
+              <a:lnSpc>
+                <a:spcPct val="100000"/>
+              </a:lnSpc>
               <a:spcBef>
                 <a:spcPts val="360"/>
               </a:spcBef>
@@ -14670,7 +15800,7 @@
               <a:buSzPts val="1100"/>
               <a:buFont typeface="Arial"/>
               <a:buNone/>
-              <a:defRPr b="0" i="0" sz="1100" u="none">
+              <a:defRPr b="0" i="0" sz="1100" u="none" cap="none" strike="noStrike">
                 <a:solidFill>
                   <a:schemeClr val="lt1"/>
                 </a:solidFill>
@@ -14696,7 +15826,7 @@
               <a:buSzPts val="1100"/>
               <a:buFont typeface="Arial"/>
               <a:buNone/>
-              <a:defRPr b="0" i="0" sz="1100" u="none">
+              <a:defRPr b="0" i="0" sz="1100" u="none" cap="none" strike="noStrike">
                 <a:solidFill>
                   <a:schemeClr val="lt1"/>
                 </a:solidFill>
@@ -14722,7 +15852,7 @@
               <a:buSzPts val="1100"/>
               <a:buFont typeface="Arial"/>
               <a:buNone/>
-              <a:defRPr b="0" i="0" sz="1100" u="none">
+              <a:defRPr b="0" i="0" sz="1100" u="none" cap="none" strike="noStrike">
                 <a:solidFill>
                   <a:schemeClr val="lt1"/>
                 </a:solidFill>
@@ -14748,7 +15878,7 @@
               <a:buSzPts val="1100"/>
               <a:buFont typeface="Arial"/>
               <a:buNone/>
-              <a:defRPr b="0" i="0" sz="1100" u="none">
+              <a:defRPr b="0" i="0" sz="1100" u="none" cap="none" strike="noStrike">
                 <a:solidFill>
                   <a:schemeClr val="lt1"/>
                 </a:solidFill>
@@ -14774,7 +15904,7 @@
               <a:buSzPts val="1100"/>
               <a:buFont typeface="Arial"/>
               <a:buNone/>
-              <a:defRPr b="0" i="0" sz="1100" u="none">
+              <a:defRPr b="0" i="0" sz="1100" u="none" cap="none" strike="noStrike">
                 <a:solidFill>
                   <a:schemeClr val="lt1"/>
                 </a:solidFill>
@@ -14800,7 +15930,7 @@
               <a:buSzPts val="1100"/>
               <a:buFont typeface="Arial"/>
               <a:buNone/>
-              <a:defRPr b="0" i="0" sz="1100" u="none">
+              <a:defRPr b="0" i="0" sz="1100" u="none" cap="none" strike="noStrike">
                 <a:solidFill>
                   <a:schemeClr val="lt1"/>
                 </a:solidFill>
@@ -14826,7 +15956,7 @@
               <a:buSzPts val="1100"/>
               <a:buFont typeface="Arial"/>
               <a:buNone/>
-              <a:defRPr b="0" i="0" sz="1100" u="none">
+              <a:defRPr b="0" i="0" sz="1100" u="none" cap="none" strike="noStrike">
                 <a:solidFill>
                   <a:schemeClr val="lt1"/>
                 </a:solidFill>
@@ -14852,7 +15982,7 @@
               <a:buSzPts val="1100"/>
               <a:buFont typeface="Arial"/>
               <a:buNone/>
-              <a:defRPr b="0" i="0" sz="1100" u="none">
+              <a:defRPr b="0" i="0" sz="1100" u="none" cap="none" strike="noStrike">
                 <a:solidFill>
                   <a:schemeClr val="lt1"/>
                 </a:solidFill>
@@ -14878,7 +16008,7 @@
               <a:buSzPts val="1100"/>
               <a:buFont typeface="Arial"/>
               <a:buNone/>
-              <a:defRPr b="0" i="0" sz="1100" u="none">
+              <a:defRPr b="0" i="0" sz="1100" u="none" cap="none" strike="noStrike">
                 <a:solidFill>
                   <a:schemeClr val="lt1"/>
                 </a:solidFill>
@@ -14963,6 +16093,9 @@
           </a:bodyPr>
           <a:lstStyle>
             <a:lvl1pPr lvl="0" algn="l">
+              <a:lnSpc>
+                <a:spcPct val="100000"/>
+              </a:lnSpc>
               <a:spcBef>
                 <a:spcPts val="0"/>
               </a:spcBef>
@@ -14974,6 +16107,9 @@
               <a:defRPr sz="3200"/>
             </a:lvl1pPr>
             <a:lvl2pPr lvl="1" algn="l">
+              <a:lnSpc>
+                <a:spcPct val="100000"/>
+              </a:lnSpc>
               <a:spcBef>
                 <a:spcPts val="0"/>
               </a:spcBef>
@@ -14985,6 +16121,9 @@
               <a:defRPr/>
             </a:lvl2pPr>
             <a:lvl3pPr lvl="2" algn="l">
+              <a:lnSpc>
+                <a:spcPct val="100000"/>
+              </a:lnSpc>
               <a:spcBef>
                 <a:spcPts val="0"/>
               </a:spcBef>
@@ -14996,6 +16135,9 @@
               <a:defRPr/>
             </a:lvl3pPr>
             <a:lvl4pPr lvl="3" algn="l">
+              <a:lnSpc>
+                <a:spcPct val="100000"/>
+              </a:lnSpc>
               <a:spcBef>
                 <a:spcPts val="0"/>
               </a:spcBef>
@@ -15007,6 +16149,9 @@
               <a:defRPr/>
             </a:lvl4pPr>
             <a:lvl5pPr lvl="4" algn="l">
+              <a:lnSpc>
+                <a:spcPct val="100000"/>
+              </a:lnSpc>
               <a:spcBef>
                 <a:spcPts val="0"/>
               </a:spcBef>
@@ -15018,6 +16163,9 @@
               <a:defRPr/>
             </a:lvl5pPr>
             <a:lvl6pPr lvl="5" algn="l">
+              <a:lnSpc>
+                <a:spcPct val="100000"/>
+              </a:lnSpc>
               <a:spcBef>
                 <a:spcPts val="0"/>
               </a:spcBef>
@@ -15029,6 +16177,9 @@
               <a:defRPr/>
             </a:lvl6pPr>
             <a:lvl7pPr lvl="6" algn="l">
+              <a:lnSpc>
+                <a:spcPct val="100000"/>
+              </a:lnSpc>
               <a:spcBef>
                 <a:spcPts val="0"/>
               </a:spcBef>
@@ -15040,6 +16191,9 @@
               <a:defRPr/>
             </a:lvl7pPr>
             <a:lvl8pPr lvl="7" algn="l">
+              <a:lnSpc>
+                <a:spcPct val="100000"/>
+              </a:lnSpc>
               <a:spcBef>
                 <a:spcPts val="0"/>
               </a:spcBef>
@@ -15051,6 +16205,9 @@
               <a:defRPr/>
             </a:lvl8pPr>
             <a:lvl9pPr lvl="8" algn="l">
+              <a:lnSpc>
+                <a:spcPct val="100000"/>
+              </a:lnSpc>
               <a:spcBef>
                 <a:spcPts val="0"/>
               </a:spcBef>
@@ -15114,6 +16271,9 @@
           </a:bodyPr>
           <a:lstStyle>
             <a:lvl1pPr indent="-228600" lvl="0" marL="457200" algn="l">
+              <a:lnSpc>
+                <a:spcPct val="100000"/>
+              </a:lnSpc>
               <a:spcBef>
                 <a:spcPts val="320"/>
               </a:spcBef>
@@ -15126,6 +16286,9 @@
               <a:defRPr sz="1600"/>
             </a:lvl1pPr>
             <a:lvl2pPr indent="-228600" lvl="1" marL="914400" algn="l">
+              <a:lnSpc>
+                <a:spcPct val="100000"/>
+              </a:lnSpc>
               <a:spcBef>
                 <a:spcPts val="280"/>
               </a:spcBef>
@@ -15141,6 +16304,9 @@
               <a:defRPr sz="1400"/>
             </a:lvl2pPr>
             <a:lvl3pPr indent="-228600" lvl="2" marL="1371600" algn="l">
+              <a:lnSpc>
+                <a:spcPct val="100000"/>
+              </a:lnSpc>
               <a:spcBef>
                 <a:spcPts val="240"/>
               </a:spcBef>
@@ -15156,6 +16322,9 @@
               <a:defRPr sz="1200"/>
             </a:lvl3pPr>
             <a:lvl4pPr indent="-228600" lvl="3" marL="1828800" algn="l">
+              <a:lnSpc>
+                <a:spcPct val="100000"/>
+              </a:lnSpc>
               <a:spcBef>
                 <a:spcPts val="200"/>
               </a:spcBef>
@@ -15171,6 +16340,9 @@
               <a:defRPr sz="1000"/>
             </a:lvl4pPr>
             <a:lvl5pPr indent="-228600" lvl="4" marL="2286000" algn="l">
+              <a:lnSpc>
+                <a:spcPct val="100000"/>
+              </a:lnSpc>
               <a:spcBef>
                 <a:spcPts val="200"/>
               </a:spcBef>
@@ -15611,7 +16783,7 @@
               <a:buSzPts val="1100"/>
               <a:buFont typeface="Arial"/>
               <a:buNone/>
-              <a:defRPr b="0" i="0" sz="1100" u="none">
+              <a:defRPr b="0" i="0" sz="1100" u="none" cap="none" strike="noStrike">
                 <a:solidFill>
                   <a:schemeClr val="lt1"/>
                 </a:solidFill>
@@ -15637,7 +16809,7 @@
               <a:buSzPts val="1100"/>
               <a:buFont typeface="Arial"/>
               <a:buNone/>
-              <a:defRPr b="0" i="0" sz="1100" u="none">
+              <a:defRPr b="0" i="0" sz="1100" u="none" cap="none" strike="noStrike">
                 <a:solidFill>
                   <a:schemeClr val="lt1"/>
                 </a:solidFill>
@@ -15663,7 +16835,7 @@
               <a:buSzPts val="1100"/>
               <a:buFont typeface="Arial"/>
               <a:buNone/>
-              <a:defRPr b="0" i="0" sz="1100" u="none">
+              <a:defRPr b="0" i="0" sz="1100" u="none" cap="none" strike="noStrike">
                 <a:solidFill>
                   <a:schemeClr val="lt1"/>
                 </a:solidFill>
@@ -15689,7 +16861,7 @@
               <a:buSzPts val="1100"/>
               <a:buFont typeface="Arial"/>
               <a:buNone/>
-              <a:defRPr b="0" i="0" sz="1100" u="none">
+              <a:defRPr b="0" i="0" sz="1100" u="none" cap="none" strike="noStrike">
                 <a:solidFill>
                   <a:schemeClr val="lt1"/>
                 </a:solidFill>
@@ -15715,7 +16887,7 @@
               <a:buSzPts val="1100"/>
               <a:buFont typeface="Arial"/>
               <a:buNone/>
-              <a:defRPr b="0" i="0" sz="1100" u="none">
+              <a:defRPr b="0" i="0" sz="1100" u="none" cap="none" strike="noStrike">
                 <a:solidFill>
                   <a:schemeClr val="lt1"/>
                 </a:solidFill>
@@ -15741,7 +16913,7 @@
               <a:buSzPts val="1100"/>
               <a:buFont typeface="Arial"/>
               <a:buNone/>
-              <a:defRPr b="0" i="0" sz="1100" u="none">
+              <a:defRPr b="0" i="0" sz="1100" u="none" cap="none" strike="noStrike">
                 <a:solidFill>
                   <a:schemeClr val="lt1"/>
                 </a:solidFill>
@@ -15767,7 +16939,7 @@
               <a:buSzPts val="1100"/>
               <a:buFont typeface="Arial"/>
               <a:buNone/>
-              <a:defRPr b="0" i="0" sz="1100" u="none">
+              <a:defRPr b="0" i="0" sz="1100" u="none" cap="none" strike="noStrike">
                 <a:solidFill>
                   <a:schemeClr val="lt1"/>
                 </a:solidFill>
@@ -15793,7 +16965,7 @@
               <a:buSzPts val="1100"/>
               <a:buFont typeface="Arial"/>
               <a:buNone/>
-              <a:defRPr b="0" i="0" sz="1100" u="none">
+              <a:defRPr b="0" i="0" sz="1100" u="none" cap="none" strike="noStrike">
                 <a:solidFill>
                   <a:schemeClr val="lt1"/>
                 </a:solidFill>
@@ -15819,7 +16991,7 @@
               <a:buSzPts val="1100"/>
               <a:buFont typeface="Arial"/>
               <a:buNone/>
-              <a:defRPr b="0" i="0" sz="1100" u="none">
+              <a:defRPr b="0" i="0" sz="1100" u="none" cap="none" strike="noStrike">
                 <a:solidFill>
                   <a:schemeClr val="lt1"/>
                 </a:solidFill>
@@ -15904,6 +17076,9 @@
           </a:bodyPr>
           <a:lstStyle>
             <a:lvl1pPr lvl="0" algn="l">
+              <a:lnSpc>
+                <a:spcPct val="100000"/>
+              </a:lnSpc>
               <a:spcBef>
                 <a:spcPts val="0"/>
               </a:spcBef>
@@ -15915,6 +17090,9 @@
               <a:defRPr sz="3200"/>
             </a:lvl1pPr>
             <a:lvl2pPr lvl="1" algn="l">
+              <a:lnSpc>
+                <a:spcPct val="100000"/>
+              </a:lnSpc>
               <a:spcBef>
                 <a:spcPts val="0"/>
               </a:spcBef>
@@ -15926,6 +17104,9 @@
               <a:defRPr/>
             </a:lvl2pPr>
             <a:lvl3pPr lvl="2" algn="l">
+              <a:lnSpc>
+                <a:spcPct val="100000"/>
+              </a:lnSpc>
               <a:spcBef>
                 <a:spcPts val="0"/>
               </a:spcBef>
@@ -15937,6 +17118,9 @@
               <a:defRPr/>
             </a:lvl3pPr>
             <a:lvl4pPr lvl="3" algn="l">
+              <a:lnSpc>
+                <a:spcPct val="100000"/>
+              </a:lnSpc>
               <a:spcBef>
                 <a:spcPts val="0"/>
               </a:spcBef>
@@ -15948,6 +17132,9 @@
               <a:defRPr/>
             </a:lvl4pPr>
             <a:lvl5pPr lvl="4" algn="l">
+              <a:lnSpc>
+                <a:spcPct val="100000"/>
+              </a:lnSpc>
               <a:spcBef>
                 <a:spcPts val="0"/>
               </a:spcBef>
@@ -15959,6 +17146,9 @@
               <a:defRPr/>
             </a:lvl5pPr>
             <a:lvl6pPr lvl="5" algn="l">
+              <a:lnSpc>
+                <a:spcPct val="100000"/>
+              </a:lnSpc>
               <a:spcBef>
                 <a:spcPts val="0"/>
               </a:spcBef>
@@ -15970,6 +17160,9 @@
               <a:defRPr/>
             </a:lvl6pPr>
             <a:lvl7pPr lvl="6" algn="l">
+              <a:lnSpc>
+                <a:spcPct val="100000"/>
+              </a:lnSpc>
               <a:spcBef>
                 <a:spcPts val="0"/>
               </a:spcBef>
@@ -15981,6 +17174,9 @@
               <a:defRPr/>
             </a:lvl7pPr>
             <a:lvl8pPr lvl="7" algn="l">
+              <a:lnSpc>
+                <a:spcPct val="100000"/>
+              </a:lnSpc>
               <a:spcBef>
                 <a:spcPts val="0"/>
               </a:spcBef>
@@ -15992,6 +17188,9 @@
               <a:defRPr/>
             </a:lvl8pPr>
             <a:lvl9pPr lvl="8" algn="l">
+              <a:lnSpc>
+                <a:spcPct val="100000"/>
+              </a:lnSpc>
               <a:spcBef>
                 <a:spcPts val="0"/>
               </a:spcBef>
@@ -16033,6 +17232,9 @@
           </a:bodyPr>
           <a:lstStyle>
             <a:lvl1pPr indent="-431800" lvl="0" marL="457200" algn="l">
+              <a:lnSpc>
+                <a:spcPct val="100000"/>
+              </a:lnSpc>
               <a:spcBef>
                 <a:spcPts val="640"/>
               </a:spcBef>
@@ -16045,6 +17247,9 @@
               <a:defRPr sz="3200"/>
             </a:lvl1pPr>
             <a:lvl2pPr indent="-406400" lvl="1" marL="914400" algn="l">
+              <a:lnSpc>
+                <a:spcPct val="100000"/>
+              </a:lnSpc>
               <a:spcBef>
                 <a:spcPts val="560"/>
               </a:spcBef>
@@ -16060,6 +17265,9 @@
               <a:defRPr sz="2800"/>
             </a:lvl2pPr>
             <a:lvl3pPr indent="-381000" lvl="2" marL="1371600" algn="l">
+              <a:lnSpc>
+                <a:spcPct val="100000"/>
+              </a:lnSpc>
               <a:spcBef>
                 <a:spcPts val="480"/>
               </a:spcBef>
@@ -16075,6 +17283,9 @@
               <a:defRPr sz="2400"/>
             </a:lvl3pPr>
             <a:lvl4pPr indent="-355600" lvl="3" marL="1828800" algn="l">
+              <a:lnSpc>
+                <a:spcPct val="100000"/>
+              </a:lnSpc>
               <a:spcBef>
                 <a:spcPts val="400"/>
               </a:spcBef>
@@ -16090,6 +17301,9 @@
               <a:defRPr sz="2000"/>
             </a:lvl4pPr>
             <a:lvl5pPr indent="-355600" lvl="4" marL="2286000" algn="l">
+              <a:lnSpc>
+                <a:spcPct val="100000"/>
+              </a:lnSpc>
               <a:spcBef>
                 <a:spcPts val="400"/>
               </a:spcBef>
@@ -16203,6 +17417,9 @@
           </a:bodyPr>
           <a:lstStyle>
             <a:lvl1pPr indent="-228600" lvl="0" marL="457200" algn="l">
+              <a:lnSpc>
+                <a:spcPct val="100000"/>
+              </a:lnSpc>
               <a:spcBef>
                 <a:spcPts val="320"/>
               </a:spcBef>
@@ -16215,6 +17432,9 @@
               <a:defRPr sz="1600"/>
             </a:lvl1pPr>
             <a:lvl2pPr indent="-228600" lvl="1" marL="914400" algn="l">
+              <a:lnSpc>
+                <a:spcPct val="100000"/>
+              </a:lnSpc>
               <a:spcBef>
                 <a:spcPts val="280"/>
               </a:spcBef>
@@ -16230,6 +17450,9 @@
               <a:defRPr sz="1400"/>
             </a:lvl2pPr>
             <a:lvl3pPr indent="-228600" lvl="2" marL="1371600" algn="l">
+              <a:lnSpc>
+                <a:spcPct val="100000"/>
+              </a:lnSpc>
               <a:spcBef>
                 <a:spcPts val="240"/>
               </a:spcBef>
@@ -16245,6 +17468,9 @@
               <a:defRPr sz="1200"/>
             </a:lvl3pPr>
             <a:lvl4pPr indent="-228600" lvl="3" marL="1828800" algn="l">
+              <a:lnSpc>
+                <a:spcPct val="100000"/>
+              </a:lnSpc>
               <a:spcBef>
                 <a:spcPts val="200"/>
               </a:spcBef>
@@ -16260,6 +17486,9 @@
               <a:defRPr sz="1000"/>
             </a:lvl4pPr>
             <a:lvl5pPr indent="-228600" lvl="4" marL="2286000" algn="l">
+              <a:lnSpc>
+                <a:spcPct val="100000"/>
+              </a:lnSpc>
               <a:spcBef>
                 <a:spcPts val="200"/>
               </a:spcBef>
@@ -16700,7 +17929,7 @@
               <a:buSzPts val="1100"/>
               <a:buFont typeface="Arial"/>
               <a:buNone/>
-              <a:defRPr b="0" i="0" sz="1100" u="none">
+              <a:defRPr b="0" i="0" sz="1100" u="none" cap="none" strike="noStrike">
                 <a:solidFill>
                   <a:schemeClr val="lt1"/>
                 </a:solidFill>
@@ -16726,7 +17955,7 @@
               <a:buSzPts val="1100"/>
               <a:buFont typeface="Arial"/>
               <a:buNone/>
-              <a:defRPr b="0" i="0" sz="1100" u="none">
+              <a:defRPr b="0" i="0" sz="1100" u="none" cap="none" strike="noStrike">
                 <a:solidFill>
                   <a:schemeClr val="lt1"/>
                 </a:solidFill>
@@ -16752,7 +17981,7 @@
               <a:buSzPts val="1100"/>
               <a:buFont typeface="Arial"/>
               <a:buNone/>
-              <a:defRPr b="0" i="0" sz="1100" u="none">
+              <a:defRPr b="0" i="0" sz="1100" u="none" cap="none" strike="noStrike">
                 <a:solidFill>
                   <a:schemeClr val="lt1"/>
                 </a:solidFill>
@@ -16778,7 +18007,7 @@
               <a:buSzPts val="1100"/>
               <a:buFont typeface="Arial"/>
               <a:buNone/>
-              <a:defRPr b="0" i="0" sz="1100" u="none">
+              <a:defRPr b="0" i="0" sz="1100" u="none" cap="none" strike="noStrike">
                 <a:solidFill>
                   <a:schemeClr val="lt1"/>
                 </a:solidFill>
@@ -16804,7 +18033,7 @@
               <a:buSzPts val="1100"/>
               <a:buFont typeface="Arial"/>
               <a:buNone/>
-              <a:defRPr b="0" i="0" sz="1100" u="none">
+              <a:defRPr b="0" i="0" sz="1100" u="none" cap="none" strike="noStrike">
                 <a:solidFill>
                   <a:schemeClr val="lt1"/>
                 </a:solidFill>
@@ -16830,7 +18059,7 @@
               <a:buSzPts val="1100"/>
               <a:buFont typeface="Arial"/>
               <a:buNone/>
-              <a:defRPr b="0" i="0" sz="1100" u="none">
+              <a:defRPr b="0" i="0" sz="1100" u="none" cap="none" strike="noStrike">
                 <a:solidFill>
                   <a:schemeClr val="lt1"/>
                 </a:solidFill>
@@ -16856,7 +18085,7 @@
               <a:buSzPts val="1100"/>
               <a:buFont typeface="Arial"/>
               <a:buNone/>
-              <a:defRPr b="0" i="0" sz="1100" u="none">
+              <a:defRPr b="0" i="0" sz="1100" u="none" cap="none" strike="noStrike">
                 <a:solidFill>
                   <a:schemeClr val="lt1"/>
                 </a:solidFill>
@@ -16882,7 +18111,7 @@
               <a:buSzPts val="1100"/>
               <a:buFont typeface="Arial"/>
               <a:buNone/>
-              <a:defRPr b="0" i="0" sz="1100" u="none">
+              <a:defRPr b="0" i="0" sz="1100" u="none" cap="none" strike="noStrike">
                 <a:solidFill>
                   <a:schemeClr val="lt1"/>
                 </a:solidFill>
@@ -16908,7 +18137,7 @@
               <a:buSzPts val="1100"/>
               <a:buFont typeface="Arial"/>
               <a:buNone/>
-              <a:defRPr b="0" i="0" sz="1100" u="none">
+              <a:defRPr b="0" i="0" sz="1100" u="none" cap="none" strike="noStrike">
                 <a:solidFill>
                   <a:schemeClr val="lt1"/>
                 </a:solidFill>
@@ -17024,12 +18253,17 @@
                 <a:spcAft>
                   <a:spcPts val="0"/>
                 </a:spcAft>
+                <a:buClr>
+                  <a:srgbClr val="000000"/>
+                </a:buClr>
+                <a:buSzPts val="900"/>
+                <a:buFont typeface="Arial"/>
                 <a:buNone/>
               </a:pPr>
               <a:r>
                 <a:t/>
               </a:r>
-              <a:endParaRPr b="0" i="0" sz="900" u="none">
+              <a:endParaRPr b="0" i="0" sz="900" u="none" cap="none" strike="noStrike">
                 <a:solidFill>
                   <a:schemeClr val="lt1"/>
                 </a:solidFill>
@@ -17078,12 +18312,17 @@
                 <a:spcAft>
                   <a:spcPts val="0"/>
                 </a:spcAft>
+                <a:buClr>
+                  <a:srgbClr val="000000"/>
+                </a:buClr>
+                <a:buSzPts val="900"/>
+                <a:buFont typeface="Arial"/>
                 <a:buNone/>
               </a:pPr>
               <a:r>
                 <a:t/>
               </a:r>
-              <a:endParaRPr b="0" i="0" sz="900" u="none">
+              <a:endParaRPr b="0" i="0" sz="900" u="none" cap="none" strike="noStrike">
                 <a:solidFill>
                   <a:schemeClr val="lt1"/>
                 </a:solidFill>
@@ -17123,13 +18362,20 @@
           </a:bodyPr>
           <a:lstStyle>
             <a:lvl1pPr lvl="0" marR="0" rtl="0" algn="l">
-              <a:spcBef>
-                <a:spcPts val="0"/>
-              </a:spcBef>
-              <a:spcAft>
-                <a:spcPts val="0"/>
-              </a:spcAft>
-              <a:buSzPts val="1400"/>
+              <a:lnSpc>
+                <a:spcPct val="100000"/>
+              </a:lnSpc>
+              <a:spcBef>
+                <a:spcPts val="0"/>
+              </a:spcBef>
+              <a:spcAft>
+                <a:spcPts val="0"/>
+              </a:spcAft>
+              <a:buClr>
+                <a:srgbClr val="000000"/>
+              </a:buClr>
+              <a:buSzPts val="1400"/>
+              <a:buFont typeface="Arial"/>
               <a:buNone/>
               <a:defRPr b="1" i="0" sz="2400" u="none" cap="none" strike="noStrike">
                 <a:solidFill>
@@ -17142,13 +18388,20 @@
               </a:defRPr>
             </a:lvl1pPr>
             <a:lvl2pPr lvl="1" marR="0" rtl="0" algn="l">
-              <a:spcBef>
-                <a:spcPts val="0"/>
-              </a:spcBef>
-              <a:spcAft>
-                <a:spcPts val="0"/>
-              </a:spcAft>
-              <a:buSzPts val="1400"/>
+              <a:lnSpc>
+                <a:spcPct val="100000"/>
+              </a:lnSpc>
+              <a:spcBef>
+                <a:spcPts val="0"/>
+              </a:spcBef>
+              <a:spcAft>
+                <a:spcPts val="0"/>
+              </a:spcAft>
+              <a:buClr>
+                <a:srgbClr val="000000"/>
+              </a:buClr>
+              <a:buSzPts val="1400"/>
+              <a:buFont typeface="Arial"/>
               <a:buNone/>
               <a:defRPr b="1" i="0" sz="2400" u="none" cap="none" strike="noStrike">
                 <a:solidFill>
@@ -17161,13 +18414,20 @@
               </a:defRPr>
             </a:lvl2pPr>
             <a:lvl3pPr lvl="2" marR="0" rtl="0" algn="l">
-              <a:spcBef>
-                <a:spcPts val="0"/>
-              </a:spcBef>
-              <a:spcAft>
-                <a:spcPts val="0"/>
-              </a:spcAft>
-              <a:buSzPts val="1400"/>
+              <a:lnSpc>
+                <a:spcPct val="100000"/>
+              </a:lnSpc>
+              <a:spcBef>
+                <a:spcPts val="0"/>
+              </a:spcBef>
+              <a:spcAft>
+                <a:spcPts val="0"/>
+              </a:spcAft>
+              <a:buClr>
+                <a:srgbClr val="000000"/>
+              </a:buClr>
+              <a:buSzPts val="1400"/>
+              <a:buFont typeface="Arial"/>
               <a:buNone/>
               <a:defRPr b="1" i="0" sz="2400" u="none" cap="none" strike="noStrike">
                 <a:solidFill>
@@ -17180,13 +18440,20 @@
               </a:defRPr>
             </a:lvl3pPr>
             <a:lvl4pPr lvl="3" marR="0" rtl="0" algn="l">
-              <a:spcBef>
-                <a:spcPts val="0"/>
-              </a:spcBef>
-              <a:spcAft>
-                <a:spcPts val="0"/>
-              </a:spcAft>
-              <a:buSzPts val="1400"/>
+              <a:lnSpc>
+                <a:spcPct val="100000"/>
+              </a:lnSpc>
+              <a:spcBef>
+                <a:spcPts val="0"/>
+              </a:spcBef>
+              <a:spcAft>
+                <a:spcPts val="0"/>
+              </a:spcAft>
+              <a:buClr>
+                <a:srgbClr val="000000"/>
+              </a:buClr>
+              <a:buSzPts val="1400"/>
+              <a:buFont typeface="Arial"/>
               <a:buNone/>
               <a:defRPr b="1" i="0" sz="2400" u="none" cap="none" strike="noStrike">
                 <a:solidFill>
@@ -17199,13 +18466,20 @@
               </a:defRPr>
             </a:lvl4pPr>
             <a:lvl5pPr lvl="4" marR="0" rtl="0" algn="l">
-              <a:spcBef>
-                <a:spcPts val="0"/>
-              </a:spcBef>
-              <a:spcAft>
-                <a:spcPts val="0"/>
-              </a:spcAft>
-              <a:buSzPts val="1400"/>
+              <a:lnSpc>
+                <a:spcPct val="100000"/>
+              </a:lnSpc>
+              <a:spcBef>
+                <a:spcPts val="0"/>
+              </a:spcBef>
+              <a:spcAft>
+                <a:spcPts val="0"/>
+              </a:spcAft>
+              <a:buClr>
+                <a:srgbClr val="000000"/>
+              </a:buClr>
+              <a:buSzPts val="1400"/>
+              <a:buFont typeface="Arial"/>
               <a:buNone/>
               <a:defRPr b="1" i="0" sz="2400" u="none" cap="none" strike="noStrike">
                 <a:solidFill>
@@ -17218,13 +18492,20 @@
               </a:defRPr>
             </a:lvl5pPr>
             <a:lvl6pPr lvl="5" marR="0" rtl="0" algn="l">
-              <a:spcBef>
-                <a:spcPts val="0"/>
-              </a:spcBef>
-              <a:spcAft>
-                <a:spcPts val="0"/>
-              </a:spcAft>
-              <a:buSzPts val="1400"/>
+              <a:lnSpc>
+                <a:spcPct val="100000"/>
+              </a:lnSpc>
+              <a:spcBef>
+                <a:spcPts val="0"/>
+              </a:spcBef>
+              <a:spcAft>
+                <a:spcPts val="0"/>
+              </a:spcAft>
+              <a:buClr>
+                <a:srgbClr val="000000"/>
+              </a:buClr>
+              <a:buSzPts val="1400"/>
+              <a:buFont typeface="Arial"/>
               <a:buNone/>
               <a:defRPr b="1" i="0" sz="2400" u="none" cap="none" strike="noStrike">
                 <a:solidFill>
@@ -17237,13 +18518,20 @@
               </a:defRPr>
             </a:lvl6pPr>
             <a:lvl7pPr lvl="6" marR="0" rtl="0" algn="l">
-              <a:spcBef>
-                <a:spcPts val="0"/>
-              </a:spcBef>
-              <a:spcAft>
-                <a:spcPts val="0"/>
-              </a:spcAft>
-              <a:buSzPts val="1400"/>
+              <a:lnSpc>
+                <a:spcPct val="100000"/>
+              </a:lnSpc>
+              <a:spcBef>
+                <a:spcPts val="0"/>
+              </a:spcBef>
+              <a:spcAft>
+                <a:spcPts val="0"/>
+              </a:spcAft>
+              <a:buClr>
+                <a:srgbClr val="000000"/>
+              </a:buClr>
+              <a:buSzPts val="1400"/>
+              <a:buFont typeface="Arial"/>
               <a:buNone/>
               <a:defRPr b="1" i="0" sz="2400" u="none" cap="none" strike="noStrike">
                 <a:solidFill>
@@ -17256,13 +18544,20 @@
               </a:defRPr>
             </a:lvl7pPr>
             <a:lvl8pPr lvl="7" marR="0" rtl="0" algn="l">
-              <a:spcBef>
-                <a:spcPts val="0"/>
-              </a:spcBef>
-              <a:spcAft>
-                <a:spcPts val="0"/>
-              </a:spcAft>
-              <a:buSzPts val="1400"/>
+              <a:lnSpc>
+                <a:spcPct val="100000"/>
+              </a:lnSpc>
+              <a:spcBef>
+                <a:spcPts val="0"/>
+              </a:spcBef>
+              <a:spcAft>
+                <a:spcPts val="0"/>
+              </a:spcAft>
+              <a:buClr>
+                <a:srgbClr val="000000"/>
+              </a:buClr>
+              <a:buSzPts val="1400"/>
+              <a:buFont typeface="Arial"/>
               <a:buNone/>
               <a:defRPr b="1" i="0" sz="2400" u="none" cap="none" strike="noStrike">
                 <a:solidFill>
@@ -17275,13 +18570,20 @@
               </a:defRPr>
             </a:lvl8pPr>
             <a:lvl9pPr lvl="8" marR="0" rtl="0" algn="l">
-              <a:spcBef>
-                <a:spcPts val="0"/>
-              </a:spcBef>
-              <a:spcAft>
-                <a:spcPts val="0"/>
-              </a:spcAft>
-              <a:buSzPts val="1400"/>
+              <a:lnSpc>
+                <a:spcPct val="100000"/>
+              </a:lnSpc>
+              <a:spcBef>
+                <a:spcPts val="0"/>
+              </a:spcBef>
+              <a:spcAft>
+                <a:spcPts val="0"/>
+              </a:spcAft>
+              <a:buClr>
+                <a:srgbClr val="000000"/>
+              </a:buClr>
+              <a:buSzPts val="1400"/>
+              <a:buFont typeface="Arial"/>
               <a:buNone/>
               <a:defRPr b="1" i="0" sz="2400" u="none" cap="none" strike="noStrike">
                 <a:solidFill>
@@ -17324,6 +18626,9 @@
           </a:bodyPr>
           <a:lstStyle>
             <a:lvl1pPr indent="-381000" lvl="0" marL="457200" marR="0" rtl="0" algn="l">
+              <a:lnSpc>
+                <a:spcPct val="100000"/>
+              </a:lnSpc>
               <a:spcBef>
                 <a:spcPts val="480"/>
               </a:spcBef>
@@ -17347,6 +18652,9 @@
               </a:defRPr>
             </a:lvl1pPr>
             <a:lvl2pPr indent="-355600" lvl="1" marL="914400" marR="0" rtl="0" algn="l">
+              <a:lnSpc>
+                <a:spcPct val="100000"/>
+              </a:lnSpc>
               <a:spcBef>
                 <a:spcPts val="400"/>
               </a:spcBef>
@@ -17370,6 +18678,9 @@
               </a:defRPr>
             </a:lvl2pPr>
             <a:lvl3pPr indent="-330200" lvl="2" marL="1371600" marR="0" rtl="0" algn="l">
+              <a:lnSpc>
+                <a:spcPct val="100000"/>
+              </a:lnSpc>
               <a:spcBef>
                 <a:spcPts val="320"/>
               </a:spcBef>
@@ -17393,6 +18704,9 @@
               </a:defRPr>
             </a:lvl3pPr>
             <a:lvl4pPr indent="-317500" lvl="3" marL="1828800" marR="0" rtl="0" algn="l">
+              <a:lnSpc>
+                <a:spcPct val="100000"/>
+              </a:lnSpc>
               <a:spcBef>
                 <a:spcPts val="280"/>
               </a:spcBef>
@@ -17416,6 +18730,9 @@
               </a:defRPr>
             </a:lvl4pPr>
             <a:lvl5pPr indent="-304800" lvl="4" marL="2286000" marR="0" rtl="0" algn="l">
+              <a:lnSpc>
+                <a:spcPct val="100000"/>
+              </a:lnSpc>
               <a:spcBef>
                 <a:spcPts val="240"/>
               </a:spcBef>
@@ -17582,9 +18899,13 @@
               <a:spcAft>
                 <a:spcPts val="0"/>
               </a:spcAft>
-              <a:buSzPts val="1400"/>
-              <a:buNone/>
-              <a:defRPr b="0" i="0" sz="1100" u="none">
+              <a:buClr>
+                <a:srgbClr val="000000"/>
+              </a:buClr>
+              <a:buSzPts val="1400"/>
+              <a:buFont typeface="Arial"/>
+              <a:buNone/>
+              <a:defRPr b="0" i="0" sz="1100" u="none" cap="none" strike="noStrike">
                 <a:solidFill>
                   <a:schemeClr val="lt1"/>
                 </a:solidFill>
@@ -17604,7 +18925,11 @@
               <a:spcAft>
                 <a:spcPts val="0"/>
               </a:spcAft>
-              <a:buSzPts val="1400"/>
+              <a:buClr>
+                <a:srgbClr val="000000"/>
+              </a:buClr>
+              <a:buSzPts val="1400"/>
+              <a:buFont typeface="Arial"/>
               <a:buNone/>
               <a:defRPr b="0" i="0" sz="900" u="none" cap="none" strike="noStrike">
                 <a:solidFill>
@@ -17626,7 +18951,11 @@
               <a:spcAft>
                 <a:spcPts val="0"/>
               </a:spcAft>
-              <a:buSzPts val="1400"/>
+              <a:buClr>
+                <a:srgbClr val="000000"/>
+              </a:buClr>
+              <a:buSzPts val="1400"/>
+              <a:buFont typeface="Arial"/>
               <a:buNone/>
               <a:defRPr b="0" i="0" sz="900" u="none" cap="none" strike="noStrike">
                 <a:solidFill>
@@ -17648,7 +18977,11 @@
               <a:spcAft>
                 <a:spcPts val="0"/>
               </a:spcAft>
-              <a:buSzPts val="1400"/>
+              <a:buClr>
+                <a:srgbClr val="000000"/>
+              </a:buClr>
+              <a:buSzPts val="1400"/>
+              <a:buFont typeface="Arial"/>
               <a:buNone/>
               <a:defRPr b="0" i="0" sz="900" u="none" cap="none" strike="noStrike">
                 <a:solidFill>
@@ -17670,7 +19003,11 @@
               <a:spcAft>
                 <a:spcPts val="0"/>
               </a:spcAft>
-              <a:buSzPts val="1400"/>
+              <a:buClr>
+                <a:srgbClr val="000000"/>
+              </a:buClr>
+              <a:buSzPts val="1400"/>
+              <a:buFont typeface="Arial"/>
               <a:buNone/>
               <a:defRPr b="0" i="0" sz="900" u="none" cap="none" strike="noStrike">
                 <a:solidFill>
@@ -17692,7 +19029,11 @@
               <a:spcAft>
                 <a:spcPts val="0"/>
               </a:spcAft>
-              <a:buSzPts val="1400"/>
+              <a:buClr>
+                <a:srgbClr val="000000"/>
+              </a:buClr>
+              <a:buSzPts val="1400"/>
+              <a:buFont typeface="Arial"/>
               <a:buNone/>
               <a:defRPr b="0" i="0" sz="900" u="none" cap="none" strike="noStrike">
                 <a:solidFill>
@@ -17714,7 +19055,11 @@
               <a:spcAft>
                 <a:spcPts val="0"/>
               </a:spcAft>
-              <a:buSzPts val="1400"/>
+              <a:buClr>
+                <a:srgbClr val="000000"/>
+              </a:buClr>
+              <a:buSzPts val="1400"/>
+              <a:buFont typeface="Arial"/>
               <a:buNone/>
               <a:defRPr b="0" i="0" sz="900" u="none" cap="none" strike="noStrike">
                 <a:solidFill>
@@ -17736,7 +19081,11 @@
               <a:spcAft>
                 <a:spcPts val="0"/>
               </a:spcAft>
-              <a:buSzPts val="1400"/>
+              <a:buClr>
+                <a:srgbClr val="000000"/>
+              </a:buClr>
+              <a:buSzPts val="1400"/>
+              <a:buFont typeface="Arial"/>
               <a:buNone/>
               <a:defRPr b="0" i="0" sz="900" u="none" cap="none" strike="noStrike">
                 <a:solidFill>
@@ -17758,7 +19107,11 @@
               <a:spcAft>
                 <a:spcPts val="0"/>
               </a:spcAft>
-              <a:buSzPts val="1400"/>
+              <a:buClr>
+                <a:srgbClr val="000000"/>
+              </a:buClr>
+              <a:buSzPts val="1400"/>
+              <a:buFont typeface="Arial"/>
               <a:buNone/>
               <a:defRPr b="0" i="0" sz="900" u="none" cap="none" strike="noStrike">
                 <a:solidFill>
@@ -17810,9 +19163,13 @@
               <a:spcAft>
                 <a:spcPts val="0"/>
               </a:spcAft>
-              <a:buSzPts val="1400"/>
-              <a:buNone/>
-              <a:defRPr b="0" i="0" sz="1100" u="none">
+              <a:buClr>
+                <a:srgbClr val="000000"/>
+              </a:buClr>
+              <a:buSzPts val="1400"/>
+              <a:buFont typeface="Arial"/>
+              <a:buNone/>
+              <a:defRPr b="0" i="0" sz="1100" u="none" cap="none" strike="noStrike">
                 <a:solidFill>
                   <a:schemeClr val="lt1"/>
                 </a:solidFill>
@@ -17832,7 +19189,11 @@
               <a:spcAft>
                 <a:spcPts val="0"/>
               </a:spcAft>
-              <a:buSzPts val="1400"/>
+              <a:buClr>
+                <a:srgbClr val="000000"/>
+              </a:buClr>
+              <a:buSzPts val="1400"/>
+              <a:buFont typeface="Arial"/>
               <a:buNone/>
               <a:defRPr b="0" i="0" sz="900" u="none" cap="none" strike="noStrike">
                 <a:solidFill>
@@ -17854,7 +19215,11 @@
               <a:spcAft>
                 <a:spcPts val="0"/>
               </a:spcAft>
-              <a:buSzPts val="1400"/>
+              <a:buClr>
+                <a:srgbClr val="000000"/>
+              </a:buClr>
+              <a:buSzPts val="1400"/>
+              <a:buFont typeface="Arial"/>
               <a:buNone/>
               <a:defRPr b="0" i="0" sz="900" u="none" cap="none" strike="noStrike">
                 <a:solidFill>
@@ -17876,7 +19241,11 @@
               <a:spcAft>
                 <a:spcPts val="0"/>
               </a:spcAft>
-              <a:buSzPts val="1400"/>
+              <a:buClr>
+                <a:srgbClr val="000000"/>
+              </a:buClr>
+              <a:buSzPts val="1400"/>
+              <a:buFont typeface="Arial"/>
               <a:buNone/>
               <a:defRPr b="0" i="0" sz="900" u="none" cap="none" strike="noStrike">
                 <a:solidFill>
@@ -17898,7 +19267,11 @@
               <a:spcAft>
                 <a:spcPts val="0"/>
               </a:spcAft>
-              <a:buSzPts val="1400"/>
+              <a:buClr>
+                <a:srgbClr val="000000"/>
+              </a:buClr>
+              <a:buSzPts val="1400"/>
+              <a:buFont typeface="Arial"/>
               <a:buNone/>
               <a:defRPr b="0" i="0" sz="900" u="none" cap="none" strike="noStrike">
                 <a:solidFill>
@@ -17920,7 +19293,11 @@
               <a:spcAft>
                 <a:spcPts val="0"/>
               </a:spcAft>
-              <a:buSzPts val="1400"/>
+              <a:buClr>
+                <a:srgbClr val="000000"/>
+              </a:buClr>
+              <a:buSzPts val="1400"/>
+              <a:buFont typeface="Arial"/>
               <a:buNone/>
               <a:defRPr b="0" i="0" sz="900" u="none" cap="none" strike="noStrike">
                 <a:solidFill>
@@ -17942,7 +19319,11 @@
               <a:spcAft>
                 <a:spcPts val="0"/>
               </a:spcAft>
-              <a:buSzPts val="1400"/>
+              <a:buClr>
+                <a:srgbClr val="000000"/>
+              </a:buClr>
+              <a:buSzPts val="1400"/>
+              <a:buFont typeface="Arial"/>
               <a:buNone/>
               <a:defRPr b="0" i="0" sz="900" u="none" cap="none" strike="noStrike">
                 <a:solidFill>
@@ -17964,7 +19345,11 @@
               <a:spcAft>
                 <a:spcPts val="0"/>
               </a:spcAft>
-              <a:buSzPts val="1400"/>
+              <a:buClr>
+                <a:srgbClr val="000000"/>
+              </a:buClr>
+              <a:buSzPts val="1400"/>
+              <a:buFont typeface="Arial"/>
               <a:buNone/>
               <a:defRPr b="0" i="0" sz="900" u="none" cap="none" strike="noStrike">
                 <a:solidFill>
@@ -17986,7 +19371,11 @@
               <a:spcAft>
                 <a:spcPts val="0"/>
               </a:spcAft>
-              <a:buSzPts val="1400"/>
+              <a:buClr>
+                <a:srgbClr val="000000"/>
+              </a:buClr>
+              <a:buSzPts val="1400"/>
+              <a:buFont typeface="Arial"/>
               <a:buNone/>
               <a:defRPr b="0" i="0" sz="900" u="none" cap="none" strike="noStrike">
                 <a:solidFill>
@@ -18044,7 +19433,7 @@
               <a:buSzPts val="1100"/>
               <a:buFont typeface="Arial"/>
               <a:buNone/>
-              <a:defRPr b="0" i="0" sz="1100" u="none">
+              <a:defRPr b="0" i="0" sz="1100" u="none" cap="none" strike="noStrike">
                 <a:solidFill>
                   <a:schemeClr val="lt1"/>
                 </a:solidFill>
@@ -18070,7 +19459,7 @@
               <a:buSzPts val="1100"/>
               <a:buFont typeface="Arial"/>
               <a:buNone/>
-              <a:defRPr b="0" i="0" sz="1100" u="none">
+              <a:defRPr b="0" i="0" sz="1100" u="none" cap="none" strike="noStrike">
                 <a:solidFill>
                   <a:schemeClr val="lt1"/>
                 </a:solidFill>
@@ -18096,7 +19485,7 @@
               <a:buSzPts val="1100"/>
               <a:buFont typeface="Arial"/>
               <a:buNone/>
-              <a:defRPr b="0" i="0" sz="1100" u="none">
+              <a:defRPr b="0" i="0" sz="1100" u="none" cap="none" strike="noStrike">
                 <a:solidFill>
                   <a:schemeClr val="lt1"/>
                 </a:solidFill>
@@ -18122,7 +19511,7 @@
               <a:buSzPts val="1100"/>
               <a:buFont typeface="Arial"/>
               <a:buNone/>
-              <a:defRPr b="0" i="0" sz="1100" u="none">
+              <a:defRPr b="0" i="0" sz="1100" u="none" cap="none" strike="noStrike">
                 <a:solidFill>
                   <a:schemeClr val="lt1"/>
                 </a:solidFill>
@@ -18148,7 +19537,7 @@
               <a:buSzPts val="1100"/>
               <a:buFont typeface="Arial"/>
               <a:buNone/>
-              <a:defRPr b="0" i="0" sz="1100" u="none">
+              <a:defRPr b="0" i="0" sz="1100" u="none" cap="none" strike="noStrike">
                 <a:solidFill>
                   <a:schemeClr val="lt1"/>
                 </a:solidFill>
@@ -18174,7 +19563,7 @@
               <a:buSzPts val="1100"/>
               <a:buFont typeface="Arial"/>
               <a:buNone/>
-              <a:defRPr b="0" i="0" sz="1100" u="none">
+              <a:defRPr b="0" i="0" sz="1100" u="none" cap="none" strike="noStrike">
                 <a:solidFill>
                   <a:schemeClr val="lt1"/>
                 </a:solidFill>
@@ -18200,7 +19589,7 @@
               <a:buSzPts val="1100"/>
               <a:buFont typeface="Arial"/>
               <a:buNone/>
-              <a:defRPr b="0" i="0" sz="1100" u="none">
+              <a:defRPr b="0" i="0" sz="1100" u="none" cap="none" strike="noStrike">
                 <a:solidFill>
                   <a:schemeClr val="lt1"/>
                 </a:solidFill>
@@ -18226,7 +19615,7 @@
               <a:buSzPts val="1100"/>
               <a:buFont typeface="Arial"/>
               <a:buNone/>
-              <a:defRPr b="0" i="0" sz="1100" u="none">
+              <a:defRPr b="0" i="0" sz="1100" u="none" cap="none" strike="noStrike">
                 <a:solidFill>
                   <a:schemeClr val="lt1"/>
                 </a:solidFill>
@@ -18252,7 +19641,7 @@
               <a:buSzPts val="1100"/>
               <a:buFont typeface="Arial"/>
               <a:buNone/>
-              <a:defRPr b="0" i="0" sz="1100" u="none">
+              <a:defRPr b="0" i="0" sz="1100" u="none" cap="none" strike="noStrike">
                 <a:solidFill>
                   <a:schemeClr val="lt1"/>
                 </a:solidFill>
@@ -19053,6 +20442,9 @@
           <a:lstStyle/>
           <a:p>
             <a:pPr indent="0" lvl="0" marL="0" rtl="0" algn="ctr">
+              <a:lnSpc>
+                <a:spcPct val="100000"/>
+              </a:lnSpc>
               <a:spcBef>
                 <a:spcPts val="0"/>
               </a:spcBef>
@@ -19121,12 +20513,17 @@
                 <a:spcAft>
                   <a:spcPts val="0"/>
                 </a:spcAft>
+                <a:buClr>
+                  <a:srgbClr val="000000"/>
+                </a:buClr>
+                <a:buSzPts val="900"/>
+                <a:buFont typeface="Arial"/>
                 <a:buNone/>
               </a:pPr>
               <a:r>
                 <a:t/>
               </a:r>
-              <a:endParaRPr b="0" i="0" sz="900" u="none">
+              <a:endParaRPr b="0" i="0" sz="900" u="none" cap="none" strike="noStrike">
                 <a:solidFill>
                   <a:schemeClr val="lt1"/>
                 </a:solidFill>
@@ -19294,7 +20691,7 @@
               <a:buNone/>
             </a:pPr>
             <a:r>
-              <a:rPr b="0" i="0" lang="en-US" sz="1100" u="none">
+              <a:rPr b="0" i="0" lang="en-US" sz="1100" u="none" cap="none" strike="noStrike">
                 <a:solidFill>
                   <a:schemeClr val="lt1"/>
                 </a:solidFill>
@@ -19305,7 +20702,15 @@
               </a:rPr>
               <a:t>*</a:t>
             </a:r>
-            <a:endParaRPr/>
+            <a:endParaRPr b="0" i="0" sz="1400" u="none" cap="none" strike="noStrike">
+              <a:solidFill>
+                <a:srgbClr val="000000"/>
+              </a:solidFill>
+              <a:latin typeface="Arial"/>
+              <a:ea typeface="Arial"/>
+              <a:cs typeface="Arial"/>
+              <a:sym typeface="Arial"/>
+            </a:endParaRPr>
           </a:p>
         </p:txBody>
       </p:sp>
@@ -19352,7 +20757,7 @@
               <a:buNone/>
             </a:pPr>
             <a:r>
-              <a:rPr b="0" i="0" lang="en-US" sz="1100" u="none">
+              <a:rPr b="0" i="0" lang="en-US" sz="1100" u="none" cap="none" strike="noStrike">
                 <a:solidFill>
                   <a:schemeClr val="lt1"/>
                 </a:solidFill>
@@ -19363,7 +20768,15 @@
               </a:rPr>
               <a:t>Titolo Presentazione</a:t>
             </a:r>
-            <a:endParaRPr/>
+            <a:endParaRPr b="0" i="0" sz="1400" u="none" cap="none" strike="noStrike">
+              <a:solidFill>
+                <a:srgbClr val="000000"/>
+              </a:solidFill>
+              <a:latin typeface="Arial"/>
+              <a:ea typeface="Arial"/>
+              <a:cs typeface="Arial"/>
+              <a:sym typeface="Arial"/>
+            </a:endParaRPr>
           </a:p>
         </p:txBody>
       </p:sp>
@@ -19410,7 +20823,7 @@
               <a:buNone/>
             </a:pPr>
             <a:r>
-              <a:rPr b="0" i="0" lang="en-US" sz="1100" u="none">
+              <a:rPr b="0" i="0" lang="en-US" sz="1100" u="none" cap="none" strike="noStrike">
                 <a:solidFill>
                   <a:schemeClr val="lt1"/>
                 </a:solidFill>
@@ -19422,7 +20835,7 @@
               <a:t>Pagina </a:t>
             </a:r>
             <a:fld id="{00000000-1234-1234-1234-123412341234}" type="slidenum">
-              <a:rPr b="0" i="0" lang="en-US" sz="1100" u="none">
+              <a:rPr b="0" i="0" lang="en-US" sz="1100" u="none" cap="none" strike="noStrike">
                 <a:solidFill>
                   <a:schemeClr val="lt1"/>
                 </a:solidFill>
@@ -19433,7 +20846,15 @@
               </a:rPr>
               <a:t>‹#›</a:t>
             </a:fld>
-            <a:endParaRPr/>
+            <a:endParaRPr b="0" i="0" sz="1400" u="none" cap="none" strike="noStrike">
+              <a:solidFill>
+                <a:srgbClr val="000000"/>
+              </a:solidFill>
+              <a:latin typeface="Arial"/>
+              <a:ea typeface="Arial"/>
+              <a:cs typeface="Arial"/>
+              <a:sym typeface="Arial"/>
+            </a:endParaRPr>
           </a:p>
         </p:txBody>
       </p:sp>
@@ -19828,7 +21249,7 @@
               <a:buNone/>
             </a:pPr>
             <a:r>
-              <a:rPr b="0" i="0" lang="en-US" sz="1800" u="none">
+              <a:rPr b="0" i="0" lang="en-US" sz="1800" u="none" cap="none" strike="noStrike">
                 <a:solidFill>
                   <a:srgbClr val="000000"/>
                 </a:solidFill>
@@ -19839,7 +21260,15 @@
               </a:rPr>
               <a:t>Persisted classified event, exposed by the gateway API as the authoritative view of the system’s intelligence layer.</a:t>
             </a:r>
-            <a:endParaRPr/>
+            <a:endParaRPr b="0" i="0" sz="1400" u="none" cap="none" strike="noStrike">
+              <a:solidFill>
+                <a:srgbClr val="000000"/>
+              </a:solidFill>
+              <a:latin typeface="Arial"/>
+              <a:ea typeface="Arial"/>
+              <a:cs typeface="Arial"/>
+              <a:sym typeface="Arial"/>
+            </a:endParaRPr>
           </a:p>
         </p:txBody>
       </p:sp>
@@ -20030,7 +21459,7 @@
             </a:endParaRPr>
           </a:p>
           <a:p>
-            <a:pPr indent="-114300" lvl="0" marL="0" marR="0" rtl="0" algn="l">
+            <a:pPr indent="0" lvl="0" marL="0" marR="0" rtl="0" algn="l">
               <a:lnSpc>
                 <a:spcPct val="100000"/>
               </a:lnSpc>
@@ -20122,7 +21551,7 @@
             <a:endParaRPr/>
           </a:p>
           <a:p>
-            <a:pPr indent="-114300" lvl="0" marL="0" marR="0" rtl="0" algn="l">
+            <a:pPr indent="0" lvl="0" marL="0" marR="0" rtl="0" algn="l">
               <a:lnSpc>
                 <a:spcPct val="100000"/>
               </a:lnSpc>
@@ -20214,7 +21643,7 @@
             <a:endParaRPr/>
           </a:p>
           <a:p>
-            <a:pPr indent="-114300" lvl="0" marL="0" marR="0" rtl="0" algn="l">
+            <a:pPr indent="0" lvl="0" marL="0" marR="0" rtl="0" algn="l">
               <a:lnSpc>
                 <a:spcPct val="100000"/>
               </a:lnSpc>
@@ -20318,7 +21747,7 @@
             <a:endParaRPr/>
           </a:p>
           <a:p>
-            <a:pPr indent="-114300" lvl="0" marL="0" marR="0" rtl="0" algn="l">
+            <a:pPr indent="0" lvl="0" marL="0" marR="0" rtl="0" algn="l">
               <a:lnSpc>
                 <a:spcPct val="100000"/>
               </a:lnSpc>
@@ -20481,7 +21910,7 @@
             </a:endParaRPr>
           </a:p>
           <a:p>
-            <a:pPr indent="-114300" lvl="0" marL="0" marR="0" rtl="0" algn="l">
+            <a:pPr indent="0" lvl="0" marL="0" marR="0" rtl="0" algn="l">
               <a:lnSpc>
                 <a:spcPct val="100000"/>
               </a:lnSpc>
@@ -20549,7 +21978,7 @@
             <a:endParaRPr/>
           </a:p>
           <a:p>
-            <a:pPr indent="-114300" lvl="0" marL="0" marR="0" rtl="0" algn="l">
+            <a:pPr indent="0" lvl="0" marL="0" marR="0" rtl="0" algn="l">
               <a:lnSpc>
                 <a:spcPct val="100000"/>
               </a:lnSpc>
@@ -20593,7 +22022,7 @@
             <a:endParaRPr/>
           </a:p>
           <a:p>
-            <a:pPr indent="-114300" lvl="0" marL="0" marR="0" rtl="0" algn="l">
+            <a:pPr indent="0" lvl="0" marL="0" marR="0" rtl="0" algn="l">
               <a:lnSpc>
                 <a:spcPct val="100000"/>
               </a:lnSpc>
@@ -20670,6 +22099,9 @@
           </a:p>
           <a:p>
             <a:pPr indent="-228600" lvl="0" marL="342900" marR="0" rtl="0" algn="l">
+              <a:lnSpc>
+                <a:spcPct val="100000"/>
+              </a:lnSpc>
               <a:spcBef>
                 <a:spcPts val="360"/>
               </a:spcBef>
@@ -20741,7 +22173,7 @@
               <a:buNone/>
             </a:pPr>
             <a:r>
-              <a:rPr b="0" i="0" lang="en-US" sz="1100" u="none">
+              <a:rPr b="0" i="0" lang="en-US" sz="1100" u="none" cap="none" strike="noStrike">
                 <a:solidFill>
                   <a:schemeClr val="lt1"/>
                 </a:solidFill>
@@ -20752,7 +22184,15 @@
               </a:rPr>
               <a:t>*</a:t>
             </a:r>
-            <a:endParaRPr/>
+            <a:endParaRPr b="0" i="0" sz="1400" u="none" cap="none" strike="noStrike">
+              <a:solidFill>
+                <a:srgbClr val="000000"/>
+              </a:solidFill>
+              <a:latin typeface="Arial"/>
+              <a:ea typeface="Arial"/>
+              <a:cs typeface="Arial"/>
+              <a:sym typeface="Arial"/>
+            </a:endParaRPr>
           </a:p>
         </p:txBody>
       </p:sp>
@@ -20799,7 +22239,7 @@
               <a:buNone/>
             </a:pPr>
             <a:r>
-              <a:rPr b="0" i="0" lang="en-US" sz="1100" u="none">
+              <a:rPr b="0" i="0" lang="en-US" sz="1100" u="none" cap="none" strike="noStrike">
                 <a:solidFill>
                   <a:schemeClr val="lt1"/>
                 </a:solidFill>
@@ -20811,7 +22251,7 @@
               <a:t>Pagina </a:t>
             </a:r>
             <a:fld id="{00000000-1234-1234-1234-123412341234}" type="slidenum">
-              <a:rPr b="0" i="0" lang="en-US" sz="1100" u="none">
+              <a:rPr b="0" i="0" lang="en-US" sz="1100" u="none" cap="none" strike="noStrike">
                 <a:solidFill>
                   <a:schemeClr val="lt1"/>
                 </a:solidFill>
@@ -20822,7 +22262,15 @@
               </a:rPr>
               <a:t>‹#›</a:t>
             </a:fld>
-            <a:endParaRPr/>
+            <a:endParaRPr b="0" i="0" sz="1400" u="none" cap="none" strike="noStrike">
+              <a:solidFill>
+                <a:srgbClr val="000000"/>
+              </a:solidFill>
+              <a:latin typeface="Arial"/>
+              <a:ea typeface="Arial"/>
+              <a:cs typeface="Arial"/>
+              <a:sym typeface="Arial"/>
+            </a:endParaRPr>
           </a:p>
         </p:txBody>
       </p:sp>
@@ -20983,7 +22431,7 @@
               <a:buNone/>
             </a:pPr>
             <a:r>
-              <a:rPr b="0" i="0" lang="en-US" sz="1100" u="none">
+              <a:rPr b="0" i="0" lang="en-US" sz="1100" u="none" cap="none" strike="noStrike">
                 <a:solidFill>
                   <a:schemeClr val="lt1"/>
                 </a:solidFill>
@@ -20994,7 +22442,15 @@
               </a:rPr>
               <a:t>*</a:t>
             </a:r>
-            <a:endParaRPr/>
+            <a:endParaRPr b="0" i="0" sz="1400" u="none" cap="none" strike="noStrike">
+              <a:solidFill>
+                <a:srgbClr val="000000"/>
+              </a:solidFill>
+              <a:latin typeface="Arial"/>
+              <a:ea typeface="Arial"/>
+              <a:cs typeface="Arial"/>
+              <a:sym typeface="Arial"/>
+            </a:endParaRPr>
           </a:p>
         </p:txBody>
       </p:sp>
@@ -21041,7 +22497,7 @@
               <a:buNone/>
             </a:pPr>
             <a:r>
-              <a:rPr b="0" i="0" lang="en-US" sz="1100" u="none">
+              <a:rPr b="0" i="0" lang="en-US" sz="1100" u="none" cap="none" strike="noStrike">
                 <a:solidFill>
                   <a:schemeClr val="lt1"/>
                 </a:solidFill>
@@ -21053,7 +22509,7 @@
               <a:t>Pagina </a:t>
             </a:r>
             <a:fld id="{00000000-1234-1234-1234-123412341234}" type="slidenum">
-              <a:rPr b="0" i="0" lang="en-US" sz="1100" u="none">
+              <a:rPr b="0" i="0" lang="en-US" sz="1100" u="none" cap="none" strike="noStrike">
                 <a:solidFill>
                   <a:schemeClr val="lt1"/>
                 </a:solidFill>
@@ -21064,7 +22520,15 @@
               </a:rPr>
               <a:t>‹#›</a:t>
             </a:fld>
-            <a:endParaRPr/>
+            <a:endParaRPr b="0" i="0" sz="1400" u="none" cap="none" strike="noStrike">
+              <a:solidFill>
+                <a:srgbClr val="000000"/>
+              </a:solidFill>
+              <a:latin typeface="Arial"/>
+              <a:ea typeface="Arial"/>
+              <a:cs typeface="Arial"/>
+              <a:sym typeface="Arial"/>
+            </a:endParaRPr>
           </a:p>
         </p:txBody>
       </p:sp>
@@ -21427,6 +22891,9 @@
           </a:p>
           <a:p>
             <a:pPr indent="-228600" lvl="0" marL="342900" marR="0" rtl="0" algn="l">
+              <a:lnSpc>
+                <a:spcPct val="100000"/>
+              </a:lnSpc>
               <a:spcBef>
                 <a:spcPts val="360"/>
               </a:spcBef>
@@ -21498,7 +22965,7 @@
               <a:buNone/>
             </a:pPr>
             <a:r>
-              <a:rPr b="0" i="0" lang="en-US" sz="1100" u="none">
+              <a:rPr b="0" i="0" lang="en-US" sz="1100" u="none" cap="none" strike="noStrike">
                 <a:solidFill>
                   <a:schemeClr val="lt1"/>
                 </a:solidFill>
@@ -21509,7 +22976,15 @@
               </a:rPr>
               <a:t>*</a:t>
             </a:r>
-            <a:endParaRPr/>
+            <a:endParaRPr b="0" i="0" sz="1400" u="none" cap="none" strike="noStrike">
+              <a:solidFill>
+                <a:srgbClr val="000000"/>
+              </a:solidFill>
+              <a:latin typeface="Arial"/>
+              <a:ea typeface="Arial"/>
+              <a:cs typeface="Arial"/>
+              <a:sym typeface="Arial"/>
+            </a:endParaRPr>
           </a:p>
         </p:txBody>
       </p:sp>
@@ -21556,7 +23031,7 @@
               <a:buNone/>
             </a:pPr>
             <a:r>
-              <a:rPr b="0" i="0" lang="en-US" sz="1100" u="none">
+              <a:rPr b="0" i="0" lang="en-US" sz="1100" u="none" cap="none" strike="noStrike">
                 <a:solidFill>
                   <a:schemeClr val="lt1"/>
                 </a:solidFill>
@@ -21568,7 +23043,7 @@
               <a:t>Pagina </a:t>
             </a:r>
             <a:fld id="{00000000-1234-1234-1234-123412341234}" type="slidenum">
-              <a:rPr b="0" i="0" lang="en-US" sz="1100" u="none">
+              <a:rPr b="0" i="0" lang="en-US" sz="1100" u="none" cap="none" strike="noStrike">
                 <a:solidFill>
                   <a:schemeClr val="lt1"/>
                 </a:solidFill>
@@ -21579,7 +23054,15 @@
               </a:rPr>
               <a:t>‹#›</a:t>
             </a:fld>
-            <a:endParaRPr/>
+            <a:endParaRPr b="0" i="0" sz="1400" u="none" cap="none" strike="noStrike">
+              <a:solidFill>
+                <a:srgbClr val="000000"/>
+              </a:solidFill>
+              <a:latin typeface="Arial"/>
+              <a:ea typeface="Arial"/>
+              <a:cs typeface="Arial"/>
+              <a:sym typeface="Arial"/>
+            </a:endParaRPr>
           </a:p>
         </p:txBody>
       </p:sp>
@@ -21782,7 +23265,7 @@
             </a:endParaRPr>
           </a:p>
           <a:p>
-            <a:pPr indent="-342900" lvl="0" marL="342900" marR="0" rtl="0" algn="l">
+            <a:pPr indent="-400050" lvl="0" marL="342900" marR="0" rtl="0" algn="l">
               <a:lnSpc>
                 <a:spcPct val="100000"/>
               </a:lnSpc>
@@ -21795,26 +23278,22 @@
               <a:buClr>
                 <a:srgbClr val="822433"/>
               </a:buClr>
-              <a:buSzPts val="1800"/>
+              <a:buSzPts val="2700"/>
               <a:buFont typeface="Arial"/>
               <a:buChar char="•"/>
             </a:pPr>
             <a:r>
-              <a:rPr b="0" i="0" lang="en-US" sz="1800" u="none">
-                <a:solidFill>
-                  <a:srgbClr val="000000"/>
-                </a:solidFill>
-                <a:latin typeface="Arial"/>
-                <a:ea typeface="Arial"/>
-                <a:cs typeface="Arial"/>
-                <a:sym typeface="Arial"/>
-              </a:rPr>
-              <a:t>Stateless broker (no dependency on replica state) </a:t>
-            </a:r>
-            <a:endParaRPr/>
+              <a:rPr b="1" lang="en-US" sz="2000"/>
+              <a:t>Active-Active Architecture:</a:t>
+            </a:r>
+            <a:r>
+              <a:rPr lang="en-US" sz="2000"/>
+              <a:t> Parallel signal processing across independent replicas.</a:t>
+            </a:r>
+            <a:endParaRPr sz="3300"/>
           </a:p>
           <a:p>
-            <a:pPr indent="-342900" lvl="0" marL="342900" marR="0" rtl="0" algn="l">
+            <a:pPr indent="-400050" lvl="0" marL="342900" marR="0" rtl="0" algn="l">
               <a:lnSpc>
                 <a:spcPct val="100000"/>
               </a:lnSpc>
@@ -21827,26 +23306,22 @@
               <a:buClr>
                 <a:srgbClr val="822433"/>
               </a:buClr>
-              <a:buSzPts val="1800"/>
+              <a:buSzPts val="2700"/>
               <a:buFont typeface="Arial"/>
               <a:buChar char="•"/>
             </a:pPr>
             <a:r>
-              <a:rPr b="0" i="0" lang="en-US" sz="1800" u="none">
-                <a:solidFill>
-                  <a:srgbClr val="000000"/>
-                </a:solidFill>
-                <a:latin typeface="Arial"/>
-                <a:ea typeface="Arial"/>
-                <a:cs typeface="Arial"/>
-                <a:sym typeface="Arial"/>
-              </a:rPr>
-              <a:t>Independent processing replicas </a:t>
-            </a:r>
-            <a:endParaRPr/>
+              <a:rPr b="1" lang="en-US" sz="2000"/>
+              <a:t>Fan-Out Broadcast:</a:t>
+            </a:r>
+            <a:r>
+              <a:rPr lang="en-US" sz="2000"/>
+              <a:t> Stateless broker sends identical data streams to all nodes simultaneously.</a:t>
+            </a:r>
+            <a:endParaRPr sz="3300"/>
           </a:p>
           <a:p>
-            <a:pPr indent="-342900" lvl="0" marL="342900" marR="0" rtl="0" algn="l">
+            <a:pPr indent="-400050" lvl="0" marL="342900" marR="0" rtl="0" algn="l">
               <a:lnSpc>
                 <a:spcPct val="100000"/>
               </a:lnSpc>
@@ -21859,26 +23334,22 @@
               <a:buClr>
                 <a:srgbClr val="822433"/>
               </a:buClr>
-              <a:buSzPts val="1800"/>
+              <a:buSzPts val="2700"/>
               <a:buFont typeface="Arial"/>
               <a:buChar char="•"/>
             </a:pPr>
             <a:r>
-              <a:rPr b="0" i="0" lang="en-US" sz="1800" u="none">
-                <a:solidFill>
-                  <a:srgbClr val="000000"/>
-                </a:solidFill>
-                <a:latin typeface="Arial"/>
-                <a:ea typeface="Arial"/>
-                <a:cs typeface="Arial"/>
-                <a:sym typeface="Arial"/>
-              </a:rPr>
-              <a:t>Gateway health checks </a:t>
-            </a:r>
-            <a:endParaRPr/>
+              <a:rPr b="1" lang="en-US" sz="2000"/>
+              <a:t>Zero Ingestion Downtime:</a:t>
+            </a:r>
+            <a:r>
+              <a:rPr lang="en-US" sz="2000"/>
+              <a:t> Failure is isolated; data ingestion continues seamlessly on surviving nodes.</a:t>
+            </a:r>
+            <a:endParaRPr sz="3300"/>
           </a:p>
           <a:p>
-            <a:pPr indent="-342900" lvl="0" marL="342900" marR="0" rtl="0" algn="l">
+            <a:pPr indent="0" lvl="0" marL="457200" marR="0" rtl="0" algn="l">
               <a:lnSpc>
                 <a:spcPct val="100000"/>
               </a:lnSpc>
@@ -21888,56 +23359,10 @@
               <a:spcAft>
                 <a:spcPts val="0"/>
               </a:spcAft>
-              <a:buClr>
-                <a:srgbClr val="822433"/>
-              </a:buClr>
-              <a:buSzPts val="1800"/>
-              <a:buFont typeface="Arial"/>
-              <a:buChar char="•"/>
+              <a:buNone/>
             </a:pPr>
             <a:r>
-              <a:rPr b="0" i="0" lang="en-US" sz="1800" u="none">
-                <a:solidFill>
-                  <a:srgbClr val="000000"/>
-                </a:solidFill>
-                <a:latin typeface="Arial"/>
-                <a:ea typeface="Arial"/>
-                <a:cs typeface="Arial"/>
-                <a:sym typeface="Arial"/>
-              </a:rPr>
-              <a:t>Round-robin with failover </a:t>
-            </a:r>
-            <a:endParaRPr/>
-          </a:p>
-          <a:p>
-            <a:pPr indent="-342900" lvl="0" marL="342900" marR="0" rtl="0" algn="l">
-              <a:lnSpc>
-                <a:spcPct val="100000"/>
-              </a:lnSpc>
-              <a:spcBef>
-                <a:spcPts val="360"/>
-              </a:spcBef>
-              <a:spcAft>
-                <a:spcPts val="0"/>
-              </a:spcAft>
-              <a:buClr>
-                <a:srgbClr val="822433"/>
-              </a:buClr>
-              <a:buSzPts val="1800"/>
-              <a:buFont typeface="Arial"/>
-              <a:buChar char="•"/>
-            </a:pPr>
-            <a:r>
-              <a:rPr b="0" i="0" lang="en-US" sz="1800" u="none">
-                <a:solidFill>
-                  <a:srgbClr val="000000"/>
-                </a:solidFill>
-                <a:latin typeface="Arial"/>
-                <a:ea typeface="Arial"/>
-                <a:cs typeface="Arial"/>
-                <a:sym typeface="Arial"/>
-              </a:rPr>
-              <a:t>Shared durable storage </a:t>
+              <a:t/>
             </a:r>
             <a:endParaRPr/>
           </a:p>
@@ -21973,7 +23398,7 @@
             </a:endParaRPr>
           </a:p>
           <a:p>
-            <a:pPr indent="-342900" lvl="0" marL="342900" marR="0" rtl="0" algn="l">
+            <a:pPr indent="0" lvl="0" marL="0" marR="0" rtl="0" algn="l">
               <a:lnSpc>
                 <a:spcPct val="100000"/>
               </a:lnSpc>
@@ -21991,128 +23416,15 @@
               <a:buNone/>
             </a:pPr>
             <a:r>
-              <a:rPr b="0" i="0" lang="en-US" sz="1800" u="none">
-                <a:solidFill>
-                  <a:srgbClr val="000000"/>
-                </a:solidFill>
-                <a:latin typeface="Arial"/>
-                <a:ea typeface="Arial"/>
-                <a:cs typeface="Arial"/>
-                <a:sym typeface="Arial"/>
-              </a:rPr>
-              <a:t>Failure is isolated within the processing tier and data ingestion continues.</a:t>
-            </a:r>
-            <a:endParaRPr/>
-          </a:p>
-          <a:p>
-            <a:pPr indent="-342900" lvl="0" marL="342900" marR="0" rtl="0" algn="l">
-              <a:lnSpc>
-                <a:spcPct val="100000"/>
-              </a:lnSpc>
-              <a:spcBef>
-                <a:spcPts val="480"/>
-              </a:spcBef>
-              <a:spcAft>
-                <a:spcPts val="0"/>
-              </a:spcAft>
-              <a:buClr>
-                <a:srgbClr val="822433"/>
-              </a:buClr>
-              <a:buSzPts val="1800"/>
-              <a:buFont typeface="Arial"/>
-              <a:buNone/>
-            </a:pPr>
-            <a:r>
-              <a:rPr b="0" i="0" lang="en-US" sz="1800" u="none">
-                <a:solidFill>
-                  <a:srgbClr val="000000"/>
-                </a:solidFill>
-                <a:latin typeface="Arial"/>
-                <a:ea typeface="Arial"/>
-                <a:cs typeface="Arial"/>
-                <a:sym typeface="Arial"/>
-              </a:rPr>
-              <a:t>Previously persisted intelligence remains available</a:t>
-            </a:r>
-            <a:r>
-              <a:rPr b="0" i="0" lang="en-US" sz="2400" u="none">
-                <a:solidFill>
-                  <a:srgbClr val="000000"/>
-                </a:solidFill>
-                <a:latin typeface="Arial"/>
-                <a:ea typeface="Arial"/>
-                <a:cs typeface="Arial"/>
-                <a:sym typeface="Arial"/>
-              </a:rPr>
-              <a:t>.</a:t>
-            </a:r>
-            <a:endParaRPr/>
-          </a:p>
-          <a:p>
-            <a:pPr indent="-342900" lvl="0" marL="342900" marR="0" rtl="0" algn="l">
-              <a:lnSpc>
-                <a:spcPct val="100000"/>
-              </a:lnSpc>
-              <a:spcBef>
-                <a:spcPts val="480"/>
-              </a:spcBef>
-              <a:spcAft>
-                <a:spcPts val="0"/>
-              </a:spcAft>
-              <a:buClr>
-                <a:srgbClr val="822433"/>
-              </a:buClr>
-              <a:buSzPts val="2400"/>
-              <a:buFont typeface="Arial"/>
-              <a:buNone/>
-            </a:pPr>
-            <a:r>
               <a:t/>
-            </a:r>
-            <a:endParaRPr b="0" i="0" sz="2400" u="none">
-              <a:solidFill>
-                <a:srgbClr val="000000"/>
-              </a:solidFill>
-              <a:latin typeface="Arial"/>
-              <a:ea typeface="Arial"/>
-              <a:cs typeface="Arial"/>
-              <a:sym typeface="Arial"/>
-            </a:endParaRPr>
-          </a:p>
-          <a:p>
-            <a:pPr indent="-342900" lvl="0" marL="342900" marR="0" rtl="0" algn="l">
-              <a:lnSpc>
-                <a:spcPct val="100000"/>
-              </a:lnSpc>
-              <a:spcBef>
-                <a:spcPts val="360"/>
-              </a:spcBef>
-              <a:spcAft>
-                <a:spcPts val="0"/>
-              </a:spcAft>
-              <a:buClr>
-                <a:srgbClr val="822433"/>
-              </a:buClr>
-              <a:buSzPts val="1800"/>
-              <a:buFont typeface="Arial"/>
-              <a:buNone/>
-            </a:pPr>
-            <a:r>
-              <a:rPr b="1" i="1" lang="en-US" sz="1800" u="none">
-                <a:solidFill>
-                  <a:srgbClr val="000000"/>
-                </a:solidFill>
-                <a:latin typeface="Arial"/>
-                <a:ea typeface="Arial"/>
-                <a:cs typeface="Arial"/>
-                <a:sym typeface="Arial"/>
-              </a:rPr>
-              <a:t>The system degrades in capacity, not in availability.</a:t>
             </a:r>
             <a:endParaRPr/>
           </a:p>
           <a:p>
             <a:pPr indent="-228600" lvl="0" marL="342900" marR="0" rtl="0" algn="l">
+              <a:lnSpc>
+                <a:spcPct val="100000"/>
+              </a:lnSpc>
               <a:spcBef>
                 <a:spcPts val="360"/>
               </a:spcBef>
@@ -22184,7 +23496,7 @@
               <a:buNone/>
             </a:pPr>
             <a:r>
-              <a:rPr b="0" i="0" lang="en-US" sz="1100" u="none">
+              <a:rPr b="0" i="0" lang="en-US" sz="1100" u="none" cap="none" strike="noStrike">
                 <a:solidFill>
                   <a:schemeClr val="lt1"/>
                 </a:solidFill>
@@ -22195,7 +23507,15 @@
               </a:rPr>
               <a:t>*</a:t>
             </a:r>
-            <a:endParaRPr/>
+            <a:endParaRPr b="0" i="0" sz="1400" u="none" cap="none" strike="noStrike">
+              <a:solidFill>
+                <a:srgbClr val="000000"/>
+              </a:solidFill>
+              <a:latin typeface="Arial"/>
+              <a:ea typeface="Arial"/>
+              <a:cs typeface="Arial"/>
+              <a:sym typeface="Arial"/>
+            </a:endParaRPr>
           </a:p>
         </p:txBody>
       </p:sp>
@@ -22242,7 +23562,7 @@
               <a:buNone/>
             </a:pPr>
             <a:r>
-              <a:rPr b="0" i="0" lang="en-US" sz="1100" u="none">
+              <a:rPr b="0" i="0" lang="en-US" sz="1100" u="none" cap="none" strike="noStrike">
                 <a:solidFill>
                   <a:schemeClr val="lt1"/>
                 </a:solidFill>
@@ -22254,7 +23574,7 @@
               <a:t>Pagina </a:t>
             </a:r>
             <a:fld id="{00000000-1234-1234-1234-123412341234}" type="slidenum">
-              <a:rPr b="0" i="0" lang="en-US" sz="1100" u="none">
+              <a:rPr b="0" i="0" lang="en-US" sz="1100" u="none" cap="none" strike="noStrike">
                 <a:solidFill>
                   <a:schemeClr val="lt1"/>
                 </a:solidFill>
@@ -22265,7 +23585,15 @@
               </a:rPr>
               <a:t>‹#›</a:t>
             </a:fld>
-            <a:endParaRPr/>
+            <a:endParaRPr b="0" i="0" sz="1400" u="none" cap="none" strike="noStrike">
+              <a:solidFill>
+                <a:srgbClr val="000000"/>
+              </a:solidFill>
+              <a:latin typeface="Arial"/>
+              <a:ea typeface="Arial"/>
+              <a:cs typeface="Arial"/>
+              <a:sym typeface="Arial"/>
+            </a:endParaRPr>
           </a:p>
         </p:txBody>
       </p:sp>
@@ -22456,7 +23784,7 @@
             </a:endParaRPr>
           </a:p>
           <a:p>
-            <a:pPr indent="-114300" lvl="0" marL="0" marR="0" rtl="0" algn="l">
+            <a:pPr indent="0" lvl="0" marL="0" marR="0" rtl="0" algn="l">
               <a:lnSpc>
                 <a:spcPct val="100000"/>
               </a:lnSpc>
@@ -22548,7 +23876,7 @@
             <a:endParaRPr/>
           </a:p>
           <a:p>
-            <a:pPr indent="-114300" lvl="0" marL="0" marR="0" rtl="0" algn="l">
+            <a:pPr indent="0" lvl="0" marL="0" marR="0" rtl="0" algn="l">
               <a:lnSpc>
                 <a:spcPct val="100000"/>
               </a:lnSpc>
@@ -22718,7 +24046,7 @@
             </a:endParaRPr>
           </a:p>
           <a:p>
-            <a:pPr indent="-114300" lvl="0" marL="0" marR="0" rtl="0" algn="l">
+            <a:pPr indent="0" lvl="0" marL="0" marR="0" rtl="0" algn="l">
               <a:lnSpc>
                 <a:spcPct val="100000"/>
               </a:lnSpc>
@@ -22750,7 +24078,7 @@
             <a:endParaRPr/>
           </a:p>
           <a:p>
-            <a:pPr indent="-114300" lvl="0" marL="0" marR="0" rtl="0" algn="l">
+            <a:pPr indent="0" lvl="0" marL="0" marR="0" rtl="0" algn="l">
               <a:lnSpc>
                 <a:spcPct val="100000"/>
               </a:lnSpc>
@@ -22794,7 +24122,7 @@
             <a:endParaRPr/>
           </a:p>
           <a:p>
-            <a:pPr indent="-114300" lvl="0" marL="0" marR="0" rtl="0" algn="l">
+            <a:pPr indent="0" lvl="0" marL="0" marR="0" rtl="0" algn="l">
               <a:lnSpc>
                 <a:spcPct val="100000"/>
               </a:lnSpc>
@@ -22882,7 +24210,7 @@
               <a:buNone/>
             </a:pPr>
             <a:r>
-              <a:rPr b="0" i="0" lang="en-US" sz="1100" u="none">
+              <a:rPr b="0" i="0" lang="en-US" sz="1100" u="none" cap="none" strike="noStrike">
                 <a:solidFill>
                   <a:schemeClr val="lt1"/>
                 </a:solidFill>
@@ -22893,7 +24221,15 @@
               </a:rPr>
               <a:t>*</a:t>
             </a:r>
-            <a:endParaRPr/>
+            <a:endParaRPr b="0" i="0" sz="1400" u="none" cap="none" strike="noStrike">
+              <a:solidFill>
+                <a:srgbClr val="000000"/>
+              </a:solidFill>
+              <a:latin typeface="Arial"/>
+              <a:ea typeface="Arial"/>
+              <a:cs typeface="Arial"/>
+              <a:sym typeface="Arial"/>
+            </a:endParaRPr>
           </a:p>
         </p:txBody>
       </p:sp>
@@ -22940,7 +24276,7 @@
               <a:buNone/>
             </a:pPr>
             <a:r>
-              <a:rPr b="0" i="0" lang="en-US" sz="1100" u="none">
+              <a:rPr b="0" i="0" lang="en-US" sz="1100" u="none" cap="none" strike="noStrike">
                 <a:solidFill>
                   <a:schemeClr val="lt1"/>
                 </a:solidFill>
@@ -22952,7 +24288,7 @@
               <a:t>Pagina </a:t>
             </a:r>
             <a:fld id="{00000000-1234-1234-1234-123412341234}" type="slidenum">
-              <a:rPr b="0" i="0" lang="en-US" sz="1100" u="none">
+              <a:rPr b="0" i="0" lang="en-US" sz="1100" u="none" cap="none" strike="noStrike">
                 <a:solidFill>
                   <a:schemeClr val="lt1"/>
                 </a:solidFill>
@@ -22963,7 +24299,15 @@
               </a:rPr>
               <a:t>‹#›</a:t>
             </a:fld>
-            <a:endParaRPr/>
+            <a:endParaRPr b="0" i="0" sz="1400" u="none" cap="none" strike="noStrike">
+              <a:solidFill>
+                <a:srgbClr val="000000"/>
+              </a:solidFill>
+              <a:latin typeface="Arial"/>
+              <a:ea typeface="Arial"/>
+              <a:cs typeface="Arial"/>
+              <a:sym typeface="Arial"/>
+            </a:endParaRPr>
           </a:p>
         </p:txBody>
       </p:sp>
@@ -23095,7 +24439,7 @@
               <a:buNone/>
             </a:pPr>
             <a:r>
-              <a:rPr b="0" i="0" lang="en-US" sz="1100" u="none">
+              <a:rPr b="0" i="0" lang="en-US" sz="1100" u="none" cap="none" strike="noStrike">
                 <a:solidFill>
                   <a:schemeClr val="lt1"/>
                 </a:solidFill>
@@ -23106,7 +24450,15 @@
               </a:rPr>
               <a:t>*</a:t>
             </a:r>
-            <a:endParaRPr/>
+            <a:endParaRPr b="0" i="0" sz="1400" u="none" cap="none" strike="noStrike">
+              <a:solidFill>
+                <a:srgbClr val="000000"/>
+              </a:solidFill>
+              <a:latin typeface="Arial"/>
+              <a:ea typeface="Arial"/>
+              <a:cs typeface="Arial"/>
+              <a:sym typeface="Arial"/>
+            </a:endParaRPr>
           </a:p>
         </p:txBody>
       </p:sp>
@@ -23153,7 +24505,7 @@
               <a:buNone/>
             </a:pPr>
             <a:r>
-              <a:rPr b="0" i="0" lang="en-US" sz="1100" u="none">
+              <a:rPr b="0" i="0" lang="en-US" sz="1100" u="none" cap="none" strike="noStrike">
                 <a:solidFill>
                   <a:schemeClr val="lt1"/>
                 </a:solidFill>
@@ -23165,7 +24517,7 @@
               <a:t>Pagina </a:t>
             </a:r>
             <a:fld id="{00000000-1234-1234-1234-123412341234}" type="slidenum">
-              <a:rPr b="0" i="0" lang="en-US" sz="1100" u="none">
+              <a:rPr b="0" i="0" lang="en-US" sz="1100" u="none" cap="none" strike="noStrike">
                 <a:solidFill>
                   <a:schemeClr val="lt1"/>
                 </a:solidFill>
@@ -23176,7 +24528,15 @@
               </a:rPr>
               <a:t>‹#›</a:t>
             </a:fld>
-            <a:endParaRPr/>
+            <a:endParaRPr b="0" i="0" sz="1400" u="none" cap="none" strike="noStrike">
+              <a:solidFill>
+                <a:srgbClr val="000000"/>
+              </a:solidFill>
+              <a:latin typeface="Arial"/>
+              <a:ea typeface="Arial"/>
+              <a:cs typeface="Arial"/>
+              <a:sym typeface="Arial"/>
+            </a:endParaRPr>
           </a:p>
         </p:txBody>
       </p:sp>
@@ -23339,42 +24699,10 @@
               <a:buNone/>
             </a:pPr>
             <a:r>
-              <a:rPr b="0" i="0" lang="en-US" sz="1800" u="none">
-                <a:solidFill>
-                  <a:srgbClr val="000000"/>
-                </a:solidFill>
-                <a:latin typeface="Arial"/>
-                <a:ea typeface="Arial"/>
-                <a:cs typeface="Arial"/>
-                <a:sym typeface="Arial"/>
-              </a:rPr>
-              <a:t>The </a:t>
-            </a:r>
-            <a:r>
-              <a:rPr b="1" i="0" lang="en-US" sz="1800" u="none">
-                <a:solidFill>
-                  <a:srgbClr val="000000"/>
-                </a:solidFill>
-                <a:latin typeface="Arial"/>
-                <a:ea typeface="Arial"/>
-                <a:cs typeface="Arial"/>
-                <a:sym typeface="Arial"/>
-              </a:rPr>
-              <a:t>Gateway</a:t>
-            </a:r>
-            <a:r>
-              <a:rPr b="0" i="0" lang="en-US" sz="1800" u="none">
-                <a:solidFill>
-                  <a:srgbClr val="000000"/>
-                </a:solidFill>
-                <a:latin typeface="Arial"/>
-                <a:ea typeface="Arial"/>
-                <a:cs typeface="Arial"/>
-                <a:sym typeface="Arial"/>
-              </a:rPr>
-              <a:t>:</a:t>
-            </a:r>
-            <a:endParaRPr/>
+              <a:rPr lang="en-US" sz="1800"/>
+              <a:t>Isolating user access from core processing logic</a:t>
+            </a:r>
+            <a:endParaRPr sz="1800"/>
           </a:p>
           <a:p>
             <a:pPr indent="-342900" lvl="0" marL="342900" marR="0" rtl="0" algn="l">
@@ -23382,7 +24710,7 @@
                 <a:spcPct val="100000"/>
               </a:lnSpc>
               <a:spcBef>
-                <a:spcPts val="360"/>
+                <a:spcPts val="0"/>
               </a:spcBef>
               <a:spcAft>
                 <a:spcPts val="0"/>
@@ -23392,33 +24720,12 @@
               </a:buClr>
               <a:buSzPts val="1800"/>
               <a:buFont typeface="Arial"/>
-              <a:buChar char="•"/>
+              <a:buNone/>
             </a:pPr>
             <a:r>
-              <a:rPr b="0" i="1" lang="en-US" sz="1800" u="none">
-                <a:solidFill>
-                  <a:srgbClr val="000000"/>
-                </a:solidFill>
-                <a:latin typeface="Arial"/>
-                <a:ea typeface="Arial"/>
-                <a:cs typeface="Arial"/>
-                <a:sym typeface="Arial"/>
-              </a:rPr>
-              <a:t>Queries</a:t>
-            </a:r>
-            <a:r>
-              <a:rPr b="0" i="0" lang="en-US" sz="1800" u="none">
-                <a:solidFill>
-                  <a:srgbClr val="000000"/>
-                </a:solidFill>
-                <a:latin typeface="Arial"/>
-                <a:ea typeface="Arial"/>
-                <a:cs typeface="Arial"/>
-                <a:sym typeface="Arial"/>
-              </a:rPr>
-              <a:t> PostgreSQL for historical events </a:t>
-            </a:r>
-            <a:endParaRPr/>
+              <a:t/>
+            </a:r>
+            <a:endParaRPr sz="1800"/>
           </a:p>
           <a:p>
             <a:pPr indent="-342900" lvl="0" marL="342900" marR="0" rtl="0" algn="l">
@@ -23426,6 +24733,29 @@
                 <a:spcPct val="100000"/>
               </a:lnSpc>
               <a:spcBef>
+                <a:spcPts val="0"/>
+              </a:spcBef>
+              <a:spcAft>
+                <a:spcPts val="0"/>
+              </a:spcAft>
+              <a:buClr>
+                <a:srgbClr val="822433"/>
+              </a:buClr>
+              <a:buSzPts val="1800"/>
+              <a:buFont typeface="Arial"/>
+              <a:buNone/>
+            </a:pPr>
+            <a:r>
+              <a:t/>
+            </a:r>
+            <a:endParaRPr sz="1800"/>
+          </a:p>
+          <a:p>
+            <a:pPr indent="-381000" lvl="0" marL="342900" marR="0" rtl="0" algn="l">
+              <a:lnSpc>
+                <a:spcPct val="100000"/>
+              </a:lnSpc>
+              <a:spcBef>
                 <a:spcPts val="360"/>
               </a:spcBef>
               <a:spcAft>
@@ -23434,38 +24764,22 @@
               <a:buClr>
                 <a:srgbClr val="822433"/>
               </a:buClr>
-              <a:buSzPts val="1800"/>
+              <a:buSzPts val="2400"/>
               <a:buFont typeface="Arial"/>
               <a:buChar char="•"/>
             </a:pPr>
             <a:r>
-              <a:rPr b="0" i="1" lang="en-US" sz="1800" u="none">
-                <a:solidFill>
-                  <a:srgbClr val="000000"/>
-                </a:solidFill>
-                <a:latin typeface="Arial"/>
-                <a:ea typeface="Arial"/>
-                <a:cs typeface="Arial"/>
-                <a:sym typeface="Arial"/>
-              </a:rPr>
-              <a:t>Streams</a:t>
-            </a:r>
-            <a:r>
-              <a:rPr b="0" i="0" lang="en-US" sz="1800" u="none">
-                <a:solidFill>
-                  <a:srgbClr val="000000"/>
-                </a:solidFill>
-                <a:latin typeface="Arial"/>
-                <a:ea typeface="Arial"/>
-                <a:cs typeface="Arial"/>
-                <a:sym typeface="Arial"/>
-              </a:rPr>
-              <a:t> new events via SSE </a:t>
-            </a:r>
-            <a:endParaRPr/>
+              <a:rPr b="1" lang="en-US" sz="1700"/>
+              <a:t>Stateless Gateway:</a:t>
+            </a:r>
+            <a:r>
+              <a:rPr lang="en-US" sz="1700"/>
+              <a:t> Acts as an aggregated API façade, decoupling the UI from the processing nodes.</a:t>
+            </a:r>
+            <a:endParaRPr sz="3000"/>
           </a:p>
           <a:p>
-            <a:pPr indent="-342900" lvl="0" marL="342900" marR="0" rtl="0" algn="l">
+            <a:pPr indent="-381000" lvl="0" marL="342900" marR="0" rtl="0" algn="l">
               <a:lnSpc>
                 <a:spcPct val="100000"/>
               </a:lnSpc>
@@ -23478,62 +24792,22 @@
               <a:buClr>
                 <a:srgbClr val="822433"/>
               </a:buClr>
-              <a:buSzPts val="1800"/>
+              <a:buSzPts val="2400"/>
               <a:buFont typeface="Arial"/>
               <a:buChar char="•"/>
             </a:pPr>
             <a:r>
-              <a:rPr b="0" i="1" lang="en-US" sz="1800" u="none">
-                <a:solidFill>
-                  <a:srgbClr val="000000"/>
-                </a:solidFill>
-                <a:latin typeface="Arial"/>
-                <a:ea typeface="Arial"/>
-                <a:cs typeface="Arial"/>
-                <a:sym typeface="Arial"/>
-              </a:rPr>
-              <a:t>Aggregates</a:t>
-            </a:r>
-            <a:r>
-              <a:rPr b="0" i="0" lang="en-US" sz="1800" u="none">
-                <a:solidFill>
-                  <a:srgbClr val="000000"/>
-                </a:solidFill>
-                <a:latin typeface="Arial"/>
-                <a:ea typeface="Arial"/>
-                <a:cs typeface="Arial"/>
-                <a:sym typeface="Arial"/>
-              </a:rPr>
-              <a:t> replica health (</a:t>
-            </a:r>
-            <a:r>
-              <a:rPr b="0" i="0" lang="en-US" sz="1800" u="none">
-                <a:solidFill>
-                  <a:srgbClr val="000000"/>
-                </a:solidFill>
-                <a:latin typeface="Courier New"/>
-                <a:ea typeface="Courier New"/>
-                <a:cs typeface="Courier New"/>
-                <a:sym typeface="Courier New"/>
-              </a:rPr>
-              <a:t>/api/replicas</a:t>
-            </a:r>
-            <a:r>
-              <a:rPr b="0" i="0" lang="en-US" sz="1800" u="none">
-                <a:solidFill>
-                  <a:srgbClr val="000000"/>
-                </a:solidFill>
-                <a:latin typeface="Arial"/>
-                <a:ea typeface="Arial"/>
-                <a:cs typeface="Arial"/>
-                <a:sym typeface="Arial"/>
-              </a:rPr>
-              <a:t>) </a:t>
-            </a:r>
-            <a:endParaRPr/>
+              <a:rPr b="1" lang="en-US" sz="1700"/>
+              <a:t>Role-Based Interfaces:</a:t>
+            </a:r>
+            <a:r>
+              <a:rPr lang="en-US" sz="1700"/>
+              <a:t> Tailored data exposure for Commanders, Analysts, and IT Admins.</a:t>
+            </a:r>
+            <a:endParaRPr sz="3000"/>
           </a:p>
           <a:p>
-            <a:pPr indent="-342900" lvl="0" marL="342900" marR="0" rtl="0" algn="l">
+            <a:pPr indent="-381000" lvl="0" marL="342900" marR="0" rtl="0" algn="l">
               <a:lnSpc>
                 <a:spcPct val="100000"/>
               </a:lnSpc>
@@ -23546,47 +24820,47 @@
               <a:buClr>
                 <a:srgbClr val="822433"/>
               </a:buClr>
-              <a:buSzPts val="1800"/>
+              <a:buSzPts val="2400"/>
               <a:buFont typeface="Arial"/>
               <a:buChar char="•"/>
             </a:pPr>
             <a:r>
-              <a:rPr b="0" i="0" lang="en-US" sz="1800" u="none">
-                <a:solidFill>
-                  <a:srgbClr val="000000"/>
-                </a:solidFill>
-                <a:latin typeface="Arial"/>
-                <a:ea typeface="Arial"/>
-                <a:cs typeface="Arial"/>
-                <a:sym typeface="Arial"/>
-              </a:rPr>
-              <a:t>Proxies</a:t>
-            </a:r>
-            <a:r>
-              <a:rPr b="0" i="1" lang="en-US" sz="1800" u="none">
-                <a:solidFill>
-                  <a:srgbClr val="000000"/>
-                </a:solidFill>
-                <a:latin typeface="Arial"/>
-                <a:ea typeface="Arial"/>
-                <a:cs typeface="Arial"/>
-                <a:sym typeface="Arial"/>
-              </a:rPr>
-              <a:t> </a:t>
-            </a:r>
-            <a:r>
-              <a:rPr b="0" i="0" lang="en-US" sz="1800" u="none">
-                <a:solidFill>
-                  <a:srgbClr val="000000"/>
-                </a:solidFill>
-                <a:latin typeface="Arial"/>
-                <a:ea typeface="Arial"/>
-                <a:cs typeface="Arial"/>
-                <a:sym typeface="Arial"/>
-              </a:rPr>
-              <a:t>to processing replicas with failover </a:t>
-            </a:r>
-            <a:endParaRPr/>
+              <a:rPr b="1" lang="en-US" sz="1700"/>
+              <a:t>Single Source of Truth:</a:t>
+            </a:r>
+            <a:r>
+              <a:rPr lang="en-US" sz="1700"/>
+              <a:t> All historical and durable intelligence is exclusively queried from PostgreSQL.</a:t>
+            </a:r>
+            <a:endParaRPr sz="3000"/>
+          </a:p>
+          <a:p>
+            <a:pPr indent="-381000" lvl="0" marL="342900" marR="0" rtl="0" algn="l">
+              <a:lnSpc>
+                <a:spcPct val="100000"/>
+              </a:lnSpc>
+              <a:spcBef>
+                <a:spcPts val="360"/>
+              </a:spcBef>
+              <a:spcAft>
+                <a:spcPts val="0"/>
+              </a:spcAft>
+              <a:buClr>
+                <a:srgbClr val="822433"/>
+              </a:buClr>
+              <a:buSzPts val="2400"/>
+              <a:buFont typeface="Arial"/>
+              <a:buChar char="•"/>
+            </a:pPr>
+            <a:r>
+              <a:rPr b="1" lang="en-US" sz="1700"/>
+              <a:t>Web Container:</a:t>
+            </a:r>
+            <a:r>
+              <a:rPr lang="en-US" sz="1700"/>
+              <a:t> Serves the React SPA via Nginx proxy, ensuring isolated and secure browser access.</a:t>
+            </a:r>
+            <a:endParaRPr sz="3000"/>
           </a:p>
           <a:p>
             <a:pPr indent="-342900" lvl="0" marL="342900" marR="0" rtl="0" algn="l">
@@ -23651,7 +24925,7 @@
             </a:endParaRPr>
           </a:p>
           <a:p>
-            <a:pPr indent="-342900" lvl="0" marL="342900" marR="0" rtl="0" algn="l">
+            <a:pPr indent="0" lvl="0" marL="0" marR="0" rtl="0" algn="l">
               <a:lnSpc>
                 <a:spcPct val="100000"/>
               </a:lnSpc>
@@ -23669,160 +24943,7 @@
               <a:buNone/>
             </a:pPr>
             <a:r>
-              <a:rPr b="0" i="0" lang="en-US" sz="1800" u="none">
-                <a:solidFill>
-                  <a:srgbClr val="000000"/>
-                </a:solidFill>
-                <a:latin typeface="Arial"/>
-                <a:ea typeface="Arial"/>
-                <a:cs typeface="Arial"/>
-                <a:sym typeface="Arial"/>
-              </a:rPr>
-              <a:t>The </a:t>
-            </a:r>
-            <a:r>
-              <a:rPr b="1" i="0" lang="en-US" sz="1800" u="none">
-                <a:solidFill>
-                  <a:srgbClr val="000000"/>
-                </a:solidFill>
-                <a:latin typeface="Arial"/>
-                <a:ea typeface="Arial"/>
-                <a:cs typeface="Arial"/>
-                <a:sym typeface="Arial"/>
-              </a:rPr>
-              <a:t>Web Container:</a:t>
-            </a:r>
-            <a:endParaRPr/>
-          </a:p>
-          <a:p>
-            <a:pPr indent="-342900" lvl="0" marL="342900" marR="0" rtl="0" algn="l">
-              <a:lnSpc>
-                <a:spcPct val="100000"/>
-              </a:lnSpc>
-              <a:spcBef>
-                <a:spcPts val="360"/>
-              </a:spcBef>
-              <a:spcAft>
-                <a:spcPts val="0"/>
-              </a:spcAft>
-              <a:buClr>
-                <a:srgbClr val="822433"/>
-              </a:buClr>
-              <a:buSzPts val="1800"/>
-              <a:buFont typeface="Arial"/>
-              <a:buChar char="•"/>
-            </a:pPr>
-            <a:r>
-              <a:rPr b="0" i="0" lang="en-US" sz="1800" u="none">
-                <a:solidFill>
-                  <a:srgbClr val="000000"/>
-                </a:solidFill>
-                <a:latin typeface="Arial"/>
-                <a:ea typeface="Arial"/>
-                <a:cs typeface="Arial"/>
-                <a:sym typeface="Arial"/>
-              </a:rPr>
-              <a:t>Serves the React SPA (port 3000) via </a:t>
-            </a:r>
-            <a:r>
-              <a:rPr b="1" i="0" lang="en-US" sz="1800" u="none">
-                <a:solidFill>
-                  <a:srgbClr val="000000"/>
-                </a:solidFill>
-                <a:latin typeface="Arial"/>
-                <a:ea typeface="Arial"/>
-                <a:cs typeface="Arial"/>
-                <a:sym typeface="Arial"/>
-              </a:rPr>
-              <a:t>Nginx</a:t>
-            </a:r>
-            <a:endParaRPr/>
-          </a:p>
-          <a:p>
-            <a:pPr indent="-342900" lvl="0" marL="342900" marR="0" rtl="0" algn="l">
-              <a:lnSpc>
-                <a:spcPct val="100000"/>
-              </a:lnSpc>
-              <a:spcBef>
-                <a:spcPts val="360"/>
-              </a:spcBef>
-              <a:spcAft>
-                <a:spcPts val="0"/>
-              </a:spcAft>
-              <a:buClr>
-                <a:srgbClr val="822433"/>
-              </a:buClr>
-              <a:buSzPts val="1800"/>
-              <a:buFont typeface="Arial"/>
-              <a:buChar char="•"/>
-            </a:pPr>
-            <a:r>
-              <a:rPr b="0" i="0" lang="en-US" sz="1800" u="none">
-                <a:solidFill>
-                  <a:srgbClr val="000000"/>
-                </a:solidFill>
-                <a:latin typeface="Arial"/>
-                <a:ea typeface="Arial"/>
-                <a:cs typeface="Arial"/>
-                <a:sym typeface="Arial"/>
-              </a:rPr>
-              <a:t>Proxies </a:t>
-            </a:r>
-            <a:r>
-              <a:rPr b="0" i="0" lang="en-US" sz="1800" u="none">
-                <a:solidFill>
-                  <a:srgbClr val="000000"/>
-                </a:solidFill>
-                <a:latin typeface="Courier New"/>
-                <a:ea typeface="Courier New"/>
-                <a:cs typeface="Courier New"/>
-                <a:sym typeface="Courier New"/>
-              </a:rPr>
-              <a:t>/api/* </a:t>
-            </a:r>
-            <a:r>
-              <a:rPr b="0" i="0" lang="en-US" sz="1800" u="none">
-                <a:solidFill>
-                  <a:srgbClr val="000000"/>
-                </a:solidFill>
-                <a:latin typeface="Arial"/>
-                <a:ea typeface="Arial"/>
-                <a:cs typeface="Arial"/>
-                <a:sym typeface="Arial"/>
-              </a:rPr>
-              <a:t>request to gateway </a:t>
-            </a:r>
-            <a:endParaRPr/>
-          </a:p>
-          <a:p>
-            <a:pPr indent="-342900" lvl="0" marL="342900" marR="0" rtl="0" algn="l">
-              <a:lnSpc>
-                <a:spcPct val="100000"/>
-              </a:lnSpc>
-              <a:spcBef>
-                <a:spcPts val="360"/>
-              </a:spcBef>
-              <a:spcAft>
-                <a:spcPts val="0"/>
-              </a:spcAft>
-              <a:buClr>
-                <a:srgbClr val="822433"/>
-              </a:buClr>
-              <a:buSzPts val="1800"/>
-              <a:buFont typeface="Arial"/>
-              <a:buChar char="•"/>
-            </a:pPr>
-            <a:r>
-              <a:rPr b="0" i="0" lang="en-US" sz="1800" u="none">
-                <a:solidFill>
-                  <a:srgbClr val="000000"/>
-                </a:solidFill>
-                <a:latin typeface="Arial"/>
-                <a:ea typeface="Arial"/>
-                <a:cs typeface="Arial"/>
-                <a:sym typeface="Arial"/>
-              </a:rPr>
-              <a:t>Ensures single-origin browser access </a:t>
+              <a:t/>
             </a:r>
             <a:endParaRPr/>
           </a:p>
@@ -23831,66 +24952,6 @@
               <a:lnSpc>
                 <a:spcPct val="100000"/>
               </a:lnSpc>
-              <a:spcBef>
-                <a:spcPts val="360"/>
-              </a:spcBef>
-              <a:spcAft>
-                <a:spcPts val="0"/>
-              </a:spcAft>
-              <a:buClr>
-                <a:srgbClr val="822433"/>
-              </a:buClr>
-              <a:buSzPts val="1800"/>
-              <a:buFont typeface="Arial"/>
-              <a:buNone/>
-            </a:pPr>
-            <a:r>
-              <a:t/>
-            </a:r>
-            <a:endParaRPr b="0" i="0" sz="1800" u="none">
-              <a:solidFill>
-                <a:srgbClr val="000000"/>
-              </a:solidFill>
-              <a:latin typeface="Arial"/>
-              <a:ea typeface="Arial"/>
-              <a:cs typeface="Arial"/>
-              <a:sym typeface="Arial"/>
-            </a:endParaRPr>
-          </a:p>
-          <a:p>
-            <a:pPr indent="-342900" lvl="0" marL="342900" marR="0" rtl="0" algn="l">
-              <a:lnSpc>
-                <a:spcPct val="100000"/>
-              </a:lnSpc>
-              <a:spcBef>
-                <a:spcPts val="360"/>
-              </a:spcBef>
-              <a:spcAft>
-                <a:spcPts val="0"/>
-              </a:spcAft>
-              <a:buClr>
-                <a:srgbClr val="822433"/>
-              </a:buClr>
-              <a:buSzPts val="1800"/>
-              <a:buFont typeface="Arial"/>
-              <a:buNone/>
-            </a:pPr>
-            <a:r>
-              <a:rPr b="0" i="0" lang="en-US" sz="1800" u="none">
-                <a:solidFill>
-                  <a:srgbClr val="000000"/>
-                </a:solidFill>
-                <a:latin typeface="Arial"/>
-                <a:ea typeface="Arial"/>
-                <a:cs typeface="Arial"/>
-                <a:sym typeface="Arial"/>
-              </a:rPr>
-              <a:t>The gateway is stateless. All durable intelligence lives in PostgreSQL.</a:t>
-            </a:r>
-            <a:endParaRPr/>
-          </a:p>
-          <a:p>
-            <a:pPr indent="-228600" lvl="0" marL="342900" marR="0" rtl="0" algn="l">
               <a:spcBef>
                 <a:spcPts val="360"/>
               </a:spcBef>
@@ -23962,7 +25023,7 @@
               <a:buNone/>
             </a:pPr>
             <a:r>
-              <a:rPr b="0" i="0" lang="en-US" sz="1100" u="none">
+              <a:rPr b="0" i="0" lang="en-US" sz="1100" u="none" cap="none" strike="noStrike">
                 <a:solidFill>
                   <a:schemeClr val="lt1"/>
                 </a:solidFill>
@@ -23973,7 +25034,15 @@
               </a:rPr>
               <a:t>*</a:t>
             </a:r>
-            <a:endParaRPr/>
+            <a:endParaRPr b="0" i="0" sz="1400" u="none" cap="none" strike="noStrike">
+              <a:solidFill>
+                <a:srgbClr val="000000"/>
+              </a:solidFill>
+              <a:latin typeface="Arial"/>
+              <a:ea typeface="Arial"/>
+              <a:cs typeface="Arial"/>
+              <a:sym typeface="Arial"/>
+            </a:endParaRPr>
           </a:p>
         </p:txBody>
       </p:sp>
@@ -24020,7 +25089,7 @@
               <a:buNone/>
             </a:pPr>
             <a:r>
-              <a:rPr b="0" i="0" lang="en-US" sz="1100" u="none">
+              <a:rPr b="0" i="0" lang="en-US" sz="1100" u="none" cap="none" strike="noStrike">
                 <a:solidFill>
                   <a:schemeClr val="lt1"/>
                 </a:solidFill>
@@ -24032,7 +25101,7 @@
               <a:t>Pagina </a:t>
             </a:r>
             <a:fld id="{00000000-1234-1234-1234-123412341234}" type="slidenum">
-              <a:rPr b="0" i="0" lang="en-US" sz="1100" u="none">
+              <a:rPr b="0" i="0" lang="en-US" sz="1100" u="none" cap="none" strike="noStrike">
                 <a:solidFill>
                   <a:schemeClr val="lt1"/>
                 </a:solidFill>
@@ -24043,7 +25112,15 @@
               </a:rPr>
               <a:t>‹#›</a:t>
             </a:fld>
-            <a:endParaRPr/>
+            <a:endParaRPr b="0" i="0" sz="1400" u="none" cap="none" strike="noStrike">
+              <a:solidFill>
+                <a:srgbClr val="000000"/>
+              </a:solidFill>
+              <a:latin typeface="Arial"/>
+              <a:ea typeface="Arial"/>
+              <a:cs typeface="Arial"/>
+              <a:sym typeface="Arial"/>
+            </a:endParaRPr>
           </a:p>
         </p:txBody>
       </p:sp>
@@ -24246,7 +25323,7 @@
             </a:endParaRPr>
           </a:p>
           <a:p>
-            <a:pPr indent="-114300" lvl="0" marL="0" marR="0" rtl="0" algn="l">
+            <a:pPr indent="0" lvl="0" marL="0" marR="0" rtl="0" algn="l">
               <a:lnSpc>
                 <a:spcPct val="100000"/>
               </a:lnSpc>
@@ -24346,218 +25423,6 @@
                 <a:sym typeface="Arial"/>
               </a:rPr>
               <a:t>to trigger defense protocols.</a:t>
-            </a:r>
-            <a:endParaRPr b="0" i="0" sz="1800" u="none">
-              <a:solidFill>
-                <a:srgbClr val="000000"/>
-              </a:solidFill>
-              <a:latin typeface="Arial"/>
-              <a:ea typeface="Arial"/>
-              <a:cs typeface="Arial"/>
-              <a:sym typeface="Arial"/>
-            </a:endParaRPr>
-          </a:p>
-          <a:p>
-            <a:pPr indent="-114300" lvl="0" marL="0" marR="0" rtl="0" algn="l">
-              <a:lnSpc>
-                <a:spcPct val="100000"/>
-              </a:lnSpc>
-              <a:spcBef>
-                <a:spcPts val="360"/>
-              </a:spcBef>
-              <a:spcAft>
-                <a:spcPts val="0"/>
-              </a:spcAft>
-              <a:buClr>
-                <a:srgbClr val="822433"/>
-              </a:buClr>
-              <a:buSzPts val="1800"/>
-              <a:buFont typeface="Arial"/>
-              <a:buChar char="•"/>
-            </a:pPr>
-            <a:r>
-              <a:rPr b="1" i="0" lang="en-US" sz="1800" u="none">
-                <a:solidFill>
-                  <a:srgbClr val="000000"/>
-                </a:solidFill>
-                <a:latin typeface="Arial"/>
-                <a:ea typeface="Arial"/>
-                <a:cs typeface="Arial"/>
-                <a:sym typeface="Arial"/>
-              </a:rPr>
-              <a:t>US-09</a:t>
-            </a:r>
-            <a:r>
-              <a:rPr b="0" i="0" lang="en-US" sz="1800" u="none">
-                <a:solidFill>
-                  <a:srgbClr val="000000"/>
-                </a:solidFill>
-                <a:latin typeface="Arial"/>
-                <a:ea typeface="Arial"/>
-                <a:cs typeface="Arial"/>
-                <a:sym typeface="Arial"/>
-              </a:rPr>
-              <a:t>: As a </a:t>
-            </a:r>
-            <a:r>
-              <a:rPr b="1" i="0" lang="en-US" sz="1800" u="none">
-                <a:solidFill>
-                  <a:srgbClr val="000000"/>
-                </a:solidFill>
-                <a:latin typeface="Arial"/>
-                <a:ea typeface="Arial"/>
-                <a:cs typeface="Arial"/>
-                <a:sym typeface="Arial"/>
-              </a:rPr>
-              <a:t>Command-Center Op</a:t>
-            </a:r>
-            <a:r>
-              <a:rPr b="0" i="0" lang="en-US" sz="1800" u="none">
-                <a:solidFill>
-                  <a:srgbClr val="000000"/>
-                </a:solidFill>
-                <a:latin typeface="Arial"/>
-                <a:ea typeface="Arial"/>
-                <a:cs typeface="Arial"/>
-                <a:sym typeface="Arial"/>
-              </a:rPr>
-              <a:t>., I want a real-time dashboard to visualize recent events and system health.</a:t>
-            </a:r>
-            <a:endParaRPr/>
-          </a:p>
-          <a:p>
-            <a:pPr indent="-114300" lvl="0" marL="0" marR="0" rtl="0" algn="l">
-              <a:lnSpc>
-                <a:spcPct val="100000"/>
-              </a:lnSpc>
-              <a:spcBef>
-                <a:spcPts val="360"/>
-              </a:spcBef>
-              <a:spcAft>
-                <a:spcPts val="0"/>
-              </a:spcAft>
-              <a:buClr>
-                <a:srgbClr val="822433"/>
-              </a:buClr>
-              <a:buSzPts val="1800"/>
-              <a:buFont typeface="Arial"/>
-              <a:buChar char="•"/>
-            </a:pPr>
-            <a:r>
-              <a:rPr b="1" i="0" lang="en-US" sz="1800" u="none">
-                <a:solidFill>
-                  <a:srgbClr val="000000"/>
-                </a:solidFill>
-                <a:latin typeface="Arial"/>
-                <a:ea typeface="Arial"/>
-                <a:cs typeface="Arial"/>
-                <a:sym typeface="Arial"/>
-              </a:rPr>
-              <a:t>US-10</a:t>
-            </a:r>
-            <a:r>
-              <a:rPr b="0" i="0" lang="en-US" sz="1800" u="none">
-                <a:solidFill>
-                  <a:srgbClr val="000000"/>
-                </a:solidFill>
-                <a:latin typeface="Arial"/>
-                <a:ea typeface="Arial"/>
-                <a:cs typeface="Arial"/>
-                <a:sym typeface="Arial"/>
-              </a:rPr>
-              <a:t>: As </a:t>
-            </a:r>
-            <a:r>
-              <a:rPr b="1" i="0" lang="en-US" sz="1800" u="none">
-                <a:solidFill>
-                  <a:srgbClr val="000000"/>
-                </a:solidFill>
-                <a:latin typeface="Arial"/>
-                <a:ea typeface="Arial"/>
-                <a:cs typeface="Arial"/>
-                <a:sym typeface="Arial"/>
-              </a:rPr>
-              <a:t>a Strategic Researcher</a:t>
-            </a:r>
-            <a:r>
-              <a:rPr b="0" i="0" lang="en-US" sz="1800" u="none">
-                <a:solidFill>
-                  <a:srgbClr val="000000"/>
-                </a:solidFill>
-                <a:latin typeface="Arial"/>
-                <a:ea typeface="Arial"/>
-                <a:cs typeface="Arial"/>
-                <a:sym typeface="Arial"/>
-              </a:rPr>
-              <a:t>, I need historical log of persisted threats so that patterns in activity can be reviewed</a:t>
-            </a:r>
-            <a:endParaRPr/>
-          </a:p>
-          <a:p>
-            <a:pPr indent="-114300" lvl="0" marL="0" marR="0" rtl="0" algn="l">
-              <a:lnSpc>
-                <a:spcPct val="100000"/>
-              </a:lnSpc>
-              <a:spcBef>
-                <a:spcPts val="360"/>
-              </a:spcBef>
-              <a:spcAft>
-                <a:spcPts val="0"/>
-              </a:spcAft>
-              <a:buClr>
-                <a:srgbClr val="822433"/>
-              </a:buClr>
-              <a:buSzPts val="1800"/>
-              <a:buFont typeface="Arial"/>
-              <a:buChar char="•"/>
-            </a:pPr>
-            <a:r>
-              <a:rPr b="1" i="0" lang="en-US" sz="1800" u="none">
-                <a:solidFill>
-                  <a:srgbClr val="000000"/>
-                </a:solidFill>
-                <a:latin typeface="Arial"/>
-                <a:ea typeface="Arial"/>
-                <a:cs typeface="Arial"/>
-                <a:sym typeface="Arial"/>
-              </a:rPr>
-              <a:t>US-13</a:t>
-            </a:r>
-            <a:r>
-              <a:rPr b="0" i="0" lang="en-US" sz="1800" u="none">
-                <a:solidFill>
-                  <a:srgbClr val="000000"/>
-                </a:solidFill>
-                <a:latin typeface="Arial"/>
-                <a:ea typeface="Arial"/>
-                <a:cs typeface="Arial"/>
-                <a:sym typeface="Arial"/>
-              </a:rPr>
-              <a:t>: As a </a:t>
-            </a:r>
-            <a:r>
-              <a:rPr b="1" i="0" lang="en-US" sz="1800" u="none">
-                <a:solidFill>
-                  <a:srgbClr val="000000"/>
-                </a:solidFill>
-                <a:latin typeface="Arial"/>
-                <a:ea typeface="Arial"/>
-                <a:cs typeface="Arial"/>
-                <a:sym typeface="Arial"/>
-              </a:rPr>
-              <a:t>Field Analyst </a:t>
-            </a:r>
-            <a:r>
-              <a:rPr b="0" i="0" lang="en-US" sz="1800" u="none">
-                <a:solidFill>
-                  <a:srgbClr val="000000"/>
-                </a:solidFill>
-                <a:latin typeface="Arial"/>
-                <a:ea typeface="Arial"/>
-                <a:cs typeface="Arial"/>
-                <a:sym typeface="Arial"/>
-              </a:rPr>
-              <a:t>I want to show the sensor ID for every alert, so that the source channel of the detection is explicit</a:t>
             </a:r>
             <a:endParaRPr b="0" i="0" sz="1800" u="none">
               <a:solidFill>
@@ -24585,10 +25450,191 @@
               </a:buClr>
               <a:buSzPts val="1800"/>
               <a:buFont typeface="Arial"/>
-              <a:buNone/>
+              <a:buChar char="•"/>
             </a:pPr>
             <a:r>
-              <a:t/>
+              <a:rPr b="1" i="0" lang="en-US" sz="1800" u="none">
+                <a:solidFill>
+                  <a:srgbClr val="000000"/>
+                </a:solidFill>
+                <a:latin typeface="Arial"/>
+                <a:ea typeface="Arial"/>
+                <a:cs typeface="Arial"/>
+                <a:sym typeface="Arial"/>
+              </a:rPr>
+              <a:t>US-09</a:t>
+            </a:r>
+            <a:r>
+              <a:rPr b="0" i="0" lang="en-US" sz="1800" u="none">
+                <a:solidFill>
+                  <a:srgbClr val="000000"/>
+                </a:solidFill>
+                <a:latin typeface="Arial"/>
+                <a:ea typeface="Arial"/>
+                <a:cs typeface="Arial"/>
+                <a:sym typeface="Arial"/>
+              </a:rPr>
+              <a:t>: As a </a:t>
+            </a:r>
+            <a:r>
+              <a:rPr b="1" i="0" lang="en-US" sz="1800" u="none">
+                <a:solidFill>
+                  <a:srgbClr val="000000"/>
+                </a:solidFill>
+                <a:latin typeface="Arial"/>
+                <a:ea typeface="Arial"/>
+                <a:cs typeface="Arial"/>
+                <a:sym typeface="Arial"/>
+              </a:rPr>
+              <a:t>Command-Center Op</a:t>
+            </a:r>
+            <a:r>
+              <a:rPr b="0" i="0" lang="en-US" sz="1800" u="none">
+                <a:solidFill>
+                  <a:srgbClr val="000000"/>
+                </a:solidFill>
+                <a:latin typeface="Arial"/>
+                <a:ea typeface="Arial"/>
+                <a:cs typeface="Arial"/>
+                <a:sym typeface="Arial"/>
+              </a:rPr>
+              <a:t>., I want a real-time dashboard to visualize recent events and system health.</a:t>
+            </a:r>
+            <a:endParaRPr/>
+          </a:p>
+          <a:p>
+            <a:pPr indent="0" lvl="0" marL="0" marR="0" rtl="0" algn="l">
+              <a:lnSpc>
+                <a:spcPct val="100000"/>
+              </a:lnSpc>
+              <a:spcBef>
+                <a:spcPts val="360"/>
+              </a:spcBef>
+              <a:spcAft>
+                <a:spcPts val="0"/>
+              </a:spcAft>
+              <a:buClr>
+                <a:srgbClr val="822433"/>
+              </a:buClr>
+              <a:buSzPts val="1800"/>
+              <a:buFont typeface="Arial"/>
+              <a:buChar char="•"/>
+            </a:pPr>
+            <a:r>
+              <a:rPr b="1" i="0" lang="en-US" sz="1800" u="none">
+                <a:solidFill>
+                  <a:srgbClr val="000000"/>
+                </a:solidFill>
+                <a:latin typeface="Arial"/>
+                <a:ea typeface="Arial"/>
+                <a:cs typeface="Arial"/>
+                <a:sym typeface="Arial"/>
+              </a:rPr>
+              <a:t>US-10</a:t>
+            </a:r>
+            <a:r>
+              <a:rPr b="0" i="0" lang="en-US" sz="1800" u="none">
+                <a:solidFill>
+                  <a:srgbClr val="000000"/>
+                </a:solidFill>
+                <a:latin typeface="Arial"/>
+                <a:ea typeface="Arial"/>
+                <a:cs typeface="Arial"/>
+                <a:sym typeface="Arial"/>
+              </a:rPr>
+              <a:t>: As </a:t>
+            </a:r>
+            <a:r>
+              <a:rPr b="1" i="0" lang="en-US" sz="1800" u="none">
+                <a:solidFill>
+                  <a:srgbClr val="000000"/>
+                </a:solidFill>
+                <a:latin typeface="Arial"/>
+                <a:ea typeface="Arial"/>
+                <a:cs typeface="Arial"/>
+                <a:sym typeface="Arial"/>
+              </a:rPr>
+              <a:t>a Strategic Researcher</a:t>
+            </a:r>
+            <a:r>
+              <a:rPr b="0" i="0" lang="en-US" sz="1800" u="none">
+                <a:solidFill>
+                  <a:srgbClr val="000000"/>
+                </a:solidFill>
+                <a:latin typeface="Arial"/>
+                <a:ea typeface="Arial"/>
+                <a:cs typeface="Arial"/>
+                <a:sym typeface="Arial"/>
+              </a:rPr>
+              <a:t>, I need historical log of persisted threats so that patterns in activity can be reviewed</a:t>
+            </a:r>
+            <a:endParaRPr/>
+          </a:p>
+          <a:p>
+            <a:pPr indent="0" lvl="0" marL="0" marR="0" rtl="0" algn="l">
+              <a:lnSpc>
+                <a:spcPct val="100000"/>
+              </a:lnSpc>
+              <a:spcBef>
+                <a:spcPts val="360"/>
+              </a:spcBef>
+              <a:spcAft>
+                <a:spcPts val="0"/>
+              </a:spcAft>
+              <a:buClr>
+                <a:srgbClr val="822433"/>
+              </a:buClr>
+              <a:buSzPts val="1800"/>
+              <a:buFont typeface="Arial"/>
+              <a:buChar char="•"/>
+            </a:pPr>
+            <a:r>
+              <a:rPr b="1" i="0" lang="en-US" sz="1800" u="none">
+                <a:solidFill>
+                  <a:srgbClr val="000000"/>
+                </a:solidFill>
+                <a:latin typeface="Arial"/>
+                <a:ea typeface="Arial"/>
+                <a:cs typeface="Arial"/>
+                <a:sym typeface="Arial"/>
+              </a:rPr>
+              <a:t>US-13</a:t>
+            </a:r>
+            <a:r>
+              <a:rPr b="0" i="0" lang="en-US" sz="1800" u="none">
+                <a:solidFill>
+                  <a:srgbClr val="000000"/>
+                </a:solidFill>
+                <a:latin typeface="Arial"/>
+                <a:ea typeface="Arial"/>
+                <a:cs typeface="Arial"/>
+                <a:sym typeface="Arial"/>
+              </a:rPr>
+              <a:t>: As a </a:t>
+            </a:r>
+            <a:r>
+              <a:rPr b="1" i="0" lang="en-US" sz="1800" u="none">
+                <a:solidFill>
+                  <a:srgbClr val="000000"/>
+                </a:solidFill>
+                <a:latin typeface="Arial"/>
+                <a:ea typeface="Arial"/>
+                <a:cs typeface="Arial"/>
+                <a:sym typeface="Arial"/>
+              </a:rPr>
+              <a:t>Field Analyst </a:t>
+            </a:r>
+            <a:r>
+              <a:rPr b="0" i="0" lang="en-US" sz="1800" u="none">
+                <a:solidFill>
+                  <a:srgbClr val="000000"/>
+                </a:solidFill>
+                <a:latin typeface="Arial"/>
+                <a:ea typeface="Arial"/>
+                <a:cs typeface="Arial"/>
+                <a:sym typeface="Arial"/>
+              </a:rPr>
+              <a:t>I want to show the sensor ID for every alert, so that the source channel of the detection is explicit</a:t>
             </a:r>
             <a:endParaRPr b="0" i="0" sz="1800" u="none">
               <a:solidFill>
@@ -24619,16 +25665,7 @@
               <a:buNone/>
             </a:pPr>
             <a:r>
-              <a:rPr b="0" i="0" lang="en-US" sz="1800" u="none">
-                <a:solidFill>
-                  <a:srgbClr val="000000"/>
-                </a:solidFill>
-                <a:latin typeface="Arial"/>
-                <a:ea typeface="Arial"/>
-                <a:cs typeface="Arial"/>
-                <a:sym typeface="Arial"/>
-              </a:rPr>
-              <a:t>Technical Implementation:.</a:t>
+              <a:t/>
             </a:r>
             <a:endParaRPr b="0" i="0" sz="1800" u="none">
               <a:solidFill>
@@ -24641,7 +25678,47 @@
             </a:endParaRPr>
           </a:p>
           <a:p>
-            <a:pPr indent="-114300" lvl="0" marL="0" marR="0" rtl="0" algn="l">
+            <a:pPr indent="0" lvl="0" marL="0" marR="0" rtl="0" algn="l">
+              <a:lnSpc>
+                <a:spcPct val="100000"/>
+              </a:lnSpc>
+              <a:spcBef>
+                <a:spcPts val="360"/>
+              </a:spcBef>
+              <a:spcAft>
+                <a:spcPts val="0"/>
+              </a:spcAft>
+              <a:buClr>
+                <a:srgbClr val="822433"/>
+              </a:buClr>
+              <a:buSzPts val="1800"/>
+              <a:buFont typeface="Arial"/>
+              <a:buNone/>
+            </a:pPr>
+            <a:r>
+              <a:rPr b="0" i="0" lang="en-US" sz="1800" u="none">
+                <a:solidFill>
+                  <a:srgbClr val="000000"/>
+                </a:solidFill>
+                <a:latin typeface="Arial"/>
+                <a:ea typeface="Arial"/>
+                <a:cs typeface="Arial"/>
+                <a:sym typeface="Arial"/>
+              </a:rPr>
+              <a:t>Technical Implementation:.</a:t>
+            </a:r>
+            <a:endParaRPr b="0" i="0" sz="1800" u="none">
+              <a:solidFill>
+                <a:srgbClr val="000000"/>
+              </a:solidFill>
+              <a:latin typeface="Arial"/>
+              <a:ea typeface="Arial"/>
+              <a:cs typeface="Arial"/>
+              <a:sym typeface="Arial"/>
+            </a:endParaRPr>
+          </a:p>
+          <a:p>
+            <a:pPr indent="0" lvl="0" marL="0" marR="0" rtl="0" algn="l">
               <a:lnSpc>
                 <a:spcPct val="100000"/>
               </a:lnSpc>
@@ -24673,7 +25750,7 @@
             <a:endParaRPr/>
           </a:p>
           <a:p>
-            <a:pPr indent="-114300" lvl="0" marL="0" marR="0" rtl="0" algn="l">
+            <a:pPr indent="0" lvl="0" marL="0" marR="0" rtl="0" algn="l">
               <a:lnSpc>
                 <a:spcPct val="100000"/>
               </a:lnSpc>
@@ -24705,7 +25782,7 @@
             <a:endParaRPr/>
           </a:p>
           <a:p>
-            <a:pPr indent="-114300" lvl="0" marL="0" marR="0" rtl="0" algn="l">
+            <a:pPr indent="0" lvl="0" marL="0" marR="0" rtl="0" algn="l">
               <a:lnSpc>
                 <a:spcPct val="100000"/>
               </a:lnSpc>
@@ -24769,6 +25846,9 @@
           </a:p>
           <a:p>
             <a:pPr indent="-228600" lvl="0" marL="342900" marR="0" rtl="0" algn="l">
+              <a:lnSpc>
+                <a:spcPct val="100000"/>
+              </a:lnSpc>
               <a:spcBef>
                 <a:spcPts val="360"/>
               </a:spcBef>
@@ -24840,7 +25920,7 @@
               <a:buNone/>
             </a:pPr>
             <a:r>
-              <a:rPr b="0" i="0" lang="en-US" sz="1100" u="none">
+              <a:rPr b="0" i="0" lang="en-US" sz="1100" u="none" cap="none" strike="noStrike">
                 <a:solidFill>
                   <a:schemeClr val="lt1"/>
                 </a:solidFill>
@@ -24851,7 +25931,15 @@
               </a:rPr>
               <a:t>*</a:t>
             </a:r>
-            <a:endParaRPr/>
+            <a:endParaRPr b="0" i="0" sz="1400" u="none" cap="none" strike="noStrike">
+              <a:solidFill>
+                <a:srgbClr val="000000"/>
+              </a:solidFill>
+              <a:latin typeface="Arial"/>
+              <a:ea typeface="Arial"/>
+              <a:cs typeface="Arial"/>
+              <a:sym typeface="Arial"/>
+            </a:endParaRPr>
           </a:p>
         </p:txBody>
       </p:sp>
@@ -24898,7 +25986,7 @@
               <a:buNone/>
             </a:pPr>
             <a:r>
-              <a:rPr b="0" i="0" lang="en-US" sz="1100" u="none">
+              <a:rPr b="0" i="0" lang="en-US" sz="1100" u="none" cap="none" strike="noStrike">
                 <a:solidFill>
                   <a:schemeClr val="lt1"/>
                 </a:solidFill>
@@ -24910,7 +25998,7 @@
               <a:t>Pagina </a:t>
             </a:r>
             <a:fld id="{00000000-1234-1234-1234-123412341234}" type="slidenum">
-              <a:rPr b="0" i="0" lang="en-US" sz="1100" u="none">
+              <a:rPr b="0" i="0" lang="en-US" sz="1100" u="none" cap="none" strike="noStrike">
                 <a:solidFill>
                   <a:schemeClr val="lt1"/>
                 </a:solidFill>
@@ -24921,7 +26009,15 @@
               </a:rPr>
               <a:t>‹#›</a:t>
             </a:fld>
-            <a:endParaRPr/>
+            <a:endParaRPr b="0" i="0" sz="1400" u="none" cap="none" strike="noStrike">
+              <a:solidFill>
+                <a:srgbClr val="000000"/>
+              </a:solidFill>
+              <a:latin typeface="Arial"/>
+              <a:ea typeface="Arial"/>
+              <a:cs typeface="Arial"/>
+              <a:sym typeface="Arial"/>
+            </a:endParaRPr>
           </a:p>
         </p:txBody>
       </p:sp>
@@ -25082,7 +26178,7 @@
               <a:buNone/>
             </a:pPr>
             <a:r>
-              <a:rPr b="0" i="0" lang="en-US" sz="1100" u="none">
+              <a:rPr b="0" i="0" lang="en-US" sz="1100" u="none" cap="none" strike="noStrike">
                 <a:solidFill>
                   <a:schemeClr val="lt1"/>
                 </a:solidFill>
@@ -25093,7 +26189,15 @@
               </a:rPr>
               <a:t>*</a:t>
             </a:r>
-            <a:endParaRPr/>
+            <a:endParaRPr b="0" i="0" sz="1400" u="none" cap="none" strike="noStrike">
+              <a:solidFill>
+                <a:srgbClr val="000000"/>
+              </a:solidFill>
+              <a:latin typeface="Arial"/>
+              <a:ea typeface="Arial"/>
+              <a:cs typeface="Arial"/>
+              <a:sym typeface="Arial"/>
+            </a:endParaRPr>
           </a:p>
         </p:txBody>
       </p:sp>
@@ -25140,7 +26244,7 @@
               <a:buNone/>
             </a:pPr>
             <a:r>
-              <a:rPr b="0" i="0" lang="en-US" sz="1100" u="none">
+              <a:rPr b="0" i="0" lang="en-US" sz="1100" u="none" cap="none" strike="noStrike">
                 <a:solidFill>
                   <a:schemeClr val="lt1"/>
                 </a:solidFill>
@@ -25152,7 +26256,7 @@
               <a:t>Pagina </a:t>
             </a:r>
             <a:fld id="{00000000-1234-1234-1234-123412341234}" type="slidenum">
-              <a:rPr b="0" i="0" lang="en-US" sz="1100" u="none">
+              <a:rPr b="0" i="0" lang="en-US" sz="1100" u="none" cap="none" strike="noStrike">
                 <a:solidFill>
                   <a:schemeClr val="lt1"/>
                 </a:solidFill>
@@ -25163,7 +26267,15 @@
               </a:rPr>
               <a:t>‹#›</a:t>
             </a:fld>
-            <a:endParaRPr/>
+            <a:endParaRPr b="0" i="0" sz="1400" u="none" cap="none" strike="noStrike">
+              <a:solidFill>
+                <a:srgbClr val="000000"/>
+              </a:solidFill>
+              <a:latin typeface="Arial"/>
+              <a:ea typeface="Arial"/>
+              <a:cs typeface="Arial"/>
+              <a:sym typeface="Arial"/>
+            </a:endParaRPr>
           </a:p>
         </p:txBody>
       </p:sp>
@@ -25770,6 +26882,9 @@
           </a:p>
           <a:p>
             <a:pPr indent="-228600" lvl="0" marL="342900" marR="0" rtl="0" algn="l">
+              <a:lnSpc>
+                <a:spcPct val="100000"/>
+              </a:lnSpc>
               <a:spcBef>
                 <a:spcPts val="360"/>
               </a:spcBef>
@@ -25841,7 +26956,7 @@
               <a:buNone/>
             </a:pPr>
             <a:r>
-              <a:rPr b="0" i="0" lang="en-US" sz="1100" u="none">
+              <a:rPr b="0" i="0" lang="en-US" sz="1100" u="none" cap="none" strike="noStrike">
                 <a:solidFill>
                   <a:schemeClr val="lt1"/>
                 </a:solidFill>
@@ -25852,7 +26967,15 @@
               </a:rPr>
               <a:t>*</a:t>
             </a:r>
-            <a:endParaRPr/>
+            <a:endParaRPr b="0" i="0" sz="1400" u="none" cap="none" strike="noStrike">
+              <a:solidFill>
+                <a:srgbClr val="000000"/>
+              </a:solidFill>
+              <a:latin typeface="Arial"/>
+              <a:ea typeface="Arial"/>
+              <a:cs typeface="Arial"/>
+              <a:sym typeface="Arial"/>
+            </a:endParaRPr>
           </a:p>
         </p:txBody>
       </p:sp>
@@ -25899,7 +27022,7 @@
               <a:buNone/>
             </a:pPr>
             <a:r>
-              <a:rPr b="0" i="0" lang="en-US" sz="1100" u="none">
+              <a:rPr b="0" i="0" lang="en-US" sz="1100" u="none" cap="none" strike="noStrike">
                 <a:solidFill>
                   <a:schemeClr val="lt1"/>
                 </a:solidFill>
@@ -25911,7 +27034,7 @@
               <a:t>Pagina </a:t>
             </a:r>
             <a:fld id="{00000000-1234-1234-1234-123412341234}" type="slidenum">
-              <a:rPr b="0" i="0" lang="en-US" sz="1100" u="none">
+              <a:rPr b="0" i="0" lang="en-US" sz="1100" u="none" cap="none" strike="noStrike">
                 <a:solidFill>
                   <a:schemeClr val="lt1"/>
                 </a:solidFill>
@@ -25922,7 +27045,15 @@
               </a:rPr>
               <a:t>‹#›</a:t>
             </a:fld>
-            <a:endParaRPr/>
+            <a:endParaRPr b="0" i="0" sz="1400" u="none" cap="none" strike="noStrike">
+              <a:solidFill>
+                <a:srgbClr val="000000"/>
+              </a:solidFill>
+              <a:latin typeface="Arial"/>
+              <a:ea typeface="Arial"/>
+              <a:cs typeface="Arial"/>
+              <a:sym typeface="Arial"/>
+            </a:endParaRPr>
           </a:p>
         </p:txBody>
       </p:sp>
@@ -25969,10 +27100,26 @@
               <a:buNone/>
             </a:pPr>
             <a:r>
-              <a:rPr b="1" lang="en-US" sz="1800"/>
+              <a:rPr b="1" i="0" lang="en-US" sz="1800" u="none" cap="none" strike="noStrike">
+                <a:solidFill>
+                  <a:srgbClr val="000000"/>
+                </a:solidFill>
+                <a:latin typeface="Arial"/>
+                <a:ea typeface="Arial"/>
+                <a:cs typeface="Arial"/>
+                <a:sym typeface="Arial"/>
+              </a:rPr>
               <a:t>Access the System</a:t>
             </a:r>
-            <a:endParaRPr/>
+            <a:endParaRPr b="0" i="0" sz="1400" u="none" cap="none" strike="noStrike">
+              <a:solidFill>
+                <a:srgbClr val="000000"/>
+              </a:solidFill>
+              <a:latin typeface="Arial"/>
+              <a:ea typeface="Arial"/>
+              <a:cs typeface="Arial"/>
+              <a:sym typeface="Arial"/>
+            </a:endParaRPr>
           </a:p>
           <a:p>
             <a:pPr indent="-342900" lvl="0" marL="457200" marR="0" rtl="0" algn="l">
@@ -25985,14 +27132,34 @@
               <a:spcAft>
                 <a:spcPts val="0"/>
               </a:spcAft>
+              <a:buClr>
+                <a:srgbClr val="000000"/>
+              </a:buClr>
               <a:buSzPts val="1800"/>
+              <a:buFont typeface="Arial"/>
               <a:buChar char="-"/>
             </a:pPr>
             <a:r>
-              <a:rPr lang="en-US" sz="1800"/>
+              <a:rPr b="0" i="0" lang="en-US" sz="1800" u="none" cap="none" strike="noStrike">
+                <a:solidFill>
+                  <a:srgbClr val="000000"/>
+                </a:solidFill>
+                <a:latin typeface="Arial"/>
+                <a:ea typeface="Arial"/>
+                <a:cs typeface="Arial"/>
+                <a:sym typeface="Arial"/>
+              </a:rPr>
               <a:t>dashboard: http://localhost:3000/docs</a:t>
             </a:r>
-            <a:endParaRPr/>
+            <a:endParaRPr b="0" i="0" sz="1400" u="none" cap="none" strike="noStrike">
+              <a:solidFill>
+                <a:srgbClr val="000000"/>
+              </a:solidFill>
+              <a:latin typeface="Arial"/>
+              <a:ea typeface="Arial"/>
+              <a:cs typeface="Arial"/>
+              <a:sym typeface="Arial"/>
+            </a:endParaRPr>
           </a:p>
           <a:p>
             <a:pPr indent="-336550" lvl="0" marL="457200" marR="0" rtl="0" algn="l">
@@ -26005,14 +27172,34 @@
               <a:spcAft>
                 <a:spcPts val="0"/>
               </a:spcAft>
+              <a:buClr>
+                <a:srgbClr val="000000"/>
+              </a:buClr>
               <a:buSzPts val="1700"/>
+              <a:buFont typeface="Arial"/>
               <a:buChar char="-"/>
             </a:pPr>
             <a:r>
-              <a:rPr lang="en-US" sz="1700"/>
+              <a:rPr b="0" i="0" lang="en-US" sz="1700" u="none" cap="none" strike="noStrike">
+                <a:solidFill>
+                  <a:srgbClr val="000000"/>
+                </a:solidFill>
+                <a:latin typeface="Arial"/>
+                <a:ea typeface="Arial"/>
+                <a:cs typeface="Arial"/>
+                <a:sym typeface="Arial"/>
+              </a:rPr>
               <a:t>Health Check: http://localhost:8090/health</a:t>
             </a:r>
-            <a:endParaRPr sz="1700"/>
+            <a:endParaRPr b="0" i="0" sz="1700" u="none" cap="none" strike="noStrike">
+              <a:solidFill>
+                <a:srgbClr val="000000"/>
+              </a:solidFill>
+              <a:latin typeface="Arial"/>
+              <a:ea typeface="Arial"/>
+              <a:cs typeface="Arial"/>
+              <a:sym typeface="Arial"/>
+            </a:endParaRPr>
           </a:p>
           <a:p>
             <a:pPr indent="0" lvl="0" marL="0" marR="0" rtl="0" algn="l">
@@ -26035,7 +27222,15 @@
             <a:r>
               <a:t/>
             </a:r>
-            <a:endParaRPr/>
+            <a:endParaRPr b="0" i="0" sz="1400" u="none" cap="none" strike="noStrike">
+              <a:solidFill>
+                <a:srgbClr val="000000"/>
+              </a:solidFill>
+              <a:latin typeface="Arial"/>
+              <a:ea typeface="Arial"/>
+              <a:cs typeface="Arial"/>
+              <a:sym typeface="Arial"/>
+            </a:endParaRPr>
           </a:p>
         </p:txBody>
       </p:sp>
@@ -26418,6 +27613,9 @@
           </a:p>
           <a:p>
             <a:pPr indent="-228600" lvl="0" marL="342900" marR="0" rtl="0" algn="l">
+              <a:lnSpc>
+                <a:spcPct val="100000"/>
+              </a:lnSpc>
               <a:spcBef>
                 <a:spcPts val="360"/>
               </a:spcBef>
@@ -26489,7 +27687,7 @@
               <a:buNone/>
             </a:pPr>
             <a:r>
-              <a:rPr b="0" i="0" lang="en-US" sz="1100" u="none">
+              <a:rPr b="0" i="0" lang="en-US" sz="1100" u="none" cap="none" strike="noStrike">
                 <a:solidFill>
                   <a:schemeClr val="lt1"/>
                 </a:solidFill>
@@ -26500,7 +27698,15 @@
               </a:rPr>
               <a:t>*</a:t>
             </a:r>
-            <a:endParaRPr/>
+            <a:endParaRPr b="0" i="0" sz="1400" u="none" cap="none" strike="noStrike">
+              <a:solidFill>
+                <a:srgbClr val="000000"/>
+              </a:solidFill>
+              <a:latin typeface="Arial"/>
+              <a:ea typeface="Arial"/>
+              <a:cs typeface="Arial"/>
+              <a:sym typeface="Arial"/>
+            </a:endParaRPr>
           </a:p>
         </p:txBody>
       </p:sp>
@@ -26547,7 +27753,7 @@
               <a:buNone/>
             </a:pPr>
             <a:r>
-              <a:rPr b="0" i="0" lang="en-US" sz="1100" u="none">
+              <a:rPr b="0" i="0" lang="en-US" sz="1100" u="none" cap="none" strike="noStrike">
                 <a:solidFill>
                   <a:schemeClr val="lt1"/>
                 </a:solidFill>
@@ -26559,7 +27765,7 @@
               <a:t>Pagina </a:t>
             </a:r>
             <a:fld id="{00000000-1234-1234-1234-123412341234}" type="slidenum">
-              <a:rPr b="0" i="0" lang="en-US" sz="1100" u="none">
+              <a:rPr b="0" i="0" lang="en-US" sz="1100" u="none" cap="none" strike="noStrike">
                 <a:solidFill>
                   <a:schemeClr val="lt1"/>
                 </a:solidFill>
@@ -26570,7 +27776,15 @@
               </a:rPr>
               <a:t>‹#›</a:t>
             </a:fld>
-            <a:endParaRPr/>
+            <a:endParaRPr b="0" i="0" sz="1400" u="none" cap="none" strike="noStrike">
+              <a:solidFill>
+                <a:srgbClr val="000000"/>
+              </a:solidFill>
+              <a:latin typeface="Arial"/>
+              <a:ea typeface="Arial"/>
+              <a:cs typeface="Arial"/>
+              <a:sym typeface="Arial"/>
+            </a:endParaRPr>
           </a:p>
         </p:txBody>
       </p:sp>
@@ -26941,6 +28155,9 @@
           </a:p>
           <a:p>
             <a:pPr indent="-228600" lvl="0" marL="342900" marR="0" rtl="0" algn="l">
+              <a:lnSpc>
+                <a:spcPct val="100000"/>
+              </a:lnSpc>
               <a:spcBef>
                 <a:spcPts val="360"/>
               </a:spcBef>
@@ -27012,7 +28229,7 @@
               <a:buNone/>
             </a:pPr>
             <a:r>
-              <a:rPr b="0" i="0" lang="en-US" sz="1100" u="none">
+              <a:rPr b="0" i="0" lang="en-US" sz="1100" u="none" cap="none" strike="noStrike">
                 <a:solidFill>
                   <a:schemeClr val="lt1"/>
                 </a:solidFill>
@@ -27023,7 +28240,15 @@
               </a:rPr>
               <a:t>*</a:t>
             </a:r>
-            <a:endParaRPr/>
+            <a:endParaRPr b="0" i="0" sz="1400" u="none" cap="none" strike="noStrike">
+              <a:solidFill>
+                <a:srgbClr val="000000"/>
+              </a:solidFill>
+              <a:latin typeface="Arial"/>
+              <a:ea typeface="Arial"/>
+              <a:cs typeface="Arial"/>
+              <a:sym typeface="Arial"/>
+            </a:endParaRPr>
           </a:p>
         </p:txBody>
       </p:sp>
@@ -27070,7 +28295,7 @@
               <a:buNone/>
             </a:pPr>
             <a:r>
-              <a:rPr b="0" i="0" lang="en-US" sz="1100" u="none">
+              <a:rPr b="0" i="0" lang="en-US" sz="1100" u="none" cap="none" strike="noStrike">
                 <a:solidFill>
                   <a:schemeClr val="lt1"/>
                 </a:solidFill>
@@ -27082,7 +28307,7 @@
               <a:t>Pagina </a:t>
             </a:r>
             <a:fld id="{00000000-1234-1234-1234-123412341234}" type="slidenum">
-              <a:rPr b="0" i="0" lang="en-US" sz="1100" u="none">
+              <a:rPr b="0" i="0" lang="en-US" sz="1100" u="none" cap="none" strike="noStrike">
                 <a:solidFill>
                   <a:schemeClr val="lt1"/>
                 </a:solidFill>
@@ -27093,7 +28318,15 @@
               </a:rPr>
               <a:t>‹#›</a:t>
             </a:fld>
-            <a:endParaRPr/>
+            <a:endParaRPr b="0" i="0" sz="1400" u="none" cap="none" strike="noStrike">
+              <a:solidFill>
+                <a:srgbClr val="000000"/>
+              </a:solidFill>
+              <a:latin typeface="Arial"/>
+              <a:ea typeface="Arial"/>
+              <a:cs typeface="Arial"/>
+              <a:sym typeface="Arial"/>
+            </a:endParaRPr>
           </a:p>
         </p:txBody>
       </p:sp>
@@ -27272,7 +28505,7 @@
             </a:endParaRPr>
           </a:p>
           <a:p>
-            <a:pPr indent="-114300" lvl="0" marL="0" marR="0" rtl="0" algn="l">
+            <a:pPr indent="0" lvl="0" marL="0" marR="0" rtl="0" algn="l">
               <a:lnSpc>
                 <a:spcPct val="100000"/>
               </a:lnSpc>
@@ -27316,7 +28549,7 @@
             <a:endParaRPr/>
           </a:p>
           <a:p>
-            <a:pPr indent="-114300" lvl="0" marL="0" marR="0" rtl="0" algn="l">
+            <a:pPr indent="0" lvl="0" marL="0" marR="0" rtl="0" algn="l">
               <a:lnSpc>
                 <a:spcPct val="100000"/>
               </a:lnSpc>
@@ -27360,7 +28593,7 @@
             <a:endParaRPr/>
           </a:p>
           <a:p>
-            <a:pPr indent="-114300" lvl="0" marL="0" marR="0" rtl="0" algn="l">
+            <a:pPr indent="0" lvl="0" marL="0" marR="0" rtl="0" algn="l">
               <a:lnSpc>
                 <a:spcPct val="100000"/>
               </a:lnSpc>
@@ -27511,7 +28744,7 @@
               <a:buNone/>
             </a:pPr>
             <a:r>
-              <a:rPr b="0" i="0" lang="en-US" sz="1100" u="none">
+              <a:rPr b="0" i="0" lang="en-US" sz="1100" u="none" cap="none" strike="noStrike">
                 <a:solidFill>
                   <a:schemeClr val="lt1"/>
                 </a:solidFill>
@@ -27522,7 +28755,15 @@
               </a:rPr>
               <a:t>*</a:t>
             </a:r>
-            <a:endParaRPr/>
+            <a:endParaRPr b="0" i="0" sz="1400" u="none" cap="none" strike="noStrike">
+              <a:solidFill>
+                <a:srgbClr val="000000"/>
+              </a:solidFill>
+              <a:latin typeface="Arial"/>
+              <a:ea typeface="Arial"/>
+              <a:cs typeface="Arial"/>
+              <a:sym typeface="Arial"/>
+            </a:endParaRPr>
           </a:p>
         </p:txBody>
       </p:sp>
@@ -27569,7 +28810,7 @@
               <a:buNone/>
             </a:pPr>
             <a:r>
-              <a:rPr b="0" i="0" lang="en-US" sz="1100" u="none">
+              <a:rPr b="0" i="0" lang="en-US" sz="1100" u="none" cap="none" strike="noStrike">
                 <a:solidFill>
                   <a:schemeClr val="lt1"/>
                 </a:solidFill>
@@ -27581,7 +28822,7 @@
               <a:t>Pagina </a:t>
             </a:r>
             <a:fld id="{00000000-1234-1234-1234-123412341234}" type="slidenum">
-              <a:rPr b="0" i="0" lang="en-US" sz="1100" u="none">
+              <a:rPr b="0" i="0" lang="en-US" sz="1100" u="none" cap="none" strike="noStrike">
                 <a:solidFill>
                   <a:schemeClr val="lt1"/>
                 </a:solidFill>
@@ -27592,7 +28833,15 @@
               </a:rPr>
               <a:t>‹#›</a:t>
             </a:fld>
-            <a:endParaRPr/>
+            <a:endParaRPr b="0" i="0" sz="1400" u="none" cap="none" strike="noStrike">
+              <a:solidFill>
+                <a:srgbClr val="000000"/>
+              </a:solidFill>
+              <a:latin typeface="Arial"/>
+              <a:ea typeface="Arial"/>
+              <a:cs typeface="Arial"/>
+              <a:sym typeface="Arial"/>
+            </a:endParaRPr>
           </a:p>
         </p:txBody>
       </p:sp>
@@ -27724,7 +28973,7 @@
               <a:buNone/>
             </a:pPr>
             <a:r>
-              <a:rPr b="0" i="0" lang="en-US" sz="1100" u="none">
+              <a:rPr b="0" i="0" lang="en-US" sz="1100" u="none" cap="none" strike="noStrike">
                 <a:solidFill>
                   <a:schemeClr val="lt1"/>
                 </a:solidFill>
@@ -27735,7 +28984,15 @@
               </a:rPr>
               <a:t>*</a:t>
             </a:r>
-            <a:endParaRPr/>
+            <a:endParaRPr b="0" i="0" sz="1400" u="none" cap="none" strike="noStrike">
+              <a:solidFill>
+                <a:srgbClr val="000000"/>
+              </a:solidFill>
+              <a:latin typeface="Arial"/>
+              <a:ea typeface="Arial"/>
+              <a:cs typeface="Arial"/>
+              <a:sym typeface="Arial"/>
+            </a:endParaRPr>
           </a:p>
         </p:txBody>
       </p:sp>
@@ -27782,7 +29039,7 @@
               <a:buNone/>
             </a:pPr>
             <a:r>
-              <a:rPr b="0" i="0" lang="en-US" sz="1100" u="none">
+              <a:rPr b="0" i="0" lang="en-US" sz="1100" u="none" cap="none" strike="noStrike">
                 <a:solidFill>
                   <a:schemeClr val="lt1"/>
                 </a:solidFill>
@@ -27794,7 +29051,7 @@
               <a:t>Pagina </a:t>
             </a:r>
             <a:fld id="{00000000-1234-1234-1234-123412341234}" type="slidenum">
-              <a:rPr b="0" i="0" lang="en-US" sz="1100" u="none">
+              <a:rPr b="0" i="0" lang="en-US" sz="1100" u="none" cap="none" strike="noStrike">
                 <a:solidFill>
                   <a:schemeClr val="lt1"/>
                 </a:solidFill>
@@ -27805,7 +29062,15 @@
               </a:rPr>
               <a:t>‹#›</a:t>
             </a:fld>
-            <a:endParaRPr/>
+            <a:endParaRPr b="0" i="0" sz="1400" u="none" cap="none" strike="noStrike">
+              <a:solidFill>
+                <a:srgbClr val="000000"/>
+              </a:solidFill>
+              <a:latin typeface="Arial"/>
+              <a:ea typeface="Arial"/>
+              <a:cs typeface="Arial"/>
+              <a:sym typeface="Arial"/>
+            </a:endParaRPr>
           </a:p>
         </p:txBody>
       </p:sp>
@@ -27844,12 +29109,17 @@
               <a:spcAft>
                 <a:spcPts val="0"/>
               </a:spcAft>
+              <a:buClr>
+                <a:srgbClr val="000000"/>
+              </a:buClr>
+              <a:buSzPts val="900"/>
+              <a:buFont typeface="Arial"/>
               <a:buNone/>
             </a:pPr>
             <a:r>
               <a:t/>
             </a:r>
-            <a:endParaRPr b="0" i="0" sz="900" u="none">
+            <a:endParaRPr b="0" i="0" sz="900" u="none" cap="none" strike="noStrike">
               <a:solidFill>
                 <a:schemeClr val="lt1"/>
               </a:solidFill>
@@ -27896,12 +29166,17 @@
               <a:spcAft>
                 <a:spcPts val="0"/>
               </a:spcAft>
+              <a:buClr>
+                <a:srgbClr val="000000"/>
+              </a:buClr>
+              <a:buSzPts val="900"/>
+              <a:buFont typeface="Arial"/>
               <a:buNone/>
             </a:pPr>
             <a:r>
               <a:t/>
             </a:r>
-            <a:endParaRPr b="0" i="0" sz="900" u="none">
+            <a:endParaRPr b="0" i="0" sz="900" u="none" cap="none" strike="noStrike">
               <a:solidFill>
                 <a:schemeClr val="lt1"/>
               </a:solidFill>
@@ -27948,12 +29223,17 @@
               <a:spcAft>
                 <a:spcPts val="0"/>
               </a:spcAft>
+              <a:buClr>
+                <a:srgbClr val="000000"/>
+              </a:buClr>
+              <a:buSzPts val="900"/>
+              <a:buFont typeface="Arial"/>
               <a:buNone/>
             </a:pPr>
             <a:r>
               <a:t/>
             </a:r>
-            <a:endParaRPr b="0" i="0" sz="900" u="none">
+            <a:endParaRPr b="0" i="0" sz="900" u="none" cap="none" strike="noStrike">
               <a:solidFill>
                 <a:schemeClr val="lt1"/>
               </a:solidFill>
@@ -28000,12 +29280,17 @@
               <a:spcAft>
                 <a:spcPts val="0"/>
               </a:spcAft>
+              <a:buClr>
+                <a:srgbClr val="000000"/>
+              </a:buClr>
+              <a:buSzPts val="900"/>
+              <a:buFont typeface="Arial"/>
               <a:buNone/>
             </a:pPr>
             <a:r>
               <a:t/>
             </a:r>
-            <a:endParaRPr b="0" i="0" sz="900" u="none">
+            <a:endParaRPr b="0" i="0" sz="900" u="none" cap="none" strike="noStrike">
               <a:solidFill>
                 <a:schemeClr val="lt1"/>
               </a:solidFill>
@@ -28060,12 +29345,17 @@
               <a:spcAft>
                 <a:spcPts val="0"/>
               </a:spcAft>
+              <a:buClr>
+                <a:srgbClr val="000000"/>
+              </a:buClr>
+              <a:buSzPts val="900"/>
+              <a:buFont typeface="Arial"/>
               <a:buNone/>
             </a:pPr>
             <a:r>
               <a:t/>
             </a:r>
-            <a:endParaRPr b="0" i="0" sz="900" u="none">
+            <a:endParaRPr b="0" i="0" sz="900" u="none" cap="none" strike="noStrike">
               <a:solidFill>
                 <a:schemeClr val="lt1"/>
               </a:solidFill>
@@ -28112,12 +29402,17 @@
               <a:spcAft>
                 <a:spcPts val="0"/>
               </a:spcAft>
+              <a:buClr>
+                <a:srgbClr val="000000"/>
+              </a:buClr>
+              <a:buSzPts val="900"/>
+              <a:buFont typeface="Arial"/>
               <a:buNone/>
             </a:pPr>
             <a:r>
               <a:t/>
             </a:r>
-            <a:endParaRPr b="0" i="0" sz="900" u="none">
+            <a:endParaRPr b="0" i="0" sz="900" u="none" cap="none" strike="noStrike">
               <a:solidFill>
                 <a:schemeClr val="lt1"/>
               </a:solidFill>
@@ -28733,7 +30028,7 @@
               <a:buNone/>
             </a:pPr>
             <a:r>
-              <a:rPr b="0" i="0" lang="en-US" sz="1100" u="none">
+              <a:rPr b="0" i="0" lang="en-US" sz="1100" u="none" cap="none" strike="noStrike">
                 <a:solidFill>
                   <a:schemeClr val="lt1"/>
                 </a:solidFill>
@@ -28744,7 +30039,15 @@
               </a:rPr>
               <a:t>*</a:t>
             </a:r>
-            <a:endParaRPr/>
+            <a:endParaRPr b="0" i="0" sz="1400" u="none" cap="none" strike="noStrike">
+              <a:solidFill>
+                <a:srgbClr val="000000"/>
+              </a:solidFill>
+              <a:latin typeface="Arial"/>
+              <a:ea typeface="Arial"/>
+              <a:cs typeface="Arial"/>
+              <a:sym typeface="Arial"/>
+            </a:endParaRPr>
           </a:p>
         </p:txBody>
       </p:sp>
@@ -28791,7 +30094,7 @@
               <a:buNone/>
             </a:pPr>
             <a:r>
-              <a:rPr b="0" i="0" lang="en-US" sz="1100" u="none">
+              <a:rPr b="0" i="0" lang="en-US" sz="1100" u="none" cap="none" strike="noStrike">
                 <a:solidFill>
                   <a:schemeClr val="lt1"/>
                 </a:solidFill>
@@ -28803,7 +30106,7 @@
               <a:t>Pagina </a:t>
             </a:r>
             <a:fld id="{00000000-1234-1234-1234-123412341234}" type="slidenum">
-              <a:rPr b="0" i="0" lang="en-US" sz="1100" u="none">
+              <a:rPr b="0" i="0" lang="en-US" sz="1100" u="none" cap="none" strike="noStrike">
                 <a:solidFill>
                   <a:schemeClr val="lt1"/>
                 </a:solidFill>
@@ -28814,7 +30117,15 @@
               </a:rPr>
               <a:t>‹#›</a:t>
             </a:fld>
-            <a:endParaRPr/>
+            <a:endParaRPr b="0" i="0" sz="1400" u="none" cap="none" strike="noStrike">
+              <a:solidFill>
+                <a:srgbClr val="000000"/>
+              </a:solidFill>
+              <a:latin typeface="Arial"/>
+              <a:ea typeface="Arial"/>
+              <a:cs typeface="Arial"/>
+              <a:sym typeface="Arial"/>
+            </a:endParaRPr>
           </a:p>
         </p:txBody>
       </p:sp>
@@ -29304,6 +30615,9 @@
           </a:p>
           <a:p>
             <a:pPr indent="-228600" lvl="0" marL="342900" marR="0" rtl="0" algn="l">
+              <a:lnSpc>
+                <a:spcPct val="100000"/>
+              </a:lnSpc>
               <a:spcBef>
                 <a:spcPts val="360"/>
               </a:spcBef>
@@ -29375,7 +30689,7 @@
               <a:buNone/>
             </a:pPr>
             <a:r>
-              <a:rPr b="0" i="0" lang="en-US" sz="1100" u="none">
+              <a:rPr b="0" i="0" lang="en-US" sz="1100" u="none" cap="none" strike="noStrike">
                 <a:solidFill>
                   <a:schemeClr val="lt1"/>
                 </a:solidFill>
@@ -29386,7 +30700,15 @@
               </a:rPr>
               <a:t>*</a:t>
             </a:r>
-            <a:endParaRPr/>
+            <a:endParaRPr b="0" i="0" sz="1400" u="none" cap="none" strike="noStrike">
+              <a:solidFill>
+                <a:srgbClr val="000000"/>
+              </a:solidFill>
+              <a:latin typeface="Arial"/>
+              <a:ea typeface="Arial"/>
+              <a:cs typeface="Arial"/>
+              <a:sym typeface="Arial"/>
+            </a:endParaRPr>
           </a:p>
         </p:txBody>
       </p:sp>
@@ -29433,7 +30755,7 @@
               <a:buNone/>
             </a:pPr>
             <a:r>
-              <a:rPr b="0" i="0" lang="en-US" sz="1100" u="none">
+              <a:rPr b="0" i="0" lang="en-US" sz="1100" u="none" cap="none" strike="noStrike">
                 <a:solidFill>
                   <a:schemeClr val="lt1"/>
                 </a:solidFill>
@@ -29445,7 +30767,7 @@
               <a:t>Pagina </a:t>
             </a:r>
             <a:fld id="{00000000-1234-1234-1234-123412341234}" type="slidenum">
-              <a:rPr b="0" i="0" lang="en-US" sz="1100" u="none">
+              <a:rPr b="0" i="0" lang="en-US" sz="1100" u="none" cap="none" strike="noStrike">
                 <a:solidFill>
                   <a:schemeClr val="lt1"/>
                 </a:solidFill>
@@ -29456,7 +30778,15 @@
               </a:rPr>
               <a:t>‹#›</a:t>
             </a:fld>
-            <a:endParaRPr/>
+            <a:endParaRPr b="0" i="0" sz="1400" u="none" cap="none" strike="noStrike">
+              <a:solidFill>
+                <a:srgbClr val="000000"/>
+              </a:solidFill>
+              <a:latin typeface="Arial"/>
+              <a:ea typeface="Arial"/>
+              <a:cs typeface="Arial"/>
+              <a:sym typeface="Arial"/>
+            </a:endParaRPr>
           </a:p>
         </p:txBody>
       </p:sp>
@@ -29915,7 +31245,7 @@
               <a:buNone/>
             </a:pPr>
             <a:r>
-              <a:rPr b="0" i="0" lang="en-US" sz="1100" u="none">
+              <a:rPr b="0" i="0" lang="en-US" sz="1100" u="none" cap="none" strike="noStrike">
                 <a:solidFill>
                   <a:schemeClr val="lt1"/>
                 </a:solidFill>
@@ -29926,7 +31256,15 @@
               </a:rPr>
               <a:t>*</a:t>
             </a:r>
-            <a:endParaRPr/>
+            <a:endParaRPr b="0" i="0" sz="1400" u="none" cap="none" strike="noStrike">
+              <a:solidFill>
+                <a:srgbClr val="000000"/>
+              </a:solidFill>
+              <a:latin typeface="Arial"/>
+              <a:ea typeface="Arial"/>
+              <a:cs typeface="Arial"/>
+              <a:sym typeface="Arial"/>
+            </a:endParaRPr>
           </a:p>
         </p:txBody>
       </p:sp>
@@ -29973,7 +31311,7 @@
               <a:buNone/>
             </a:pPr>
             <a:r>
-              <a:rPr b="0" i="0" lang="en-US" sz="1100" u="none">
+              <a:rPr b="0" i="0" lang="en-US" sz="1100" u="none" cap="none" strike="noStrike">
                 <a:solidFill>
                   <a:schemeClr val="lt1"/>
                 </a:solidFill>
@@ -29985,7 +31323,7 @@
               <a:t>Pagina </a:t>
             </a:r>
             <a:fld id="{00000000-1234-1234-1234-123412341234}" type="slidenum">
-              <a:rPr b="0" i="0" lang="en-US" sz="1100" u="none">
+              <a:rPr b="0" i="0" lang="en-US" sz="1100" u="none" cap="none" strike="noStrike">
                 <a:solidFill>
                   <a:schemeClr val="lt1"/>
                 </a:solidFill>
@@ -29996,7 +31334,15 @@
               </a:rPr>
               <a:t>‹#›</a:t>
             </a:fld>
-            <a:endParaRPr/>
+            <a:endParaRPr b="0" i="0" sz="1400" u="none" cap="none" strike="noStrike">
+              <a:solidFill>
+                <a:srgbClr val="000000"/>
+              </a:solidFill>
+              <a:latin typeface="Arial"/>
+              <a:ea typeface="Arial"/>
+              <a:cs typeface="Arial"/>
+              <a:sym typeface="Arial"/>
+            </a:endParaRPr>
           </a:p>
         </p:txBody>
       </p:sp>
@@ -30015,7 +31361,7 @@
             <a:tbl>
               <a:tblPr>
                 <a:noFill/>
-                <a:tableStyleId>{C89E96B9-E6FD-405F-88AF-581302894B77}</a:tableStyleId>
+                <a:tableStyleId>{E89CBEA0-76B1-44CC-8DB1-BEED4A2828AC}</a:tableStyleId>
               </a:tblPr>
               <a:tblGrid>
                 <a:gridCol w="2971800"/>
@@ -30056,7 +31402,7 @@
                         </a:rPr>
                         <a:t>Frequency Range</a:t>
                       </a:r>
-                      <a:endParaRPr/>
+                      <a:endParaRPr sz="1400" u="none" cap="none" strike="noStrike"/>
                     </a:p>
                   </a:txBody>
                   <a:tcPr marT="45700" marB="45700" marR="91450" marL="91450">
@@ -30135,7 +31481,7 @@
                         </a:rPr>
                         <a:t>Event Type</a:t>
                       </a:r>
-                      <a:endParaRPr/>
+                      <a:endParaRPr sz="1400" u="none" cap="none" strike="noStrike"/>
                     </a:p>
                   </a:txBody>
                   <a:tcPr marT="45700" marB="45700" marR="91450" marL="91450">
@@ -30216,7 +31562,7 @@
                         </a:rPr>
                         <a:t>0.5–3 Hz</a:t>
                       </a:r>
-                      <a:endParaRPr/>
+                      <a:endParaRPr sz="1400" u="none" cap="none" strike="noStrike"/>
                     </a:p>
                   </a:txBody>
                   <a:tcPr marT="45700" marB="45700" marR="91450" marL="91450">
@@ -30295,7 +31641,7 @@
                         </a:rPr>
                         <a:t>Earthquake</a:t>
                       </a:r>
-                      <a:endParaRPr/>
+                      <a:endParaRPr sz="1400" u="none" cap="none" strike="noStrike"/>
                     </a:p>
                   </a:txBody>
                   <a:tcPr marT="45700" marB="45700" marR="91450" marL="91450">
@@ -30376,7 +31722,7 @@
                         </a:rPr>
                         <a:t>3–8 Hz</a:t>
                       </a:r>
-                      <a:endParaRPr/>
+                      <a:endParaRPr sz="1400" u="none" cap="none" strike="noStrike"/>
                     </a:p>
                   </a:txBody>
                   <a:tcPr marT="45700" marB="45700" marR="91450" marL="91450">
@@ -30455,7 +31801,7 @@
                         </a:rPr>
                         <a:t>Explosion</a:t>
                       </a:r>
-                      <a:endParaRPr/>
+                      <a:endParaRPr sz="1400" u="none" cap="none" strike="noStrike"/>
                     </a:p>
                   </a:txBody>
                   <a:tcPr marT="45700" marB="45700" marR="91450" marL="91450">
@@ -30536,7 +31882,7 @@
                         </a:rPr>
                         <a:t>≥8 Hz</a:t>
                       </a:r>
-                      <a:endParaRPr/>
+                      <a:endParaRPr sz="1400" u="none" cap="none" strike="noStrike"/>
                     </a:p>
                   </a:txBody>
                   <a:tcPr marT="45700" marB="45700" marR="91450" marL="91450">
@@ -30615,7 +31961,7 @@
                         </a:rPr>
                         <a:t>Nuclear</a:t>
                       </a:r>
-                      <a:endParaRPr/>
+                      <a:endParaRPr sz="1400" u="none" cap="none" strike="noStrike"/>
                     </a:p>
                   </a:txBody>
                   <a:tcPr marT="45700" marB="45700" marR="91450" marL="91450">
@@ -31124,6 +32470,9 @@
           </a:p>
           <a:p>
             <a:pPr indent="-228600" lvl="0" marL="342900" marR="0" rtl="0" algn="l">
+              <a:lnSpc>
+                <a:spcPct val="100000"/>
+              </a:lnSpc>
               <a:spcBef>
                 <a:spcPts val="360"/>
               </a:spcBef>
@@ -31195,7 +32544,7 @@
               <a:buNone/>
             </a:pPr>
             <a:r>
-              <a:rPr b="0" i="0" lang="en-US" sz="1100" u="none">
+              <a:rPr b="0" i="0" lang="en-US" sz="1100" u="none" cap="none" strike="noStrike">
                 <a:solidFill>
                   <a:schemeClr val="lt1"/>
                 </a:solidFill>
@@ -31206,7 +32555,15 @@
               </a:rPr>
               <a:t>*</a:t>
             </a:r>
-            <a:endParaRPr/>
+            <a:endParaRPr b="0" i="0" sz="1400" u="none" cap="none" strike="noStrike">
+              <a:solidFill>
+                <a:srgbClr val="000000"/>
+              </a:solidFill>
+              <a:latin typeface="Arial"/>
+              <a:ea typeface="Arial"/>
+              <a:cs typeface="Arial"/>
+              <a:sym typeface="Arial"/>
+            </a:endParaRPr>
           </a:p>
         </p:txBody>
       </p:sp>
@@ -31253,7 +32610,7 @@
               <a:buNone/>
             </a:pPr>
             <a:r>
-              <a:rPr b="0" i="0" lang="en-US" sz="1100" u="none">
+              <a:rPr b="0" i="0" lang="en-US" sz="1100" u="none" cap="none" strike="noStrike">
                 <a:solidFill>
                   <a:schemeClr val="lt1"/>
                 </a:solidFill>
@@ -31265,7 +32622,7 @@
               <a:t>Pagina </a:t>
             </a:r>
             <a:fld id="{00000000-1234-1234-1234-123412341234}" type="slidenum">
-              <a:rPr b="0" i="0" lang="en-US" sz="1100" u="none">
+              <a:rPr b="0" i="0" lang="en-US" sz="1100" u="none" cap="none" strike="noStrike">
                 <a:solidFill>
                   <a:schemeClr val="lt1"/>
                 </a:solidFill>
@@ -31276,7 +32633,15 @@
               </a:rPr>
               <a:t>‹#›</a:t>
             </a:fld>
-            <a:endParaRPr/>
+            <a:endParaRPr b="0" i="0" sz="1400" u="none" cap="none" strike="noStrike">
+              <a:solidFill>
+                <a:srgbClr val="000000"/>
+              </a:solidFill>
+              <a:latin typeface="Arial"/>
+              <a:ea typeface="Arial"/>
+              <a:cs typeface="Arial"/>
+              <a:sym typeface="Arial"/>
+            </a:endParaRPr>
           </a:p>
         </p:txBody>
       </p:sp>
@@ -31289,6 +32654,285 @@
 </file>
 
 <file path=ppt/theme/theme1.xml><?xml version="1.0" encoding="utf-8"?>
+<a:theme xmlns:a="http://schemas.openxmlformats.org/drawingml/2006/main" xmlns:r="http://schemas.openxmlformats.org/officeDocument/2006/relationships" name="la sapienza">
+  <a:themeElements>
+    <a:clrScheme name="">
+      <a:dk1>
+        <a:srgbClr val="822433"/>
+      </a:dk1>
+      <a:lt1>
+        <a:srgbClr val="FFFFFF"/>
+      </a:lt1>
+      <a:dk2>
+        <a:srgbClr val="822433"/>
+      </a:dk2>
+      <a:lt2>
+        <a:srgbClr val="808080"/>
+      </a:lt2>
+      <a:accent1>
+        <a:srgbClr val="BBE0E3"/>
+      </a:accent1>
+      <a:accent2>
+        <a:srgbClr val="FFFF00"/>
+      </a:accent2>
+      <a:accent3>
+        <a:srgbClr val="FFFFFF"/>
+      </a:accent3>
+      <a:accent4>
+        <a:srgbClr val="6E1D2A"/>
+      </a:accent4>
+      <a:accent5>
+        <a:srgbClr val="DAEDEF"/>
+      </a:accent5>
+      <a:accent6>
+        <a:srgbClr val="E7E700"/>
+      </a:accent6>
+      <a:hlink>
+        <a:srgbClr val="0000FF"/>
+      </a:hlink>
+      <a:folHlink>
+        <a:srgbClr val="FF0000"/>
+      </a:folHlink>
+    </a:clrScheme>
+    <a:fontScheme name="Office">
+      <a:majorFont>
+        <a:latin typeface="Arial"/>
+        <a:ea typeface=""/>
+        <a:cs typeface=""/>
+        <a:font script="Jpan" typeface="ＭＳ Ｐゴシック"/>
+        <a:font script="Hang" typeface="맑은 고딕"/>
+        <a:font script="Hans" typeface="宋体"/>
+        <a:font script="Hant" typeface="新細明體"/>
+        <a:font script="Arab" typeface="Times New Roman"/>
+        <a:font script="Hebr" typeface="Times New Roman"/>
+        <a:font script="Thai" typeface="Angsana New"/>
+        <a:font script="Ethi" typeface="Nyala"/>
+        <a:font script="Beng" typeface="Vrinda"/>
+        <a:font script="Gujr" typeface="Shruti"/>
+        <a:font script="Khmr" typeface="MoolBoran"/>
+        <a:font script="Knda" typeface="Tunga"/>
+        <a:font script="Guru" typeface="Raavi"/>
+        <a:font script="Cans" typeface="Euphemia"/>
+        <a:font script="Cher" typeface="Plantagenet Cherokee"/>
+        <a:font script="Yiii" typeface="Microsoft Yi Baiti"/>
+        <a:font script="Tibt" typeface="Microsoft Himalaya"/>
+        <a:font script="Thaa" typeface="MV Boli"/>
+        <a:font script="Deva" typeface="Mangal"/>
+        <a:font script="Telu" typeface="Gautami"/>
+        <a:font script="Taml" typeface="Latha"/>
+        <a:font script="Syrc" typeface="Estrangelo Edessa"/>
+        <a:font script="Orya" typeface="Kalinga"/>
+        <a:font script="Mlym" typeface="Kartika"/>
+        <a:font script="Laoo" typeface="DokChampa"/>
+        <a:font script="Sinh" typeface="Iskoola Pota"/>
+        <a:font script="Mong" typeface="Mongolian Baiti"/>
+        <a:font script="Viet" typeface="Times New Roman"/>
+        <a:font script="Uigh" typeface="Microsoft Uighur"/>
+        <a:font script="Geor" typeface="Sylfaen"/>
+      </a:majorFont>
+      <a:minorFont>
+        <a:latin typeface="Arial"/>
+        <a:ea typeface=""/>
+        <a:cs typeface=""/>
+        <a:font script="Jpan" typeface="ＭＳ Ｐゴシック"/>
+        <a:font script="Hang" typeface="맑은 고딕"/>
+        <a:font script="Hans" typeface="宋体"/>
+        <a:font script="Hant" typeface="新細明體"/>
+        <a:font script="Arab" typeface="Arial"/>
+        <a:font script="Hebr" typeface="Arial"/>
+        <a:font script="Thai" typeface="Cordia New"/>
+        <a:font script="Ethi" typeface="Nyala"/>
+        <a:font script="Beng" typeface="Vrinda"/>
+        <a:font script="Gujr" typeface="Shruti"/>
+        <a:font script="Khmr" typeface="DaunPenh"/>
+        <a:font script="Knda" typeface="Tunga"/>
+        <a:font script="Guru" typeface="Raavi"/>
+        <a:font script="Cans" typeface="Euphemia"/>
+        <a:font script="Cher" typeface="Plantagenet Cherokee"/>
+        <a:font script="Yiii" typeface="Microsoft Yi Baiti"/>
+        <a:font script="Tibt" typeface="Microsoft Himalaya"/>
+        <a:font script="Thaa" typeface="MV Boli"/>
+        <a:font script="Deva" typeface="Mangal"/>
+        <a:font script="Telu" typeface="Gautami"/>
+        <a:font script="Taml" typeface="Latha"/>
+        <a:font script="Syrc" typeface="Estrangelo Edessa"/>
+        <a:font script="Orya" typeface="Kalinga"/>
+        <a:font script="Mlym" typeface="Kartika"/>
+        <a:font script="Laoo" typeface="DokChampa"/>
+        <a:font script="Sinh" typeface="Iskoola Pota"/>
+        <a:font script="Mong" typeface="Mongolian Baiti"/>
+        <a:font script="Viet" typeface="Arial"/>
+        <a:font script="Uigh" typeface="Microsoft Uighur"/>
+        <a:font script="Geor" typeface="Sylfaen"/>
+      </a:minorFont>
+    </a:fontScheme>
+    <a:fmtScheme name="Office">
+      <a:fillStyleLst>
+        <a:solidFill>
+          <a:schemeClr val="phClr"/>
+        </a:solidFill>
+        <a:gradFill rotWithShape="1">
+          <a:gsLst>
+            <a:gs pos="0">
+              <a:schemeClr val="phClr">
+                <a:tint val="50000"/>
+                <a:satMod val="300000"/>
+              </a:schemeClr>
+            </a:gs>
+            <a:gs pos="35000">
+              <a:schemeClr val="phClr">
+                <a:tint val="37000"/>
+                <a:satMod val="300000"/>
+              </a:schemeClr>
+            </a:gs>
+            <a:gs pos="100000">
+              <a:schemeClr val="phClr">
+                <a:tint val="15000"/>
+                <a:satMod val="350000"/>
+              </a:schemeClr>
+            </a:gs>
+          </a:gsLst>
+          <a:lin ang="16200000" scaled="1"/>
+        </a:gradFill>
+        <a:gradFill rotWithShape="1">
+          <a:gsLst>
+            <a:gs pos="0">
+              <a:schemeClr val="phClr">
+                <a:tint val="100000"/>
+                <a:shade val="100000"/>
+                <a:satMod val="130000"/>
+              </a:schemeClr>
+            </a:gs>
+            <a:gs pos="100000">
+              <a:schemeClr val="phClr">
+                <a:tint val="50000"/>
+                <a:shade val="100000"/>
+                <a:satMod val="350000"/>
+              </a:schemeClr>
+            </a:gs>
+          </a:gsLst>
+          <a:lin ang="16200000" scaled="0"/>
+        </a:gradFill>
+      </a:fillStyleLst>
+      <a:lnStyleLst>
+        <a:ln w="9525" cap="flat" cmpd="sng" algn="ctr">
+          <a:solidFill>
+            <a:schemeClr val="phClr">
+              <a:shade val="95000"/>
+              <a:satMod val="105000"/>
+            </a:schemeClr>
+          </a:solidFill>
+          <a:prstDash val="solid"/>
+        </a:ln>
+        <a:ln w="25400" cap="flat" cmpd="sng" algn="ctr">
+          <a:solidFill>
+            <a:schemeClr val="phClr"/>
+          </a:solidFill>
+          <a:prstDash val="solid"/>
+        </a:ln>
+        <a:ln w="38100" cap="flat" cmpd="sng" algn="ctr">
+          <a:solidFill>
+            <a:schemeClr val="phClr"/>
+          </a:solidFill>
+          <a:prstDash val="solid"/>
+        </a:ln>
+      </a:lnStyleLst>
+      <a:effectStyleLst>
+        <a:effectStyle>
+          <a:effectLst>
+            <a:outerShdw blurRad="40000" dist="20000" dir="5400000" rotWithShape="0">
+              <a:srgbClr val="000000">
+                <a:alpha val="38000"/>
+              </a:srgbClr>
+            </a:outerShdw>
+          </a:effectLst>
+        </a:effectStyle>
+        <a:effectStyle>
+          <a:effectLst>
+            <a:outerShdw blurRad="40000" dist="23000" dir="5400000" rotWithShape="0">
+              <a:srgbClr val="000000">
+                <a:alpha val="35000"/>
+              </a:srgbClr>
+            </a:outerShdw>
+          </a:effectLst>
+        </a:effectStyle>
+        <a:effectStyle>
+          <a:effectLst>
+            <a:outerShdw blurRad="40000" dist="23000" dir="5400000" rotWithShape="0">
+              <a:srgbClr val="000000">
+                <a:alpha val="35000"/>
+              </a:srgbClr>
+            </a:outerShdw>
+          </a:effectLst>
+          <a:scene3d>
+            <a:camera prst="orthographicFront">
+              <a:rot lat="0" lon="0" rev="0"/>
+            </a:camera>
+            <a:lightRig rig="threePt" dir="t">
+              <a:rot lat="0" lon="0" rev="1200000"/>
+            </a:lightRig>
+          </a:scene3d>
+          <a:sp3d>
+            <a:bevelT w="63500" h="25400"/>
+          </a:sp3d>
+        </a:effectStyle>
+      </a:effectStyleLst>
+      <a:bgFillStyleLst>
+        <a:solidFill>
+          <a:schemeClr val="phClr"/>
+        </a:solidFill>
+        <a:gradFill rotWithShape="1">
+          <a:gsLst>
+            <a:gs pos="0">
+              <a:schemeClr val="phClr">
+                <a:tint val="40000"/>
+                <a:satMod val="350000"/>
+              </a:schemeClr>
+            </a:gs>
+            <a:gs pos="40000">
+              <a:schemeClr val="phClr">
+                <a:tint val="45000"/>
+                <a:shade val="99000"/>
+                <a:satMod val="350000"/>
+              </a:schemeClr>
+            </a:gs>
+            <a:gs pos="100000">
+              <a:schemeClr val="phClr">
+                <a:shade val="20000"/>
+                <a:satMod val="255000"/>
+              </a:schemeClr>
+            </a:gs>
+          </a:gsLst>
+          <a:path path="circle">
+            <a:fillToRect l="50000" t="-80000" r="50000" b="180000"/>
+          </a:path>
+        </a:gradFill>
+        <a:gradFill rotWithShape="1">
+          <a:gsLst>
+            <a:gs pos="0">
+              <a:schemeClr val="phClr">
+                <a:tint val="80000"/>
+                <a:satMod val="300000"/>
+              </a:schemeClr>
+            </a:gs>
+            <a:gs pos="100000">
+              <a:schemeClr val="phClr">
+                <a:shade val="30000"/>
+                <a:satMod val="200000"/>
+              </a:schemeClr>
+            </a:gs>
+          </a:gsLst>
+          <a:path path="circle">
+            <a:fillToRect l="50000" t="50000" r="50000" b="50000"/>
+          </a:path>
+        </a:gradFill>
+      </a:bgFillStyleLst>
+    </a:fmtScheme>
+  </a:themeElements>
+</a:theme>
+</file>
+
+<file path=ppt/theme/theme2.xml><?xml version="1.0" encoding="utf-8"?>
 <a:theme xmlns:a="http://schemas.openxmlformats.org/drawingml/2006/main" xmlns:r="http://schemas.openxmlformats.org/officeDocument/2006/relationships">
   <a:themeElements>
     <a:clrScheme name="Default">
@@ -31565,283 +33209,4 @@
     </a:fmtScheme>
   </a:themeElements>
 </a:theme>
-</file>
-
-<file path=ppt/theme/theme2.xml><?xml version="1.0" encoding="utf-8"?>
-<a:theme xmlns:a="http://schemas.openxmlformats.org/drawingml/2006/main" xmlns:r="http://schemas.openxmlformats.org/officeDocument/2006/relationships" name="la sapienza">
-  <a:themeElements>
-    <a:clrScheme name="">
-      <a:dk1>
-        <a:srgbClr val="822433"/>
-      </a:dk1>
-      <a:lt1>
-        <a:srgbClr val="FFFFFF"/>
-      </a:lt1>
-      <a:dk2>
-        <a:srgbClr val="822433"/>
-      </a:dk2>
-      <a:lt2>
-        <a:srgbClr val="808080"/>
-      </a:lt2>
-      <a:accent1>
-        <a:srgbClr val="BBE0E3"/>
-      </a:accent1>
-      <a:accent2>
-        <a:srgbClr val="FFFF00"/>
-      </a:accent2>
-      <a:accent3>
-        <a:srgbClr val="FFFFFF"/>
-      </a:accent3>
-      <a:accent4>
-        <a:srgbClr val="6E1D2A"/>
-      </a:accent4>
-      <a:accent5>
-        <a:srgbClr val="DAEDEF"/>
-      </a:accent5>
-      <a:accent6>
-        <a:srgbClr val="E7E700"/>
-      </a:accent6>
-      <a:hlink>
-        <a:srgbClr val="0000FF"/>
-      </a:hlink>
-      <a:folHlink>
-        <a:srgbClr val="FF0000"/>
-      </a:folHlink>
-    </a:clrScheme>
-    <a:fontScheme name="Office">
-      <a:majorFont>
-        <a:latin typeface="Arial"/>
-        <a:ea typeface=""/>
-        <a:cs typeface=""/>
-        <a:font script="Jpan" typeface="ＭＳ Ｐゴシック"/>
-        <a:font script="Hang" typeface="맑은 고딕"/>
-        <a:font script="Hans" typeface="宋体"/>
-        <a:font script="Hant" typeface="新細明體"/>
-        <a:font script="Arab" typeface="Times New Roman"/>
-        <a:font script="Hebr" typeface="Times New Roman"/>
-        <a:font script="Thai" typeface="Angsana New"/>
-        <a:font script="Ethi" typeface="Nyala"/>
-        <a:font script="Beng" typeface="Vrinda"/>
-        <a:font script="Gujr" typeface="Shruti"/>
-        <a:font script="Khmr" typeface="MoolBoran"/>
-        <a:font script="Knda" typeface="Tunga"/>
-        <a:font script="Guru" typeface="Raavi"/>
-        <a:font script="Cans" typeface="Euphemia"/>
-        <a:font script="Cher" typeface="Plantagenet Cherokee"/>
-        <a:font script="Yiii" typeface="Microsoft Yi Baiti"/>
-        <a:font script="Tibt" typeface="Microsoft Himalaya"/>
-        <a:font script="Thaa" typeface="MV Boli"/>
-        <a:font script="Deva" typeface="Mangal"/>
-        <a:font script="Telu" typeface="Gautami"/>
-        <a:font script="Taml" typeface="Latha"/>
-        <a:font script="Syrc" typeface="Estrangelo Edessa"/>
-        <a:font script="Orya" typeface="Kalinga"/>
-        <a:font script="Mlym" typeface="Kartika"/>
-        <a:font script="Laoo" typeface="DokChampa"/>
-        <a:font script="Sinh" typeface="Iskoola Pota"/>
-        <a:font script="Mong" typeface="Mongolian Baiti"/>
-        <a:font script="Viet" typeface="Times New Roman"/>
-        <a:font script="Uigh" typeface="Microsoft Uighur"/>
-        <a:font script="Geor" typeface="Sylfaen"/>
-      </a:majorFont>
-      <a:minorFont>
-        <a:latin typeface="Arial"/>
-        <a:ea typeface=""/>
-        <a:cs typeface=""/>
-        <a:font script="Jpan" typeface="ＭＳ Ｐゴシック"/>
-        <a:font script="Hang" typeface="맑은 고딕"/>
-        <a:font script="Hans" typeface="宋体"/>
-        <a:font script="Hant" typeface="新細明體"/>
-        <a:font script="Arab" typeface="Arial"/>
-        <a:font script="Hebr" typeface="Arial"/>
-        <a:font script="Thai" typeface="Cordia New"/>
-        <a:font script="Ethi" typeface="Nyala"/>
-        <a:font script="Beng" typeface="Vrinda"/>
-        <a:font script="Gujr" typeface="Shruti"/>
-        <a:font script="Khmr" typeface="DaunPenh"/>
-        <a:font script="Knda" typeface="Tunga"/>
-        <a:font script="Guru" typeface="Raavi"/>
-        <a:font script="Cans" typeface="Euphemia"/>
-        <a:font script="Cher" typeface="Plantagenet Cherokee"/>
-        <a:font script="Yiii" typeface="Microsoft Yi Baiti"/>
-        <a:font script="Tibt" typeface="Microsoft Himalaya"/>
-        <a:font script="Thaa" typeface="MV Boli"/>
-        <a:font script="Deva" typeface="Mangal"/>
-        <a:font script="Telu" typeface="Gautami"/>
-        <a:font script="Taml" typeface="Latha"/>
-        <a:font script="Syrc" typeface="Estrangelo Edessa"/>
-        <a:font script="Orya" typeface="Kalinga"/>
-        <a:font script="Mlym" typeface="Kartika"/>
-        <a:font script="Laoo" typeface="DokChampa"/>
-        <a:font script="Sinh" typeface="Iskoola Pota"/>
-        <a:font script="Mong" typeface="Mongolian Baiti"/>
-        <a:font script="Viet" typeface="Arial"/>
-        <a:font script="Uigh" typeface="Microsoft Uighur"/>
-        <a:font script="Geor" typeface="Sylfaen"/>
-      </a:minorFont>
-    </a:fontScheme>
-    <a:fmtScheme name="Office">
-      <a:fillStyleLst>
-        <a:solidFill>
-          <a:schemeClr val="phClr"/>
-        </a:solidFill>
-        <a:gradFill rotWithShape="1">
-          <a:gsLst>
-            <a:gs pos="0">
-              <a:schemeClr val="phClr">
-                <a:tint val="50000"/>
-                <a:satMod val="300000"/>
-              </a:schemeClr>
-            </a:gs>
-            <a:gs pos="35000">
-              <a:schemeClr val="phClr">
-                <a:tint val="37000"/>
-                <a:satMod val="300000"/>
-              </a:schemeClr>
-            </a:gs>
-            <a:gs pos="100000">
-              <a:schemeClr val="phClr">
-                <a:tint val="15000"/>
-                <a:satMod val="350000"/>
-              </a:schemeClr>
-            </a:gs>
-          </a:gsLst>
-          <a:lin ang="16200000" scaled="1"/>
-        </a:gradFill>
-        <a:gradFill rotWithShape="1">
-          <a:gsLst>
-            <a:gs pos="0">
-              <a:schemeClr val="phClr">
-                <a:tint val="100000"/>
-                <a:shade val="100000"/>
-                <a:satMod val="130000"/>
-              </a:schemeClr>
-            </a:gs>
-            <a:gs pos="100000">
-              <a:schemeClr val="phClr">
-                <a:tint val="50000"/>
-                <a:shade val="100000"/>
-                <a:satMod val="350000"/>
-              </a:schemeClr>
-            </a:gs>
-          </a:gsLst>
-          <a:lin ang="16200000" scaled="0"/>
-        </a:gradFill>
-      </a:fillStyleLst>
-      <a:lnStyleLst>
-        <a:ln w="9525" cap="flat" cmpd="sng" algn="ctr">
-          <a:solidFill>
-            <a:schemeClr val="phClr">
-              <a:shade val="95000"/>
-              <a:satMod val="105000"/>
-            </a:schemeClr>
-          </a:solidFill>
-          <a:prstDash val="solid"/>
-        </a:ln>
-        <a:ln w="25400" cap="flat" cmpd="sng" algn="ctr">
-          <a:solidFill>
-            <a:schemeClr val="phClr"/>
-          </a:solidFill>
-          <a:prstDash val="solid"/>
-        </a:ln>
-        <a:ln w="38100" cap="flat" cmpd="sng" algn="ctr">
-          <a:solidFill>
-            <a:schemeClr val="phClr"/>
-          </a:solidFill>
-          <a:prstDash val="solid"/>
-        </a:ln>
-      </a:lnStyleLst>
-      <a:effectStyleLst>
-        <a:effectStyle>
-          <a:effectLst>
-            <a:outerShdw blurRad="40000" dist="20000" dir="5400000" rotWithShape="0">
-              <a:srgbClr val="000000">
-                <a:alpha val="38000"/>
-              </a:srgbClr>
-            </a:outerShdw>
-          </a:effectLst>
-        </a:effectStyle>
-        <a:effectStyle>
-          <a:effectLst>
-            <a:outerShdw blurRad="40000" dist="23000" dir="5400000" rotWithShape="0">
-              <a:srgbClr val="000000">
-                <a:alpha val="35000"/>
-              </a:srgbClr>
-            </a:outerShdw>
-          </a:effectLst>
-        </a:effectStyle>
-        <a:effectStyle>
-          <a:effectLst>
-            <a:outerShdw blurRad="40000" dist="23000" dir="5400000" rotWithShape="0">
-              <a:srgbClr val="000000">
-                <a:alpha val="35000"/>
-              </a:srgbClr>
-            </a:outerShdw>
-          </a:effectLst>
-          <a:scene3d>
-            <a:camera prst="orthographicFront">
-              <a:rot lat="0" lon="0" rev="0"/>
-            </a:camera>
-            <a:lightRig rig="threePt" dir="t">
-              <a:rot lat="0" lon="0" rev="1200000"/>
-            </a:lightRig>
-          </a:scene3d>
-          <a:sp3d>
-            <a:bevelT w="63500" h="25400"/>
-          </a:sp3d>
-        </a:effectStyle>
-      </a:effectStyleLst>
-      <a:bgFillStyleLst>
-        <a:solidFill>
-          <a:schemeClr val="phClr"/>
-        </a:solidFill>
-        <a:gradFill rotWithShape="1">
-          <a:gsLst>
-            <a:gs pos="0">
-              <a:schemeClr val="phClr">
-                <a:tint val="40000"/>
-                <a:satMod val="350000"/>
-              </a:schemeClr>
-            </a:gs>
-            <a:gs pos="40000">
-              <a:schemeClr val="phClr">
-                <a:tint val="45000"/>
-                <a:shade val="99000"/>
-                <a:satMod val="350000"/>
-              </a:schemeClr>
-            </a:gs>
-            <a:gs pos="100000">
-              <a:schemeClr val="phClr">
-                <a:shade val="20000"/>
-                <a:satMod val="255000"/>
-              </a:schemeClr>
-            </a:gs>
-          </a:gsLst>
-          <a:path path="circle">
-            <a:fillToRect l="50000" t="-80000" r="50000" b="180000"/>
-          </a:path>
-        </a:gradFill>
-        <a:gradFill rotWithShape="1">
-          <a:gsLst>
-            <a:gs pos="0">
-              <a:schemeClr val="phClr">
-                <a:tint val="80000"/>
-                <a:satMod val="300000"/>
-              </a:schemeClr>
-            </a:gs>
-            <a:gs pos="100000">
-              <a:schemeClr val="phClr">
-                <a:shade val="30000"/>
-                <a:satMod val="200000"/>
-              </a:schemeClr>
-            </a:gs>
-          </a:gsLst>
-          <a:path path="circle">
-            <a:fillToRect l="50000" t="50000" r="50000" b="50000"/>
-          </a:path>
-        </a:gradFill>
-      </a:bgFillStyleLst>
-    </a:fmtScheme>
-  </a:themeElements>
-</a:theme>
 </file>